--- a/metrologia/slides/revisao-polegada-tolerancia.pptx
+++ b/metrologia/slides/revisao-polegada-tolerancia.pptx
@@ -9,19 +9,31 @@
   </p:notesMasterIdLst>
   <p:sldIdLst>
     <p:sldId id="400" r:id="rId6"/>
-    <p:sldId id="401" r:id="rId45"/>
-    <p:sldId id="402" r:id="rId46"/>
-    <p:sldId id="403" r:id="rId47"/>
-    <p:sldId id="404" r:id="rId48"/>
-    <p:sldId id="405" r:id="rId49"/>
-    <p:sldId id="406" r:id="rId51"/>
-    <p:sldId id="407" r:id="rId52"/>
-    <p:sldId id="408" r:id="rId970"/>
-    <p:sldId id="409" r:id="rId971"/>
-    <p:sldId id="410" r:id="rId972"/>
-    <p:sldId id="411" r:id="rId973"/>
-    <p:sldId id="412" r:id="rId974"/>
-    <p:sldId id="413" r:id="rId68"/>
+    <p:sldId id="401" r:id="rId970"/>
+    <p:sldId id="402" r:id="rId971"/>
+    <p:sldId id="403" r:id="rId972"/>
+    <p:sldId id="404" r:id="rId973"/>
+    <p:sldId id="405" r:id="rId980"/>
+    <p:sldId id="406" r:id="rId981"/>
+    <p:sldId id="407" r:id="rId982"/>
+    <p:sldId id="408" r:id="rId983"/>
+    <p:sldId id="409" r:id="rId975"/>
+    <p:sldId id="410" r:id="rId976"/>
+    <p:sldId id="411" r:id="rId45"/>
+    <p:sldId id="412" r:id="rId46"/>
+    <p:sldId id="413" r:id="rId47"/>
+    <p:sldId id="414" r:id="rId48"/>
+    <p:sldId id="415" r:id="rId49"/>
+    <p:sldId id="416" r:id="rId51"/>
+    <p:sldId id="417" r:id="rId52"/>
+    <p:sldId id="418" r:id="rId55"/>
+    <p:sldId id="419" r:id="rId56"/>
+    <p:sldId id="420" r:id="rId59"/>
+    <p:sldId id="421" r:id="rId60"/>
+    <p:sldId id="422" r:id="rId974"/>
+    <p:sldId id="423" r:id="rId977"/>
+    <p:sldId id="424" r:id="rId978"/>
+    <p:sldId id="425" r:id="rId68"/>
   </p:sldIdLst>
   <p:sldSz cy="6858000" cx="12192000"/>
   <p:notesSz cx="6858000" cy="9144000"/>
@@ -1320,6 +1332,238 @@
           <a:p>
             <a:r>
               <a:t>Caminho inverso: dada a medida, posicionar o cursor. Separe as polegadas inteiras. Divida os milésimos por 25 (porque cada tracinho vale 25 milésimos): o quociente diz quantos tracinhos passam na escala fixa e o resto diz qual traço do nônio deve coincidir. 238 ÷ 25 = 9 resto 13: 9 tracinhos = .225" (2 números pequenos e mais 1 tracinho). O nível Avançado do simulador treina isso.</a:t>
+            </a:r>
+          </a:p>
+        </p:txBody>
+      </p:sp>
+    </p:spTree>
+  </p:cSld>
+  <p:clrMapOvr>
+    <a:masterClrMapping/>
+  </p:clrMapOvr>
+</p:notes>
+</file>
+
+<file path=ppt/notesSlides/notesSlide49.xml><?xml version="1.0" encoding="utf-8"?>
+<p:notes xmlns:a="http://schemas.openxmlformats.org/drawingml/2006/main" xmlns:p="http://schemas.openxmlformats.org/presentationml/2006/main" xmlns:r="http://schemas.openxmlformats.org/officeDocument/2006/relationships">
+  <p:cSld>
+    <p:spTree>
+      <p:nvGrpSpPr>
+        <p:cNvPr id="1" name=""/>
+        <p:cNvGrpSpPr/>
+        <p:nvPr/>
+      </p:nvGrpSpPr>
+      <p:grpSpPr>
+        <a:xfrm>
+          <a:off x="0" y="0"/>
+          <a:ext cx="0" cy="0"/>
+          <a:chOff x="0" y="0"/>
+          <a:chExt cx="0" cy="0"/>
+        </a:xfrm>
+      </p:grpSpPr>
+      <p:sp>
+        <p:nvSpPr>
+          <p:cNvPr id="2" name="Slide Image Placeholder 1"/>
+          <p:cNvSpPr>
+            <a:spLocks noGrp="1"/>
+          </p:cNvSpPr>
+          <p:nvPr>
+            <p:ph type="sldImg" idx="2"/>
+          </p:nvPr>
+        </p:nvSpPr>
+        <p:spPr/>
+      </p:sp>
+      <p:sp>
+        <p:nvSpPr>
+          <p:cNvPr id="3" name="Notes Placeholder 2"/>
+          <p:cNvSpPr>
+            <a:spLocks noGrp="1"/>
+          </p:cNvSpPr>
+          <p:nvPr>
+            <p:ph type="body" idx="1"/>
+          </p:nvPr>
+        </p:nvSpPr>
+        <p:spPr/>
+        <p:txBody>
+          <a:bodyPr/>
+          <a:lstStyle/>
+          <a:p>
+            <a:r>
+              <a:t>A linha rosa mostra o traço do nônio que coincide com a escala fixa. Peça que os alunos preencham as três caixas: escala fixa, nônio e a soma. A resposta está no próximo slide. Escala fixa: .300" + 1 × .025" = .325". Nônio: 22º traço coincide = .022". Total .325" + .022" = .347".</a:t>
+            </a:r>
+          </a:p>
+        </p:txBody>
+      </p:sp>
+    </p:spTree>
+  </p:cSld>
+  <p:clrMapOvr>
+    <a:masterClrMapping/>
+  </p:clrMapOvr>
+</p:notes>
+</file>
+
+<file path=ppt/notesSlides/notesSlide50.xml><?xml version="1.0" encoding="utf-8"?>
+<p:notes xmlns:a="http://schemas.openxmlformats.org/drawingml/2006/main" xmlns:p="http://schemas.openxmlformats.org/presentationml/2006/main" xmlns:r="http://schemas.openxmlformats.org/officeDocument/2006/relationships">
+  <p:cSld>
+    <p:spTree>
+      <p:nvGrpSpPr>
+        <p:cNvPr id="1" name=""/>
+        <p:cNvGrpSpPr/>
+        <p:nvPr/>
+      </p:nvGrpSpPr>
+      <p:grpSpPr>
+        <a:xfrm>
+          <a:off x="0" y="0"/>
+          <a:ext cx="0" cy="0"/>
+          <a:chOff x="0" y="0"/>
+          <a:chExt cx="0" cy="0"/>
+        </a:xfrm>
+      </p:grpSpPr>
+      <p:sp>
+        <p:nvSpPr>
+          <p:cNvPr id="2" name="Slide Image Placeholder 1"/>
+          <p:cNvSpPr>
+            <a:spLocks noGrp="1"/>
+          </p:cNvSpPr>
+          <p:nvPr>
+            <p:ph type="sldImg" idx="2"/>
+          </p:nvPr>
+        </p:nvSpPr>
+        <p:spPr/>
+      </p:sp>
+      <p:sp>
+        <p:nvSpPr>
+          <p:cNvPr id="3" name="Notes Placeholder 2"/>
+          <p:cNvSpPr>
+            <a:spLocks noGrp="1"/>
+          </p:cNvSpPr>
+          <p:nvPr>
+            <p:ph type="body" idx="1"/>
+          </p:nvPr>
+        </p:nvSpPr>
+        <p:spPr/>
+        <p:txBody>
+          <a:bodyPr/>
+          <a:lstStyle/>
+          <a:p>
+            <a:r>
+              <a:t>Escala fixa: .300" + 1 × .025" = .325". Nônio: 22º traço coincide = .022". Total .325" + .022" = .347".</a:t>
+            </a:r>
+          </a:p>
+        </p:txBody>
+      </p:sp>
+    </p:spTree>
+  </p:cSld>
+  <p:clrMapOvr>
+    <a:masterClrMapping/>
+  </p:clrMapOvr>
+</p:notes>
+</file>
+
+<file path=ppt/notesSlides/notesSlide53.xml><?xml version="1.0" encoding="utf-8"?>
+<p:notes xmlns:a="http://schemas.openxmlformats.org/drawingml/2006/main" xmlns:p="http://schemas.openxmlformats.org/presentationml/2006/main" xmlns:r="http://schemas.openxmlformats.org/officeDocument/2006/relationships">
+  <p:cSld>
+    <p:spTree>
+      <p:nvGrpSpPr>
+        <p:cNvPr id="1" name=""/>
+        <p:cNvGrpSpPr/>
+        <p:nvPr/>
+      </p:nvGrpSpPr>
+      <p:grpSpPr>
+        <a:xfrm>
+          <a:off x="0" y="0"/>
+          <a:ext cx="0" cy="0"/>
+          <a:chOff x="0" y="0"/>
+          <a:chExt cx="0" cy="0"/>
+        </a:xfrm>
+      </p:grpSpPr>
+      <p:sp>
+        <p:nvSpPr>
+          <p:cNvPr id="2" name="Slide Image Placeholder 1"/>
+          <p:cNvSpPr>
+            <a:spLocks noGrp="1"/>
+          </p:cNvSpPr>
+          <p:nvPr>
+            <p:ph type="sldImg" idx="2"/>
+          </p:nvPr>
+        </p:nvSpPr>
+        <p:spPr/>
+      </p:sp>
+      <p:sp>
+        <p:nvSpPr>
+          <p:cNvPr id="3" name="Notes Placeholder 2"/>
+          <p:cNvSpPr>
+            <a:spLocks noGrp="1"/>
+          </p:cNvSpPr>
+          <p:nvPr>
+            <p:ph type="body" idx="1"/>
+          </p:nvPr>
+        </p:nvSpPr>
+        <p:spPr/>
+        <p:txBody>
+          <a:bodyPr/>
+          <a:lstStyle/>
+          <a:p>
+            <a:r>
+              <a:t>A linha rosa mostra o traço do nônio que coincide com a escala fixa. Peça que os alunos preencham as três caixas: escala fixa, nônio e a soma. A resposta está no próximo slide. Escala fixa: 2" + .500" = 2.500". Nônio: 6º traço coincide = .006". Total 2.500" + .006" = 2.506".</a:t>
+            </a:r>
+          </a:p>
+        </p:txBody>
+      </p:sp>
+    </p:spTree>
+  </p:cSld>
+  <p:clrMapOvr>
+    <a:masterClrMapping/>
+  </p:clrMapOvr>
+</p:notes>
+</file>
+
+<file path=ppt/notesSlides/notesSlide54.xml><?xml version="1.0" encoding="utf-8"?>
+<p:notes xmlns:a="http://schemas.openxmlformats.org/drawingml/2006/main" xmlns:p="http://schemas.openxmlformats.org/presentationml/2006/main" xmlns:r="http://schemas.openxmlformats.org/officeDocument/2006/relationships">
+  <p:cSld>
+    <p:spTree>
+      <p:nvGrpSpPr>
+        <p:cNvPr id="1" name=""/>
+        <p:cNvGrpSpPr/>
+        <p:nvPr/>
+      </p:nvGrpSpPr>
+      <p:grpSpPr>
+        <a:xfrm>
+          <a:off x="0" y="0"/>
+          <a:ext cx="0" cy="0"/>
+          <a:chOff x="0" y="0"/>
+          <a:chExt cx="0" cy="0"/>
+        </a:xfrm>
+      </p:grpSpPr>
+      <p:sp>
+        <p:nvSpPr>
+          <p:cNvPr id="2" name="Slide Image Placeholder 1"/>
+          <p:cNvSpPr>
+            <a:spLocks noGrp="1"/>
+          </p:cNvSpPr>
+          <p:nvPr>
+            <p:ph type="sldImg" idx="2"/>
+          </p:nvPr>
+        </p:nvSpPr>
+        <p:spPr/>
+      </p:sp>
+      <p:sp>
+        <p:nvSpPr>
+          <p:cNvPr id="3" name="Notes Placeholder 2"/>
+          <p:cNvSpPr>
+            <a:spLocks noGrp="1"/>
+          </p:cNvSpPr>
+          <p:nvPr>
+            <p:ph type="body" idx="1"/>
+          </p:nvPr>
+        </p:nvSpPr>
+        <p:spPr/>
+        <p:txBody>
+          <a:bodyPr/>
+          <a:lstStyle/>
+          <a:p>
+            <a:r>
+              <a:t>Escala fixa: 2" + .500" = 2.500". Nônio: 6º traço coincide = .006". Total 2.500" + .006" = 2.506".</a:t>
             </a:r>
           </a:p>
         </p:txBody>
@@ -14542,7 +14786,7 @@
                   <a:schemeClr val="lt1"/>
                 </a:solidFill>
               </a:rPr>
-              <a:t>Revisão: Polegada Milesimal e Tolerância</a:t>
+              <a:t>Revisão: Tolerância e Polegada Milesimal</a:t>
             </a:r>
             <a:endParaRPr b="1" sz="5300">
               <a:solidFill>
@@ -17208,7 +17452,7 @@
                 </a:solidFill>
                 <a:latin typeface="Calibri"/>
               </a:rPr>
-              <a:t>Exemplo 2: 1.721"</a:t>
+              <a:t>Exemplo: 1.721"</a:t>
             </a:r>
           </a:p>
         </p:txBody>
@@ -17953,6 +18197,2296 @@
           </a:prstGeom>
         </p:spPr>
       </p:pic>
+    </p:spTree>
+  </p:cSld>
+  <p:clrMapOvr>
+    <a:masterClrMapping/>
+  </p:clrMapOvr>
+</p:sld>
+</file>
+
+<file path=ppt/slides/slide49.xml><?xml version="1.0" encoding="utf-8"?>
+<p:sld xmlns:a="http://schemas.openxmlformats.org/drawingml/2006/main" xmlns:p="http://schemas.openxmlformats.org/presentationml/2006/main" xmlns:r="http://schemas.openxmlformats.org/officeDocument/2006/relationships">
+  <p:cSld>
+    <p:spTree>
+      <p:nvGrpSpPr>
+        <p:cNvPr id="1" name=""/>
+        <p:cNvGrpSpPr/>
+        <p:nvPr/>
+      </p:nvGrpSpPr>
+      <p:grpSpPr/>
+      <p:pic>
+        <p:nvPicPr>
+          <p:cNvPr id="3" name="Fundo CEEP" descr="image.png"/>
+          <p:cNvPicPr>
+            <a:picLocks noChangeAspect="1"/>
+          </p:cNvPicPr>
+          <p:nvPr/>
+        </p:nvPicPr>
+        <p:blipFill>
+          <a:blip r:embed="rId2"/>
+          <a:stretch>
+            <a:fillRect/>
+          </a:stretch>
+        </p:blipFill>
+        <p:spPr>
+          <a:xfrm>
+            <a:off x="-27432" y="0"/>
+            <a:ext cx="12225528" cy="6858000"/>
+          </a:xfrm>
+          <a:prstGeom prst="rect">
+            <a:avLst/>
+          </a:prstGeom>
+        </p:spPr>
+      </p:pic>
+      <p:sp>
+        <p:nvSpPr>
+          <p:cNvPr id="2" name="Title 1"/>
+          <p:cNvSpPr>
+            <a:spLocks noGrp="1"/>
+          </p:cNvSpPr>
+          <p:nvPr>
+            <p:ph type="title"/>
+          </p:nvPr>
+        </p:nvSpPr>
+        <p:spPr>
+          <a:xfrm>
+            <a:off x="457200" y="713232"/>
+            <a:ext cx="9509760" cy="1051560"/>
+          </a:xfrm>
+        </p:spPr>
+        <p:txBody>
+          <a:bodyPr anchor="ctr"/>
+          <a:lstStyle/>
+          <a:p>
+            <a:r>
+              <a:rPr sz="3800" b="1">
+                <a:solidFill>
+                  <a:srgbClr val="C00000"/>
+                </a:solidFill>
+                <a:latin typeface="Calibri"/>
+              </a:rPr>
+              <a:t>Exercício 4</a:t>
+            </a:r>
+          </a:p>
+        </p:txBody>
+      </p:sp>
+      <p:sp>
+        <p:nvSpPr>
+          <p:cNvPr id="4" name="TextBox 3"/>
+          <p:cNvSpPr txBox="1"/>
+          <p:nvPr/>
+        </p:nvSpPr>
+        <p:spPr>
+          <a:xfrm>
+            <a:off x="548640" y="2011680"/>
+            <a:ext cx="7818120" cy="548640"/>
+          </a:xfrm>
+          <a:prstGeom prst="rect">
+            <a:avLst/>
+          </a:prstGeom>
+          <a:noFill/>
+        </p:spPr>
+        <p:txBody>
+          <a:bodyPr wrap="square" lIns="0" rIns="0" tIns="0" bIns="0" anchor="t">
+            <a:spAutoFit/>
+          </a:bodyPr>
+          <a:lstStyle/>
+          <a:p>
+            <a:pPr algn="l"/>
+            <a:r>
+              <a:rPr sz="2400" b="0">
+                <a:solidFill>
+                  <a:srgbClr val="002060"/>
+                </a:solidFill>
+                <a:latin typeface="Calibri"/>
+              </a:rPr>
+              <a:t>Qual é a leitura? A </a:t>
+            </a:r>
+            <a:r>
+              <a:rPr sz="2400" b="1">
+                <a:solidFill>
+                  <a:srgbClr val="E01E84"/>
+                </a:solidFill>
+                <a:latin typeface="Calibri"/>
+              </a:rPr>
+              <a:t>linha rosa</a:t>
+            </a:r>
+            <a:r>
+              <a:rPr sz="2400" b="0">
+                <a:solidFill>
+                  <a:srgbClr val="002060"/>
+                </a:solidFill>
+                <a:latin typeface="Calibri"/>
+              </a:rPr>
+              <a:t> mostra o traço que coincide.</a:t>
+            </a:r>
+          </a:p>
+        </p:txBody>
+      </p:sp>
+      <p:pic>
+        <p:nvPicPr>
+          <p:cNvPr id="5" name="Paquímetro" descr="Exercício 1: paquímetro milesimal com o traço coincidente marcado"/>
+          <p:cNvPicPr>
+            <a:picLocks noChangeAspect="1"/>
+          </p:cNvPicPr>
+          <p:nvPr/>
+        </p:nvPicPr>
+        <p:blipFill>
+          <a:blip r:embed="rId4"/>
+          <a:stretch>
+            <a:fillRect/>
+          </a:stretch>
+        </p:blipFill>
+        <p:spPr>
+          <a:xfrm>
+            <a:off x="548640" y="2697480"/>
+            <a:ext cx="7818120" cy="2353579"/>
+          </a:xfrm>
+          <a:prstGeom prst="rect">
+            <a:avLst/>
+          </a:prstGeom>
+        </p:spPr>
+      </p:pic>
+      <p:sp>
+        <p:nvSpPr>
+          <p:cNvPr id="6" name="TextBox 5"/>
+          <p:cNvSpPr txBox="1"/>
+          <p:nvPr/>
+        </p:nvSpPr>
+        <p:spPr>
+          <a:xfrm>
+            <a:off x="8915400" y="2057400"/>
+            <a:ext cx="2743200" cy="320040"/>
+          </a:xfrm>
+          <a:prstGeom prst="rect">
+            <a:avLst/>
+          </a:prstGeom>
+          <a:noFill/>
+        </p:spPr>
+        <p:txBody>
+          <a:bodyPr wrap="square" lIns="0" rIns="0" tIns="0" bIns="0" anchor="t">
+            <a:spAutoFit/>
+          </a:bodyPr>
+          <a:lstStyle/>
+          <a:p>
+            <a:pPr algn="l"/>
+            <a:r>
+              <a:rPr sz="1800" b="0">
+                <a:solidFill>
+                  <a:srgbClr val="4A5568"/>
+                </a:solidFill>
+                <a:latin typeface="Calibri"/>
+              </a:rPr>
+              <a:t>Escala fixa</a:t>
+            </a:r>
+          </a:p>
+        </p:txBody>
+      </p:sp>
+      <p:sp>
+        <p:nvSpPr>
+          <p:cNvPr id="7" name="Caixa Escala fixa"/>
+          <p:cNvSpPr/>
+          <p:nvPr/>
+        </p:nvSpPr>
+        <p:spPr>
+          <a:xfrm>
+            <a:off x="8915400" y="2404872"/>
+            <a:ext cx="2743200" cy="658368"/>
+          </a:xfrm>
+          <a:prstGeom prst="rect">
+            <a:avLst/>
+          </a:prstGeom>
+          <a:solidFill>
+            <a:srgbClr val="FFFFFF"/>
+          </a:solidFill>
+          <a:ln w="19050">
+            <a:solidFill>
+              <a:srgbClr val="002060"/>
+            </a:solidFill>
+          </a:ln>
+          <a:effectLst/>
+        </p:spPr>
+        <p:style>
+          <a:lnRef idx="1">
+            <a:schemeClr val="accent1"/>
+          </a:lnRef>
+          <a:fillRef idx="3">
+            <a:schemeClr val="accent1"/>
+          </a:fillRef>
+          <a:effectRef idx="2">
+            <a:schemeClr val="accent1"/>
+          </a:effectRef>
+          <a:fontRef idx="minor">
+            <a:schemeClr val="lt1"/>
+          </a:fontRef>
+        </p:style>
+        <p:txBody>
+          <a:bodyPr rtlCol="0" anchor="ctr"/>
+          <a:lstStyle/>
+          <a:p>
+            <a:pPr algn="ctr"/>
+          </a:p>
+        </p:txBody>
+      </p:sp>
+      <p:sp>
+        <p:nvSpPr>
+          <p:cNvPr id="8" name="TextBox 7"/>
+          <p:cNvSpPr txBox="1"/>
+          <p:nvPr/>
+        </p:nvSpPr>
+        <p:spPr>
+          <a:xfrm>
+            <a:off x="8915400" y="3154680"/>
+            <a:ext cx="2743200" cy="320040"/>
+          </a:xfrm>
+          <a:prstGeom prst="rect">
+            <a:avLst/>
+          </a:prstGeom>
+          <a:noFill/>
+        </p:spPr>
+        <p:txBody>
+          <a:bodyPr wrap="square" lIns="0" rIns="0" tIns="0" bIns="0" anchor="t">
+            <a:spAutoFit/>
+          </a:bodyPr>
+          <a:lstStyle/>
+          <a:p>
+            <a:pPr algn="l"/>
+            <a:r>
+              <a:rPr sz="1800" b="0">
+                <a:solidFill>
+                  <a:srgbClr val="4A5568"/>
+                </a:solidFill>
+                <a:latin typeface="Calibri"/>
+              </a:rPr>
+              <a:t>Nônio</a:t>
+            </a:r>
+          </a:p>
+        </p:txBody>
+      </p:sp>
+      <p:sp>
+        <p:nvSpPr>
+          <p:cNvPr id="9" name="Caixa Nônio"/>
+          <p:cNvSpPr/>
+          <p:nvPr/>
+        </p:nvSpPr>
+        <p:spPr>
+          <a:xfrm>
+            <a:off x="8915400" y="3502152"/>
+            <a:ext cx="2743200" cy="658368"/>
+          </a:xfrm>
+          <a:prstGeom prst="rect">
+            <a:avLst/>
+          </a:prstGeom>
+          <a:solidFill>
+            <a:srgbClr val="FFFFFF"/>
+          </a:solidFill>
+          <a:ln w="19050">
+            <a:solidFill>
+              <a:srgbClr val="002060"/>
+            </a:solidFill>
+          </a:ln>
+          <a:effectLst/>
+        </p:spPr>
+        <p:style>
+          <a:lnRef idx="1">
+            <a:schemeClr val="accent1"/>
+          </a:lnRef>
+          <a:fillRef idx="3">
+            <a:schemeClr val="accent1"/>
+          </a:fillRef>
+          <a:effectRef idx="2">
+            <a:schemeClr val="accent1"/>
+          </a:effectRef>
+          <a:fontRef idx="minor">
+            <a:schemeClr val="lt1"/>
+          </a:fontRef>
+        </p:style>
+        <p:txBody>
+          <a:bodyPr rtlCol="0" anchor="ctr"/>
+          <a:lstStyle/>
+          <a:p>
+            <a:pPr algn="ctr"/>
+          </a:p>
+        </p:txBody>
+      </p:sp>
+      <p:sp>
+        <p:nvSpPr>
+          <p:cNvPr id="10" name="TextBox 9"/>
+          <p:cNvSpPr txBox="1"/>
+          <p:nvPr/>
+        </p:nvSpPr>
+        <p:spPr>
+          <a:xfrm>
+            <a:off x="8412480" y="3502152"/>
+            <a:ext cx="411480" cy="658368"/>
+          </a:xfrm>
+          <a:prstGeom prst="rect">
+            <a:avLst/>
+          </a:prstGeom>
+          <a:noFill/>
+        </p:spPr>
+        <p:txBody>
+          <a:bodyPr wrap="square" lIns="0" rIns="0" tIns="0" bIns="0" anchor="ctr">
+            <a:spAutoFit/>
+          </a:bodyPr>
+          <a:lstStyle/>
+          <a:p>
+            <a:pPr algn="r"/>
+            <a:r>
+              <a:rPr sz="3600" b="1">
+                <a:solidFill>
+                  <a:srgbClr val="4A5568"/>
+                </a:solidFill>
+                <a:latin typeface="Calibri"/>
+              </a:rPr>
+              <a:t>+</a:t>
+            </a:r>
+          </a:p>
+        </p:txBody>
+      </p:sp>
+      <p:sp>
+        <p:nvSpPr>
+          <p:cNvPr id="11" name="TextBox 10"/>
+          <p:cNvSpPr txBox="1"/>
+          <p:nvPr/>
+        </p:nvSpPr>
+        <p:spPr>
+          <a:xfrm>
+            <a:off x="8915400" y="4453128"/>
+            <a:ext cx="2743200" cy="320040"/>
+          </a:xfrm>
+          <a:prstGeom prst="rect">
+            <a:avLst/>
+          </a:prstGeom>
+          <a:noFill/>
+        </p:spPr>
+        <p:txBody>
+          <a:bodyPr wrap="square" lIns="0" rIns="0" tIns="0" bIns="0" anchor="t">
+            <a:spAutoFit/>
+          </a:bodyPr>
+          <a:lstStyle/>
+          <a:p>
+            <a:pPr algn="l"/>
+            <a:r>
+              <a:rPr sz="1800" b="0">
+                <a:solidFill>
+                  <a:srgbClr val="4A5568"/>
+                </a:solidFill>
+                <a:latin typeface="Calibri"/>
+              </a:rPr>
+              <a:t>Leitura</a:t>
+            </a:r>
+          </a:p>
+        </p:txBody>
+      </p:sp>
+      <p:sp>
+        <p:nvSpPr>
+          <p:cNvPr id="12" name="Caixa Leitura"/>
+          <p:cNvSpPr/>
+          <p:nvPr/>
+        </p:nvSpPr>
+        <p:spPr>
+          <a:xfrm>
+            <a:off x="8915400" y="4800600"/>
+            <a:ext cx="2743200" cy="658368"/>
+          </a:xfrm>
+          <a:prstGeom prst="rect">
+            <a:avLst/>
+          </a:prstGeom>
+          <a:solidFill>
+            <a:srgbClr val="FFFFFF"/>
+          </a:solidFill>
+          <a:ln w="19050">
+            <a:solidFill>
+              <a:srgbClr val="002060"/>
+            </a:solidFill>
+          </a:ln>
+          <a:effectLst/>
+        </p:spPr>
+        <p:style>
+          <a:lnRef idx="1">
+            <a:schemeClr val="accent1"/>
+          </a:lnRef>
+          <a:fillRef idx="3">
+            <a:schemeClr val="accent1"/>
+          </a:fillRef>
+          <a:effectRef idx="2">
+            <a:schemeClr val="accent1"/>
+          </a:effectRef>
+          <a:fontRef idx="minor">
+            <a:schemeClr val="lt1"/>
+          </a:fontRef>
+        </p:style>
+        <p:txBody>
+          <a:bodyPr rtlCol="0" anchor="ctr"/>
+          <a:lstStyle/>
+          <a:p>
+            <a:pPr algn="ctr"/>
+          </a:p>
+        </p:txBody>
+      </p:sp>
+      <p:sp>
+        <p:nvSpPr>
+          <p:cNvPr id="13" name="TextBox 12"/>
+          <p:cNvSpPr txBox="1"/>
+          <p:nvPr/>
+        </p:nvSpPr>
+        <p:spPr>
+          <a:xfrm>
+            <a:off x="8412480" y="4800600"/>
+            <a:ext cx="411480" cy="658368"/>
+          </a:xfrm>
+          <a:prstGeom prst="rect">
+            <a:avLst/>
+          </a:prstGeom>
+          <a:noFill/>
+        </p:spPr>
+        <p:txBody>
+          <a:bodyPr wrap="square" lIns="0" rIns="0" tIns="0" bIns="0" anchor="ctr">
+            <a:spAutoFit/>
+          </a:bodyPr>
+          <a:lstStyle/>
+          <a:p>
+            <a:pPr algn="r"/>
+            <a:r>
+              <a:rPr sz="3600" b="1">
+                <a:solidFill>
+                  <a:srgbClr val="4A5568"/>
+                </a:solidFill>
+                <a:latin typeface="Calibri"/>
+              </a:rPr>
+              <a:t>=</a:t>
+            </a:r>
+          </a:p>
+        </p:txBody>
+      </p:sp>
+      <p:cxnSp>
+        <p:nvCxnSpPr>
+          <p:cNvPr id="14" name="Traço da soma"/>
+          <p:cNvCxnSpPr/>
+          <p:nvPr/>
+        </p:nvCxnSpPr>
+        <p:spPr>
+          <a:xfrm>
+            <a:off x="8412480" y="4325112"/>
+            <a:ext cx="3246120" cy="0"/>
+          </a:xfrm>
+          <a:prstGeom prst="line">
+            <a:avLst/>
+          </a:prstGeom>
+          <a:ln w="38100">
+            <a:solidFill>
+              <a:srgbClr val="002060"/>
+            </a:solidFill>
+          </a:ln>
+        </p:spPr>
+        <p:style>
+          <a:lnRef idx="2">
+            <a:schemeClr val="accent1"/>
+          </a:lnRef>
+          <a:fillRef idx="0">
+            <a:schemeClr val="accent1"/>
+          </a:fillRef>
+          <a:effectRef idx="1">
+            <a:schemeClr val="accent1"/>
+          </a:effectRef>
+          <a:fontRef idx="minor">
+            <a:schemeClr val="tx1"/>
+          </a:fontRef>
+        </p:style>
+      </p:cxnSp>
+    </p:spTree>
+  </p:cSld>
+  <p:clrMapOvr>
+    <a:masterClrMapping/>
+  </p:clrMapOvr>
+</p:sld>
+</file>
+
+<file path=ppt/slides/slide50.xml><?xml version="1.0" encoding="utf-8"?>
+<p:sld xmlns:a="http://schemas.openxmlformats.org/drawingml/2006/main" xmlns:p="http://schemas.openxmlformats.org/presentationml/2006/main" xmlns:r="http://schemas.openxmlformats.org/officeDocument/2006/relationships">
+  <p:cSld>
+    <p:spTree>
+      <p:nvGrpSpPr>
+        <p:cNvPr id="1" name=""/>
+        <p:cNvGrpSpPr/>
+        <p:nvPr/>
+      </p:nvGrpSpPr>
+      <p:grpSpPr/>
+      <p:pic>
+        <p:nvPicPr>
+          <p:cNvPr id="3" name="Fundo CEEP" descr="image.png"/>
+          <p:cNvPicPr>
+            <a:picLocks noChangeAspect="1"/>
+          </p:cNvPicPr>
+          <p:nvPr/>
+        </p:nvPicPr>
+        <p:blipFill>
+          <a:blip r:embed="rId2"/>
+          <a:stretch>
+            <a:fillRect/>
+          </a:stretch>
+        </p:blipFill>
+        <p:spPr>
+          <a:xfrm>
+            <a:off x="-27432" y="0"/>
+            <a:ext cx="12225528" cy="6858000"/>
+          </a:xfrm>
+          <a:prstGeom prst="rect">
+            <a:avLst/>
+          </a:prstGeom>
+        </p:spPr>
+      </p:pic>
+      <p:sp>
+        <p:nvSpPr>
+          <p:cNvPr id="2" name="Title 1"/>
+          <p:cNvSpPr>
+            <a:spLocks noGrp="1"/>
+          </p:cNvSpPr>
+          <p:nvPr>
+            <p:ph type="title"/>
+          </p:nvPr>
+        </p:nvSpPr>
+        <p:spPr>
+          <a:xfrm>
+            <a:off x="457200" y="713232"/>
+            <a:ext cx="9509760" cy="1051560"/>
+          </a:xfrm>
+        </p:spPr>
+        <p:txBody>
+          <a:bodyPr anchor="ctr"/>
+          <a:lstStyle/>
+          <a:p>
+            <a:r>
+              <a:rPr sz="3800" b="1">
+                <a:solidFill>
+                  <a:srgbClr val="C00000"/>
+                </a:solidFill>
+                <a:latin typeface="Calibri"/>
+              </a:rPr>
+              <a:t>Exercício 4: resposta</a:t>
+            </a:r>
+          </a:p>
+        </p:txBody>
+      </p:sp>
+      <p:sp>
+        <p:nvSpPr>
+          <p:cNvPr id="4" name="TextBox 3"/>
+          <p:cNvSpPr txBox="1"/>
+          <p:nvPr/>
+        </p:nvSpPr>
+        <p:spPr>
+          <a:xfrm>
+            <a:off x="548640" y="2011680"/>
+            <a:ext cx="7818120" cy="548640"/>
+          </a:xfrm>
+          <a:prstGeom prst="rect">
+            <a:avLst/>
+          </a:prstGeom>
+          <a:noFill/>
+        </p:spPr>
+        <p:txBody>
+          <a:bodyPr wrap="square" lIns="0" rIns="0" tIns="0" bIns="0" anchor="t">
+            <a:spAutoFit/>
+          </a:bodyPr>
+          <a:lstStyle/>
+          <a:p>
+            <a:pPr algn="l"/>
+            <a:r>
+              <a:rPr sz="2400" b="1">
+                <a:solidFill>
+                  <a:srgbClr val="C86A00"/>
+                </a:solidFill>
+                <a:latin typeface="Calibri"/>
+              </a:rPr>
+              <a:t>Tracejado: </a:t>
+            </a:r>
+            <a:r>
+              <a:rPr sz="2400" b="0">
+                <a:solidFill>
+                  <a:srgbClr val="002060"/>
+                </a:solidFill>
+                <a:latin typeface="Calibri"/>
+              </a:rPr>
+              <a:t>escala fixa   </a:t>
+            </a:r>
+            <a:r>
+              <a:rPr sz="2400" b="1">
+                <a:solidFill>
+                  <a:srgbClr val="C86A00"/>
+                </a:solidFill>
+                <a:latin typeface="Calibri"/>
+              </a:rPr>
+              <a:t>Linha cheia: </a:t>
+            </a:r>
+            <a:r>
+              <a:rPr sz="2400" b="0">
+                <a:solidFill>
+                  <a:srgbClr val="002060"/>
+                </a:solidFill>
+                <a:latin typeface="Calibri"/>
+              </a:rPr>
+              <a:t>traço do nônio</a:t>
+            </a:r>
+          </a:p>
+        </p:txBody>
+      </p:sp>
+      <p:pic>
+        <p:nvPicPr>
+          <p:cNvPr id="5" name="Paquímetro" descr="Exercício 1: resposta, com a escala fixa e o traço do nônio marcados"/>
+          <p:cNvPicPr>
+            <a:picLocks noChangeAspect="1"/>
+          </p:cNvPicPr>
+          <p:nvPr/>
+        </p:nvPicPr>
+        <p:blipFill>
+          <a:blip r:embed="rId4"/>
+          <a:stretch>
+            <a:fillRect/>
+          </a:stretch>
+        </p:blipFill>
+        <p:spPr>
+          <a:xfrm>
+            <a:off x="548640" y="2697480"/>
+            <a:ext cx="7818120" cy="2353579"/>
+          </a:xfrm>
+          <a:prstGeom prst="rect">
+            <a:avLst/>
+          </a:prstGeom>
+        </p:spPr>
+      </p:pic>
+      <p:sp>
+        <p:nvSpPr>
+          <p:cNvPr id="6" name="TextBox 5"/>
+          <p:cNvSpPr txBox="1"/>
+          <p:nvPr/>
+        </p:nvSpPr>
+        <p:spPr>
+          <a:xfrm>
+            <a:off x="548640" y="5188219"/>
+            <a:ext cx="7818120" cy="822960"/>
+          </a:xfrm>
+          <a:prstGeom prst="rect">
+            <a:avLst/>
+          </a:prstGeom>
+          <a:noFill/>
+        </p:spPr>
+        <p:txBody>
+          <a:bodyPr wrap="square" lIns="0" rIns="0" tIns="0" bIns="0" anchor="t">
+            <a:spAutoFit/>
+          </a:bodyPr>
+          <a:lstStyle/>
+          <a:p>
+            <a:pPr algn="l"/>
+            <a:r>
+              <a:rPr sz="2200" b="0">
+                <a:solidFill>
+                  <a:srgbClr val="4A5568"/>
+                </a:solidFill>
+                <a:latin typeface="Calibri"/>
+              </a:rPr>
+              <a:t>Escala fixa: .300" + 1 × .025" = .325"   ·   nônio: 22º traço = .022"</a:t>
+            </a:r>
+          </a:p>
+        </p:txBody>
+      </p:sp>
+      <p:sp>
+        <p:nvSpPr>
+          <p:cNvPr id="7" name="TextBox 6"/>
+          <p:cNvSpPr txBox="1"/>
+          <p:nvPr/>
+        </p:nvSpPr>
+        <p:spPr>
+          <a:xfrm>
+            <a:off x="8915400" y="2057400"/>
+            <a:ext cx="2743200" cy="320040"/>
+          </a:xfrm>
+          <a:prstGeom prst="rect">
+            <a:avLst/>
+          </a:prstGeom>
+          <a:noFill/>
+        </p:spPr>
+        <p:txBody>
+          <a:bodyPr wrap="square" lIns="0" rIns="0" tIns="0" bIns="0" anchor="t">
+            <a:spAutoFit/>
+          </a:bodyPr>
+          <a:lstStyle/>
+          <a:p>
+            <a:pPr algn="l"/>
+            <a:r>
+              <a:rPr sz="1800" b="0">
+                <a:solidFill>
+                  <a:srgbClr val="4A5568"/>
+                </a:solidFill>
+                <a:latin typeface="Calibri"/>
+              </a:rPr>
+              <a:t>Escala fixa</a:t>
+            </a:r>
+          </a:p>
+        </p:txBody>
+      </p:sp>
+      <p:sp>
+        <p:nvSpPr>
+          <p:cNvPr id="8" name="Caixa Escala fixa"/>
+          <p:cNvSpPr/>
+          <p:nvPr/>
+        </p:nvSpPr>
+        <p:spPr>
+          <a:xfrm>
+            <a:off x="8915400" y="2404872"/>
+            <a:ext cx="2743200" cy="658368"/>
+          </a:xfrm>
+          <a:prstGeom prst="rect">
+            <a:avLst/>
+          </a:prstGeom>
+          <a:solidFill>
+            <a:srgbClr val="FFFFFF"/>
+          </a:solidFill>
+          <a:ln w="19050">
+            <a:solidFill>
+              <a:srgbClr val="002060"/>
+            </a:solidFill>
+          </a:ln>
+          <a:effectLst/>
+        </p:spPr>
+        <p:style>
+          <a:lnRef idx="1">
+            <a:schemeClr val="accent1"/>
+          </a:lnRef>
+          <a:fillRef idx="3">
+            <a:schemeClr val="accent1"/>
+          </a:fillRef>
+          <a:effectRef idx="2">
+            <a:schemeClr val="accent1"/>
+          </a:effectRef>
+          <a:fontRef idx="minor">
+            <a:schemeClr val="lt1"/>
+          </a:fontRef>
+        </p:style>
+        <p:txBody>
+          <a:bodyPr rtlCol="0" anchor="ctr"/>
+          <a:lstStyle/>
+          <a:p>
+            <a:pPr algn="ctr"/>
+          </a:p>
+        </p:txBody>
+      </p:sp>
+      <p:sp>
+        <p:nvSpPr>
+          <p:cNvPr id="9" name="TextBox 8"/>
+          <p:cNvSpPr txBox="1"/>
+          <p:nvPr/>
+        </p:nvSpPr>
+        <p:spPr>
+          <a:xfrm>
+            <a:off x="9006840" y="2404872"/>
+            <a:ext cx="2468880" cy="658368"/>
+          </a:xfrm>
+          <a:prstGeom prst="rect">
+            <a:avLst/>
+          </a:prstGeom>
+          <a:noFill/>
+        </p:spPr>
+        <p:txBody>
+          <a:bodyPr wrap="square" lIns="0" rIns="0" tIns="0" bIns="0" anchor="ctr">
+            <a:spAutoFit/>
+          </a:bodyPr>
+          <a:lstStyle/>
+          <a:p>
+            <a:pPr algn="r"/>
+            <a:r>
+              <a:rPr sz="3400" b="1">
+                <a:solidFill>
+                  <a:srgbClr val="002060"/>
+                </a:solidFill>
+                <a:latin typeface="Calibri"/>
+              </a:rPr>
+              <a:t>.325"</a:t>
+            </a:r>
+          </a:p>
+        </p:txBody>
+      </p:sp>
+      <p:sp>
+        <p:nvSpPr>
+          <p:cNvPr id="10" name="TextBox 9"/>
+          <p:cNvSpPr txBox="1"/>
+          <p:nvPr/>
+        </p:nvSpPr>
+        <p:spPr>
+          <a:xfrm>
+            <a:off x="8915400" y="3154680"/>
+            <a:ext cx="2743200" cy="320040"/>
+          </a:xfrm>
+          <a:prstGeom prst="rect">
+            <a:avLst/>
+          </a:prstGeom>
+          <a:noFill/>
+        </p:spPr>
+        <p:txBody>
+          <a:bodyPr wrap="square" lIns="0" rIns="0" tIns="0" bIns="0" anchor="t">
+            <a:spAutoFit/>
+          </a:bodyPr>
+          <a:lstStyle/>
+          <a:p>
+            <a:pPr algn="l"/>
+            <a:r>
+              <a:rPr sz="1800" b="0">
+                <a:solidFill>
+                  <a:srgbClr val="4A5568"/>
+                </a:solidFill>
+                <a:latin typeface="Calibri"/>
+              </a:rPr>
+              <a:t>Nônio</a:t>
+            </a:r>
+          </a:p>
+        </p:txBody>
+      </p:sp>
+      <p:sp>
+        <p:nvSpPr>
+          <p:cNvPr id="11" name="Caixa Nônio"/>
+          <p:cNvSpPr/>
+          <p:nvPr/>
+        </p:nvSpPr>
+        <p:spPr>
+          <a:xfrm>
+            <a:off x="8915400" y="3502152"/>
+            <a:ext cx="2743200" cy="658368"/>
+          </a:xfrm>
+          <a:prstGeom prst="rect">
+            <a:avLst/>
+          </a:prstGeom>
+          <a:solidFill>
+            <a:srgbClr val="FFFFFF"/>
+          </a:solidFill>
+          <a:ln w="19050">
+            <a:solidFill>
+              <a:srgbClr val="002060"/>
+            </a:solidFill>
+          </a:ln>
+          <a:effectLst/>
+        </p:spPr>
+        <p:style>
+          <a:lnRef idx="1">
+            <a:schemeClr val="accent1"/>
+          </a:lnRef>
+          <a:fillRef idx="3">
+            <a:schemeClr val="accent1"/>
+          </a:fillRef>
+          <a:effectRef idx="2">
+            <a:schemeClr val="accent1"/>
+          </a:effectRef>
+          <a:fontRef idx="minor">
+            <a:schemeClr val="lt1"/>
+          </a:fontRef>
+        </p:style>
+        <p:txBody>
+          <a:bodyPr rtlCol="0" anchor="ctr"/>
+          <a:lstStyle/>
+          <a:p>
+            <a:pPr algn="ctr"/>
+          </a:p>
+        </p:txBody>
+      </p:sp>
+      <p:sp>
+        <p:nvSpPr>
+          <p:cNvPr id="12" name="TextBox 11"/>
+          <p:cNvSpPr txBox="1"/>
+          <p:nvPr/>
+        </p:nvSpPr>
+        <p:spPr>
+          <a:xfrm>
+            <a:off x="8412480" y="3502152"/>
+            <a:ext cx="411480" cy="658368"/>
+          </a:xfrm>
+          <a:prstGeom prst="rect">
+            <a:avLst/>
+          </a:prstGeom>
+          <a:noFill/>
+        </p:spPr>
+        <p:txBody>
+          <a:bodyPr wrap="square" lIns="0" rIns="0" tIns="0" bIns="0" anchor="ctr">
+            <a:spAutoFit/>
+          </a:bodyPr>
+          <a:lstStyle/>
+          <a:p>
+            <a:pPr algn="r"/>
+            <a:r>
+              <a:rPr sz="3600" b="1">
+                <a:solidFill>
+                  <a:srgbClr val="4A5568"/>
+                </a:solidFill>
+                <a:latin typeface="Calibri"/>
+              </a:rPr>
+              <a:t>+</a:t>
+            </a:r>
+          </a:p>
+        </p:txBody>
+      </p:sp>
+      <p:sp>
+        <p:nvSpPr>
+          <p:cNvPr id="13" name="TextBox 12"/>
+          <p:cNvSpPr txBox="1"/>
+          <p:nvPr/>
+        </p:nvSpPr>
+        <p:spPr>
+          <a:xfrm>
+            <a:off x="9006840" y="3502152"/>
+            <a:ext cx="2468880" cy="658368"/>
+          </a:xfrm>
+          <a:prstGeom prst="rect">
+            <a:avLst/>
+          </a:prstGeom>
+          <a:noFill/>
+        </p:spPr>
+        <p:txBody>
+          <a:bodyPr wrap="square" lIns="0" rIns="0" tIns="0" bIns="0" anchor="ctr">
+            <a:spAutoFit/>
+          </a:bodyPr>
+          <a:lstStyle/>
+          <a:p>
+            <a:pPr algn="r"/>
+            <a:r>
+              <a:rPr sz="3400" b="1">
+                <a:solidFill>
+                  <a:srgbClr val="002060"/>
+                </a:solidFill>
+                <a:latin typeface="Calibri"/>
+              </a:rPr>
+              <a:t>.022"</a:t>
+            </a:r>
+          </a:p>
+        </p:txBody>
+      </p:sp>
+      <p:sp>
+        <p:nvSpPr>
+          <p:cNvPr id="14" name="TextBox 13"/>
+          <p:cNvSpPr txBox="1"/>
+          <p:nvPr/>
+        </p:nvSpPr>
+        <p:spPr>
+          <a:xfrm>
+            <a:off x="8915400" y="4453128"/>
+            <a:ext cx="2743200" cy="320040"/>
+          </a:xfrm>
+          <a:prstGeom prst="rect">
+            <a:avLst/>
+          </a:prstGeom>
+          <a:noFill/>
+        </p:spPr>
+        <p:txBody>
+          <a:bodyPr wrap="square" lIns="0" rIns="0" tIns="0" bIns="0" anchor="t">
+            <a:spAutoFit/>
+          </a:bodyPr>
+          <a:lstStyle/>
+          <a:p>
+            <a:pPr algn="l"/>
+            <a:r>
+              <a:rPr sz="1800" b="0">
+                <a:solidFill>
+                  <a:srgbClr val="4A5568"/>
+                </a:solidFill>
+                <a:latin typeface="Calibri"/>
+              </a:rPr>
+              <a:t>Leitura</a:t>
+            </a:r>
+          </a:p>
+        </p:txBody>
+      </p:sp>
+      <p:sp>
+        <p:nvSpPr>
+          <p:cNvPr id="15" name="Caixa Leitura"/>
+          <p:cNvSpPr/>
+          <p:nvPr/>
+        </p:nvSpPr>
+        <p:spPr>
+          <a:xfrm>
+            <a:off x="8915400" y="4800600"/>
+            <a:ext cx="2743200" cy="658368"/>
+          </a:xfrm>
+          <a:prstGeom prst="rect">
+            <a:avLst/>
+          </a:prstGeom>
+          <a:solidFill>
+            <a:srgbClr val="312B50"/>
+          </a:solidFill>
+          <a:ln>
+            <a:noFill/>
+          </a:ln>
+          <a:effectLst/>
+        </p:spPr>
+        <p:style>
+          <a:lnRef idx="1">
+            <a:schemeClr val="accent1"/>
+          </a:lnRef>
+          <a:fillRef idx="3">
+            <a:schemeClr val="accent1"/>
+          </a:fillRef>
+          <a:effectRef idx="2">
+            <a:schemeClr val="accent1"/>
+          </a:effectRef>
+          <a:fontRef idx="minor">
+            <a:schemeClr val="lt1"/>
+          </a:fontRef>
+        </p:style>
+        <p:txBody>
+          <a:bodyPr rtlCol="0" anchor="ctr"/>
+          <a:lstStyle/>
+          <a:p>
+            <a:pPr algn="ctr"/>
+          </a:p>
+        </p:txBody>
+      </p:sp>
+      <p:sp>
+        <p:nvSpPr>
+          <p:cNvPr id="16" name="TextBox 15"/>
+          <p:cNvSpPr txBox="1"/>
+          <p:nvPr/>
+        </p:nvSpPr>
+        <p:spPr>
+          <a:xfrm>
+            <a:off x="8412480" y="4800600"/>
+            <a:ext cx="411480" cy="658368"/>
+          </a:xfrm>
+          <a:prstGeom prst="rect">
+            <a:avLst/>
+          </a:prstGeom>
+          <a:noFill/>
+        </p:spPr>
+        <p:txBody>
+          <a:bodyPr wrap="square" lIns="0" rIns="0" tIns="0" bIns="0" anchor="ctr">
+            <a:spAutoFit/>
+          </a:bodyPr>
+          <a:lstStyle/>
+          <a:p>
+            <a:pPr algn="r"/>
+            <a:r>
+              <a:rPr sz="3600" b="1">
+                <a:solidFill>
+                  <a:srgbClr val="4A5568"/>
+                </a:solidFill>
+                <a:latin typeface="Calibri"/>
+              </a:rPr>
+              <a:t>=</a:t>
+            </a:r>
+          </a:p>
+        </p:txBody>
+      </p:sp>
+      <p:sp>
+        <p:nvSpPr>
+          <p:cNvPr id="17" name="TextBox 16"/>
+          <p:cNvSpPr txBox="1"/>
+          <p:nvPr/>
+        </p:nvSpPr>
+        <p:spPr>
+          <a:xfrm>
+            <a:off x="9006840" y="4800600"/>
+            <a:ext cx="2468880" cy="658368"/>
+          </a:xfrm>
+          <a:prstGeom prst="rect">
+            <a:avLst/>
+          </a:prstGeom>
+          <a:noFill/>
+        </p:spPr>
+        <p:txBody>
+          <a:bodyPr wrap="square" lIns="0" rIns="0" tIns="0" bIns="0" anchor="ctr">
+            <a:spAutoFit/>
+          </a:bodyPr>
+          <a:lstStyle/>
+          <a:p>
+            <a:pPr algn="r"/>
+            <a:r>
+              <a:rPr sz="3400" b="1">
+                <a:solidFill>
+                  <a:srgbClr val="FFFFFF"/>
+                </a:solidFill>
+                <a:latin typeface="Calibri"/>
+              </a:rPr>
+              <a:t>.347"</a:t>
+            </a:r>
+          </a:p>
+        </p:txBody>
+      </p:sp>
+      <p:cxnSp>
+        <p:nvCxnSpPr>
+          <p:cNvPr id="18" name="Traço da soma"/>
+          <p:cNvCxnSpPr/>
+          <p:nvPr/>
+        </p:nvCxnSpPr>
+        <p:spPr>
+          <a:xfrm>
+            <a:off x="8412480" y="4325112"/>
+            <a:ext cx="3246120" cy="0"/>
+          </a:xfrm>
+          <a:prstGeom prst="line">
+            <a:avLst/>
+          </a:prstGeom>
+          <a:ln w="38100">
+            <a:solidFill>
+              <a:srgbClr val="002060"/>
+            </a:solidFill>
+          </a:ln>
+        </p:spPr>
+        <p:style>
+          <a:lnRef idx="2">
+            <a:schemeClr val="accent1"/>
+          </a:lnRef>
+          <a:fillRef idx="0">
+            <a:schemeClr val="accent1"/>
+          </a:fillRef>
+          <a:effectRef idx="1">
+            <a:schemeClr val="accent1"/>
+          </a:effectRef>
+          <a:fontRef idx="minor">
+            <a:schemeClr val="tx1"/>
+          </a:fontRef>
+        </p:style>
+      </p:cxnSp>
+    </p:spTree>
+  </p:cSld>
+  <p:clrMapOvr>
+    <a:masterClrMapping/>
+  </p:clrMapOvr>
+</p:sld>
+</file>
+
+<file path=ppt/slides/slide53.xml><?xml version="1.0" encoding="utf-8"?>
+<p:sld xmlns:a="http://schemas.openxmlformats.org/drawingml/2006/main" xmlns:p="http://schemas.openxmlformats.org/presentationml/2006/main" xmlns:r="http://schemas.openxmlformats.org/officeDocument/2006/relationships">
+  <p:cSld>
+    <p:spTree>
+      <p:nvGrpSpPr>
+        <p:cNvPr id="1" name=""/>
+        <p:cNvGrpSpPr/>
+        <p:nvPr/>
+      </p:nvGrpSpPr>
+      <p:grpSpPr/>
+      <p:pic>
+        <p:nvPicPr>
+          <p:cNvPr id="3" name="Fundo CEEP" descr="image.png"/>
+          <p:cNvPicPr>
+            <a:picLocks noChangeAspect="1"/>
+          </p:cNvPicPr>
+          <p:nvPr/>
+        </p:nvPicPr>
+        <p:blipFill>
+          <a:blip r:embed="rId2"/>
+          <a:stretch>
+            <a:fillRect/>
+          </a:stretch>
+        </p:blipFill>
+        <p:spPr>
+          <a:xfrm>
+            <a:off x="-27432" y="0"/>
+            <a:ext cx="12225528" cy="6858000"/>
+          </a:xfrm>
+          <a:prstGeom prst="rect">
+            <a:avLst/>
+          </a:prstGeom>
+        </p:spPr>
+      </p:pic>
+      <p:sp>
+        <p:nvSpPr>
+          <p:cNvPr id="2" name="Title 1"/>
+          <p:cNvSpPr>
+            <a:spLocks noGrp="1"/>
+          </p:cNvSpPr>
+          <p:nvPr>
+            <p:ph type="title"/>
+          </p:nvPr>
+        </p:nvSpPr>
+        <p:spPr>
+          <a:xfrm>
+            <a:off x="457200" y="713232"/>
+            <a:ext cx="9509760" cy="1051560"/>
+          </a:xfrm>
+        </p:spPr>
+        <p:txBody>
+          <a:bodyPr anchor="ctr"/>
+          <a:lstStyle/>
+          <a:p>
+            <a:r>
+              <a:rPr sz="3800" b="1">
+                <a:solidFill>
+                  <a:srgbClr val="C00000"/>
+                </a:solidFill>
+                <a:latin typeface="Calibri"/>
+              </a:rPr>
+              <a:t>Exercício 5</a:t>
+            </a:r>
+          </a:p>
+        </p:txBody>
+      </p:sp>
+      <p:sp>
+        <p:nvSpPr>
+          <p:cNvPr id="4" name="TextBox 3"/>
+          <p:cNvSpPr txBox="1"/>
+          <p:nvPr/>
+        </p:nvSpPr>
+        <p:spPr>
+          <a:xfrm>
+            <a:off x="548640" y="2011680"/>
+            <a:ext cx="7818120" cy="548640"/>
+          </a:xfrm>
+          <a:prstGeom prst="rect">
+            <a:avLst/>
+          </a:prstGeom>
+          <a:noFill/>
+        </p:spPr>
+        <p:txBody>
+          <a:bodyPr wrap="square" lIns="0" rIns="0" tIns="0" bIns="0" anchor="t">
+            <a:spAutoFit/>
+          </a:bodyPr>
+          <a:lstStyle/>
+          <a:p>
+            <a:pPr algn="l"/>
+            <a:r>
+              <a:rPr sz="2400" b="0">
+                <a:solidFill>
+                  <a:srgbClr val="002060"/>
+                </a:solidFill>
+                <a:latin typeface="Calibri"/>
+              </a:rPr>
+              <a:t>Qual é a leitura? A </a:t>
+            </a:r>
+            <a:r>
+              <a:rPr sz="2400" b="1">
+                <a:solidFill>
+                  <a:srgbClr val="E01E84"/>
+                </a:solidFill>
+                <a:latin typeface="Calibri"/>
+              </a:rPr>
+              <a:t>linha rosa</a:t>
+            </a:r>
+            <a:r>
+              <a:rPr sz="2400" b="0">
+                <a:solidFill>
+                  <a:srgbClr val="002060"/>
+                </a:solidFill>
+                <a:latin typeface="Calibri"/>
+              </a:rPr>
+              <a:t> mostra o traço que coincide.</a:t>
+            </a:r>
+          </a:p>
+        </p:txBody>
+      </p:sp>
+      <p:pic>
+        <p:nvPicPr>
+          <p:cNvPr id="5" name="Paquímetro" descr="Exercício 3: paquímetro milesimal com o traço coincidente marcado"/>
+          <p:cNvPicPr>
+            <a:picLocks noChangeAspect="1"/>
+          </p:cNvPicPr>
+          <p:nvPr/>
+        </p:nvPicPr>
+        <p:blipFill>
+          <a:blip r:embed="rId4"/>
+          <a:stretch>
+            <a:fillRect/>
+          </a:stretch>
+        </p:blipFill>
+        <p:spPr>
+          <a:xfrm>
+            <a:off x="548640" y="2697480"/>
+            <a:ext cx="7818120" cy="2353579"/>
+          </a:xfrm>
+          <a:prstGeom prst="rect">
+            <a:avLst/>
+          </a:prstGeom>
+        </p:spPr>
+      </p:pic>
+      <p:sp>
+        <p:nvSpPr>
+          <p:cNvPr id="6" name="TextBox 5"/>
+          <p:cNvSpPr txBox="1"/>
+          <p:nvPr/>
+        </p:nvSpPr>
+        <p:spPr>
+          <a:xfrm>
+            <a:off x="8915400" y="2057400"/>
+            <a:ext cx="2743200" cy="320040"/>
+          </a:xfrm>
+          <a:prstGeom prst="rect">
+            <a:avLst/>
+          </a:prstGeom>
+          <a:noFill/>
+        </p:spPr>
+        <p:txBody>
+          <a:bodyPr wrap="square" lIns="0" rIns="0" tIns="0" bIns="0" anchor="t">
+            <a:spAutoFit/>
+          </a:bodyPr>
+          <a:lstStyle/>
+          <a:p>
+            <a:pPr algn="l"/>
+            <a:r>
+              <a:rPr sz="1800" b="0">
+                <a:solidFill>
+                  <a:srgbClr val="4A5568"/>
+                </a:solidFill>
+                <a:latin typeface="Calibri"/>
+              </a:rPr>
+              <a:t>Escala fixa</a:t>
+            </a:r>
+          </a:p>
+        </p:txBody>
+      </p:sp>
+      <p:sp>
+        <p:nvSpPr>
+          <p:cNvPr id="7" name="Caixa Escala fixa"/>
+          <p:cNvSpPr/>
+          <p:nvPr/>
+        </p:nvSpPr>
+        <p:spPr>
+          <a:xfrm>
+            <a:off x="8915400" y="2404872"/>
+            <a:ext cx="2743200" cy="658368"/>
+          </a:xfrm>
+          <a:prstGeom prst="rect">
+            <a:avLst/>
+          </a:prstGeom>
+          <a:solidFill>
+            <a:srgbClr val="FFFFFF"/>
+          </a:solidFill>
+          <a:ln w="19050">
+            <a:solidFill>
+              <a:srgbClr val="002060"/>
+            </a:solidFill>
+          </a:ln>
+          <a:effectLst/>
+        </p:spPr>
+        <p:style>
+          <a:lnRef idx="1">
+            <a:schemeClr val="accent1"/>
+          </a:lnRef>
+          <a:fillRef idx="3">
+            <a:schemeClr val="accent1"/>
+          </a:fillRef>
+          <a:effectRef idx="2">
+            <a:schemeClr val="accent1"/>
+          </a:effectRef>
+          <a:fontRef idx="minor">
+            <a:schemeClr val="lt1"/>
+          </a:fontRef>
+        </p:style>
+        <p:txBody>
+          <a:bodyPr rtlCol="0" anchor="ctr"/>
+          <a:lstStyle/>
+          <a:p>
+            <a:pPr algn="ctr"/>
+          </a:p>
+        </p:txBody>
+      </p:sp>
+      <p:sp>
+        <p:nvSpPr>
+          <p:cNvPr id="8" name="TextBox 7"/>
+          <p:cNvSpPr txBox="1"/>
+          <p:nvPr/>
+        </p:nvSpPr>
+        <p:spPr>
+          <a:xfrm>
+            <a:off x="8915400" y="3154680"/>
+            <a:ext cx="2743200" cy="320040"/>
+          </a:xfrm>
+          <a:prstGeom prst="rect">
+            <a:avLst/>
+          </a:prstGeom>
+          <a:noFill/>
+        </p:spPr>
+        <p:txBody>
+          <a:bodyPr wrap="square" lIns="0" rIns="0" tIns="0" bIns="0" anchor="t">
+            <a:spAutoFit/>
+          </a:bodyPr>
+          <a:lstStyle/>
+          <a:p>
+            <a:pPr algn="l"/>
+            <a:r>
+              <a:rPr sz="1800" b="0">
+                <a:solidFill>
+                  <a:srgbClr val="4A5568"/>
+                </a:solidFill>
+                <a:latin typeface="Calibri"/>
+              </a:rPr>
+              <a:t>Nônio</a:t>
+            </a:r>
+          </a:p>
+        </p:txBody>
+      </p:sp>
+      <p:sp>
+        <p:nvSpPr>
+          <p:cNvPr id="9" name="Caixa Nônio"/>
+          <p:cNvSpPr/>
+          <p:nvPr/>
+        </p:nvSpPr>
+        <p:spPr>
+          <a:xfrm>
+            <a:off x="8915400" y="3502152"/>
+            <a:ext cx="2743200" cy="658368"/>
+          </a:xfrm>
+          <a:prstGeom prst="rect">
+            <a:avLst/>
+          </a:prstGeom>
+          <a:solidFill>
+            <a:srgbClr val="FFFFFF"/>
+          </a:solidFill>
+          <a:ln w="19050">
+            <a:solidFill>
+              <a:srgbClr val="002060"/>
+            </a:solidFill>
+          </a:ln>
+          <a:effectLst/>
+        </p:spPr>
+        <p:style>
+          <a:lnRef idx="1">
+            <a:schemeClr val="accent1"/>
+          </a:lnRef>
+          <a:fillRef idx="3">
+            <a:schemeClr val="accent1"/>
+          </a:fillRef>
+          <a:effectRef idx="2">
+            <a:schemeClr val="accent1"/>
+          </a:effectRef>
+          <a:fontRef idx="minor">
+            <a:schemeClr val="lt1"/>
+          </a:fontRef>
+        </p:style>
+        <p:txBody>
+          <a:bodyPr rtlCol="0" anchor="ctr"/>
+          <a:lstStyle/>
+          <a:p>
+            <a:pPr algn="ctr"/>
+          </a:p>
+        </p:txBody>
+      </p:sp>
+      <p:sp>
+        <p:nvSpPr>
+          <p:cNvPr id="10" name="TextBox 9"/>
+          <p:cNvSpPr txBox="1"/>
+          <p:nvPr/>
+        </p:nvSpPr>
+        <p:spPr>
+          <a:xfrm>
+            <a:off x="8412480" y="3502152"/>
+            <a:ext cx="411480" cy="658368"/>
+          </a:xfrm>
+          <a:prstGeom prst="rect">
+            <a:avLst/>
+          </a:prstGeom>
+          <a:noFill/>
+        </p:spPr>
+        <p:txBody>
+          <a:bodyPr wrap="square" lIns="0" rIns="0" tIns="0" bIns="0" anchor="ctr">
+            <a:spAutoFit/>
+          </a:bodyPr>
+          <a:lstStyle/>
+          <a:p>
+            <a:pPr algn="r"/>
+            <a:r>
+              <a:rPr sz="3600" b="1">
+                <a:solidFill>
+                  <a:srgbClr val="4A5568"/>
+                </a:solidFill>
+                <a:latin typeface="Calibri"/>
+              </a:rPr>
+              <a:t>+</a:t>
+            </a:r>
+          </a:p>
+        </p:txBody>
+      </p:sp>
+      <p:sp>
+        <p:nvSpPr>
+          <p:cNvPr id="11" name="TextBox 10"/>
+          <p:cNvSpPr txBox="1"/>
+          <p:nvPr/>
+        </p:nvSpPr>
+        <p:spPr>
+          <a:xfrm>
+            <a:off x="8915400" y="4453128"/>
+            <a:ext cx="2743200" cy="320040"/>
+          </a:xfrm>
+          <a:prstGeom prst="rect">
+            <a:avLst/>
+          </a:prstGeom>
+          <a:noFill/>
+        </p:spPr>
+        <p:txBody>
+          <a:bodyPr wrap="square" lIns="0" rIns="0" tIns="0" bIns="0" anchor="t">
+            <a:spAutoFit/>
+          </a:bodyPr>
+          <a:lstStyle/>
+          <a:p>
+            <a:pPr algn="l"/>
+            <a:r>
+              <a:rPr sz="1800" b="0">
+                <a:solidFill>
+                  <a:srgbClr val="4A5568"/>
+                </a:solidFill>
+                <a:latin typeface="Calibri"/>
+              </a:rPr>
+              <a:t>Leitura</a:t>
+            </a:r>
+          </a:p>
+        </p:txBody>
+      </p:sp>
+      <p:sp>
+        <p:nvSpPr>
+          <p:cNvPr id="12" name="Caixa Leitura"/>
+          <p:cNvSpPr/>
+          <p:nvPr/>
+        </p:nvSpPr>
+        <p:spPr>
+          <a:xfrm>
+            <a:off x="8915400" y="4800600"/>
+            <a:ext cx="2743200" cy="658368"/>
+          </a:xfrm>
+          <a:prstGeom prst="rect">
+            <a:avLst/>
+          </a:prstGeom>
+          <a:solidFill>
+            <a:srgbClr val="FFFFFF"/>
+          </a:solidFill>
+          <a:ln w="19050">
+            <a:solidFill>
+              <a:srgbClr val="002060"/>
+            </a:solidFill>
+          </a:ln>
+          <a:effectLst/>
+        </p:spPr>
+        <p:style>
+          <a:lnRef idx="1">
+            <a:schemeClr val="accent1"/>
+          </a:lnRef>
+          <a:fillRef idx="3">
+            <a:schemeClr val="accent1"/>
+          </a:fillRef>
+          <a:effectRef idx="2">
+            <a:schemeClr val="accent1"/>
+          </a:effectRef>
+          <a:fontRef idx="minor">
+            <a:schemeClr val="lt1"/>
+          </a:fontRef>
+        </p:style>
+        <p:txBody>
+          <a:bodyPr rtlCol="0" anchor="ctr"/>
+          <a:lstStyle/>
+          <a:p>
+            <a:pPr algn="ctr"/>
+          </a:p>
+        </p:txBody>
+      </p:sp>
+      <p:sp>
+        <p:nvSpPr>
+          <p:cNvPr id="13" name="TextBox 12"/>
+          <p:cNvSpPr txBox="1"/>
+          <p:nvPr/>
+        </p:nvSpPr>
+        <p:spPr>
+          <a:xfrm>
+            <a:off x="8412480" y="4800600"/>
+            <a:ext cx="411480" cy="658368"/>
+          </a:xfrm>
+          <a:prstGeom prst="rect">
+            <a:avLst/>
+          </a:prstGeom>
+          <a:noFill/>
+        </p:spPr>
+        <p:txBody>
+          <a:bodyPr wrap="square" lIns="0" rIns="0" tIns="0" bIns="0" anchor="ctr">
+            <a:spAutoFit/>
+          </a:bodyPr>
+          <a:lstStyle/>
+          <a:p>
+            <a:pPr algn="r"/>
+            <a:r>
+              <a:rPr sz="3600" b="1">
+                <a:solidFill>
+                  <a:srgbClr val="4A5568"/>
+                </a:solidFill>
+                <a:latin typeface="Calibri"/>
+              </a:rPr>
+              <a:t>=</a:t>
+            </a:r>
+          </a:p>
+        </p:txBody>
+      </p:sp>
+      <p:cxnSp>
+        <p:nvCxnSpPr>
+          <p:cNvPr id="14" name="Traço da soma"/>
+          <p:cNvCxnSpPr/>
+          <p:nvPr/>
+        </p:nvCxnSpPr>
+        <p:spPr>
+          <a:xfrm>
+            <a:off x="8412480" y="4325112"/>
+            <a:ext cx="3246120" cy="0"/>
+          </a:xfrm>
+          <a:prstGeom prst="line">
+            <a:avLst/>
+          </a:prstGeom>
+          <a:ln w="38100">
+            <a:solidFill>
+              <a:srgbClr val="002060"/>
+            </a:solidFill>
+          </a:ln>
+        </p:spPr>
+        <p:style>
+          <a:lnRef idx="2">
+            <a:schemeClr val="accent1"/>
+          </a:lnRef>
+          <a:fillRef idx="0">
+            <a:schemeClr val="accent1"/>
+          </a:fillRef>
+          <a:effectRef idx="1">
+            <a:schemeClr val="accent1"/>
+          </a:effectRef>
+          <a:fontRef idx="minor">
+            <a:schemeClr val="tx1"/>
+          </a:fontRef>
+        </p:style>
+      </p:cxnSp>
+    </p:spTree>
+  </p:cSld>
+  <p:clrMapOvr>
+    <a:masterClrMapping/>
+  </p:clrMapOvr>
+</p:sld>
+</file>
+
+<file path=ppt/slides/slide54.xml><?xml version="1.0" encoding="utf-8"?>
+<p:sld xmlns:a="http://schemas.openxmlformats.org/drawingml/2006/main" xmlns:p="http://schemas.openxmlformats.org/presentationml/2006/main" xmlns:r="http://schemas.openxmlformats.org/officeDocument/2006/relationships">
+  <p:cSld>
+    <p:spTree>
+      <p:nvGrpSpPr>
+        <p:cNvPr id="1" name=""/>
+        <p:cNvGrpSpPr/>
+        <p:nvPr/>
+      </p:nvGrpSpPr>
+      <p:grpSpPr/>
+      <p:pic>
+        <p:nvPicPr>
+          <p:cNvPr id="3" name="Fundo CEEP" descr="image.png"/>
+          <p:cNvPicPr>
+            <a:picLocks noChangeAspect="1"/>
+          </p:cNvPicPr>
+          <p:nvPr/>
+        </p:nvPicPr>
+        <p:blipFill>
+          <a:blip r:embed="rId2"/>
+          <a:stretch>
+            <a:fillRect/>
+          </a:stretch>
+        </p:blipFill>
+        <p:spPr>
+          <a:xfrm>
+            <a:off x="-27432" y="0"/>
+            <a:ext cx="12225528" cy="6858000"/>
+          </a:xfrm>
+          <a:prstGeom prst="rect">
+            <a:avLst/>
+          </a:prstGeom>
+        </p:spPr>
+      </p:pic>
+      <p:sp>
+        <p:nvSpPr>
+          <p:cNvPr id="2" name="Title 1"/>
+          <p:cNvSpPr>
+            <a:spLocks noGrp="1"/>
+          </p:cNvSpPr>
+          <p:nvPr>
+            <p:ph type="title"/>
+          </p:nvPr>
+        </p:nvSpPr>
+        <p:spPr>
+          <a:xfrm>
+            <a:off x="457200" y="713232"/>
+            <a:ext cx="9509760" cy="1051560"/>
+          </a:xfrm>
+        </p:spPr>
+        <p:txBody>
+          <a:bodyPr anchor="ctr"/>
+          <a:lstStyle/>
+          <a:p>
+            <a:r>
+              <a:rPr sz="3800" b="1">
+                <a:solidFill>
+                  <a:srgbClr val="C00000"/>
+                </a:solidFill>
+                <a:latin typeface="Calibri"/>
+              </a:rPr>
+              <a:t>Exercício 5: resposta</a:t>
+            </a:r>
+          </a:p>
+        </p:txBody>
+      </p:sp>
+      <p:sp>
+        <p:nvSpPr>
+          <p:cNvPr id="4" name="TextBox 3"/>
+          <p:cNvSpPr txBox="1"/>
+          <p:nvPr/>
+        </p:nvSpPr>
+        <p:spPr>
+          <a:xfrm>
+            <a:off x="548640" y="2011680"/>
+            <a:ext cx="7818120" cy="548640"/>
+          </a:xfrm>
+          <a:prstGeom prst="rect">
+            <a:avLst/>
+          </a:prstGeom>
+          <a:noFill/>
+        </p:spPr>
+        <p:txBody>
+          <a:bodyPr wrap="square" lIns="0" rIns="0" tIns="0" bIns="0" anchor="t">
+            <a:spAutoFit/>
+          </a:bodyPr>
+          <a:lstStyle/>
+          <a:p>
+            <a:pPr algn="l"/>
+            <a:r>
+              <a:rPr sz="2400" b="1">
+                <a:solidFill>
+                  <a:srgbClr val="C86A00"/>
+                </a:solidFill>
+                <a:latin typeface="Calibri"/>
+              </a:rPr>
+              <a:t>Tracejado: </a:t>
+            </a:r>
+            <a:r>
+              <a:rPr sz="2400" b="0">
+                <a:solidFill>
+                  <a:srgbClr val="002060"/>
+                </a:solidFill>
+                <a:latin typeface="Calibri"/>
+              </a:rPr>
+              <a:t>escala fixa   </a:t>
+            </a:r>
+            <a:r>
+              <a:rPr sz="2400" b="1">
+                <a:solidFill>
+                  <a:srgbClr val="C86A00"/>
+                </a:solidFill>
+                <a:latin typeface="Calibri"/>
+              </a:rPr>
+              <a:t>Linha cheia: </a:t>
+            </a:r>
+            <a:r>
+              <a:rPr sz="2400" b="0">
+                <a:solidFill>
+                  <a:srgbClr val="002060"/>
+                </a:solidFill>
+                <a:latin typeface="Calibri"/>
+              </a:rPr>
+              <a:t>traço do nônio</a:t>
+            </a:r>
+          </a:p>
+        </p:txBody>
+      </p:sp>
+      <p:pic>
+        <p:nvPicPr>
+          <p:cNvPr id="5" name="Paquímetro" descr="Exercício 3: resposta, com a escala fixa e o traço do nônio marcados"/>
+          <p:cNvPicPr>
+            <a:picLocks noChangeAspect="1"/>
+          </p:cNvPicPr>
+          <p:nvPr/>
+        </p:nvPicPr>
+        <p:blipFill>
+          <a:blip r:embed="rId4"/>
+          <a:stretch>
+            <a:fillRect/>
+          </a:stretch>
+        </p:blipFill>
+        <p:spPr>
+          <a:xfrm>
+            <a:off x="548640" y="2697480"/>
+            <a:ext cx="7818120" cy="2353579"/>
+          </a:xfrm>
+          <a:prstGeom prst="rect">
+            <a:avLst/>
+          </a:prstGeom>
+        </p:spPr>
+      </p:pic>
+      <p:sp>
+        <p:nvSpPr>
+          <p:cNvPr id="6" name="TextBox 5"/>
+          <p:cNvSpPr txBox="1"/>
+          <p:nvPr/>
+        </p:nvSpPr>
+        <p:spPr>
+          <a:xfrm>
+            <a:off x="548640" y="5188219"/>
+            <a:ext cx="7818120" cy="822960"/>
+          </a:xfrm>
+          <a:prstGeom prst="rect">
+            <a:avLst/>
+          </a:prstGeom>
+          <a:noFill/>
+        </p:spPr>
+        <p:txBody>
+          <a:bodyPr wrap="square" lIns="0" rIns="0" tIns="0" bIns="0" anchor="t">
+            <a:spAutoFit/>
+          </a:bodyPr>
+          <a:lstStyle/>
+          <a:p>
+            <a:pPr algn="l"/>
+            <a:r>
+              <a:rPr sz="2200" b="0">
+                <a:solidFill>
+                  <a:srgbClr val="4A5568"/>
+                </a:solidFill>
+                <a:latin typeface="Calibri"/>
+              </a:rPr>
+              <a:t>Escala fixa: 2" + .500" = 2.500"   ·   nônio: 6º traço = .006"</a:t>
+            </a:r>
+          </a:p>
+        </p:txBody>
+      </p:sp>
+      <p:sp>
+        <p:nvSpPr>
+          <p:cNvPr id="7" name="TextBox 6"/>
+          <p:cNvSpPr txBox="1"/>
+          <p:nvPr/>
+        </p:nvSpPr>
+        <p:spPr>
+          <a:xfrm>
+            <a:off x="8915400" y="2057400"/>
+            <a:ext cx="2743200" cy="320040"/>
+          </a:xfrm>
+          <a:prstGeom prst="rect">
+            <a:avLst/>
+          </a:prstGeom>
+          <a:noFill/>
+        </p:spPr>
+        <p:txBody>
+          <a:bodyPr wrap="square" lIns="0" rIns="0" tIns="0" bIns="0" anchor="t">
+            <a:spAutoFit/>
+          </a:bodyPr>
+          <a:lstStyle/>
+          <a:p>
+            <a:pPr algn="l"/>
+            <a:r>
+              <a:rPr sz="1800" b="0">
+                <a:solidFill>
+                  <a:srgbClr val="4A5568"/>
+                </a:solidFill>
+                <a:latin typeface="Calibri"/>
+              </a:rPr>
+              <a:t>Escala fixa</a:t>
+            </a:r>
+          </a:p>
+        </p:txBody>
+      </p:sp>
+      <p:sp>
+        <p:nvSpPr>
+          <p:cNvPr id="8" name="Caixa Escala fixa"/>
+          <p:cNvSpPr/>
+          <p:nvPr/>
+        </p:nvSpPr>
+        <p:spPr>
+          <a:xfrm>
+            <a:off x="8915400" y="2404872"/>
+            <a:ext cx="2743200" cy="658368"/>
+          </a:xfrm>
+          <a:prstGeom prst="rect">
+            <a:avLst/>
+          </a:prstGeom>
+          <a:solidFill>
+            <a:srgbClr val="FFFFFF"/>
+          </a:solidFill>
+          <a:ln w="19050">
+            <a:solidFill>
+              <a:srgbClr val="002060"/>
+            </a:solidFill>
+          </a:ln>
+          <a:effectLst/>
+        </p:spPr>
+        <p:style>
+          <a:lnRef idx="1">
+            <a:schemeClr val="accent1"/>
+          </a:lnRef>
+          <a:fillRef idx="3">
+            <a:schemeClr val="accent1"/>
+          </a:fillRef>
+          <a:effectRef idx="2">
+            <a:schemeClr val="accent1"/>
+          </a:effectRef>
+          <a:fontRef idx="minor">
+            <a:schemeClr val="lt1"/>
+          </a:fontRef>
+        </p:style>
+        <p:txBody>
+          <a:bodyPr rtlCol="0" anchor="ctr"/>
+          <a:lstStyle/>
+          <a:p>
+            <a:pPr algn="ctr"/>
+          </a:p>
+        </p:txBody>
+      </p:sp>
+      <p:sp>
+        <p:nvSpPr>
+          <p:cNvPr id="9" name="TextBox 8"/>
+          <p:cNvSpPr txBox="1"/>
+          <p:nvPr/>
+        </p:nvSpPr>
+        <p:spPr>
+          <a:xfrm>
+            <a:off x="9006840" y="2404872"/>
+            <a:ext cx="2468880" cy="658368"/>
+          </a:xfrm>
+          <a:prstGeom prst="rect">
+            <a:avLst/>
+          </a:prstGeom>
+          <a:noFill/>
+        </p:spPr>
+        <p:txBody>
+          <a:bodyPr wrap="square" lIns="0" rIns="0" tIns="0" bIns="0" anchor="ctr">
+            <a:spAutoFit/>
+          </a:bodyPr>
+          <a:lstStyle/>
+          <a:p>
+            <a:pPr algn="r"/>
+            <a:r>
+              <a:rPr sz="3400" b="1">
+                <a:solidFill>
+                  <a:srgbClr val="002060"/>
+                </a:solidFill>
+                <a:latin typeface="Calibri"/>
+              </a:rPr>
+              <a:t>2.500"</a:t>
+            </a:r>
+          </a:p>
+        </p:txBody>
+      </p:sp>
+      <p:sp>
+        <p:nvSpPr>
+          <p:cNvPr id="10" name="TextBox 9"/>
+          <p:cNvSpPr txBox="1"/>
+          <p:nvPr/>
+        </p:nvSpPr>
+        <p:spPr>
+          <a:xfrm>
+            <a:off x="8915400" y="3154680"/>
+            <a:ext cx="2743200" cy="320040"/>
+          </a:xfrm>
+          <a:prstGeom prst="rect">
+            <a:avLst/>
+          </a:prstGeom>
+          <a:noFill/>
+        </p:spPr>
+        <p:txBody>
+          <a:bodyPr wrap="square" lIns="0" rIns="0" tIns="0" bIns="0" anchor="t">
+            <a:spAutoFit/>
+          </a:bodyPr>
+          <a:lstStyle/>
+          <a:p>
+            <a:pPr algn="l"/>
+            <a:r>
+              <a:rPr sz="1800" b="0">
+                <a:solidFill>
+                  <a:srgbClr val="4A5568"/>
+                </a:solidFill>
+                <a:latin typeface="Calibri"/>
+              </a:rPr>
+              <a:t>Nônio</a:t>
+            </a:r>
+          </a:p>
+        </p:txBody>
+      </p:sp>
+      <p:sp>
+        <p:nvSpPr>
+          <p:cNvPr id="11" name="Caixa Nônio"/>
+          <p:cNvSpPr/>
+          <p:nvPr/>
+        </p:nvSpPr>
+        <p:spPr>
+          <a:xfrm>
+            <a:off x="8915400" y="3502152"/>
+            <a:ext cx="2743200" cy="658368"/>
+          </a:xfrm>
+          <a:prstGeom prst="rect">
+            <a:avLst/>
+          </a:prstGeom>
+          <a:solidFill>
+            <a:srgbClr val="FFFFFF"/>
+          </a:solidFill>
+          <a:ln w="19050">
+            <a:solidFill>
+              <a:srgbClr val="002060"/>
+            </a:solidFill>
+          </a:ln>
+          <a:effectLst/>
+        </p:spPr>
+        <p:style>
+          <a:lnRef idx="1">
+            <a:schemeClr val="accent1"/>
+          </a:lnRef>
+          <a:fillRef idx="3">
+            <a:schemeClr val="accent1"/>
+          </a:fillRef>
+          <a:effectRef idx="2">
+            <a:schemeClr val="accent1"/>
+          </a:effectRef>
+          <a:fontRef idx="minor">
+            <a:schemeClr val="lt1"/>
+          </a:fontRef>
+        </p:style>
+        <p:txBody>
+          <a:bodyPr rtlCol="0" anchor="ctr"/>
+          <a:lstStyle/>
+          <a:p>
+            <a:pPr algn="ctr"/>
+          </a:p>
+        </p:txBody>
+      </p:sp>
+      <p:sp>
+        <p:nvSpPr>
+          <p:cNvPr id="12" name="TextBox 11"/>
+          <p:cNvSpPr txBox="1"/>
+          <p:nvPr/>
+        </p:nvSpPr>
+        <p:spPr>
+          <a:xfrm>
+            <a:off x="8412480" y="3502152"/>
+            <a:ext cx="411480" cy="658368"/>
+          </a:xfrm>
+          <a:prstGeom prst="rect">
+            <a:avLst/>
+          </a:prstGeom>
+          <a:noFill/>
+        </p:spPr>
+        <p:txBody>
+          <a:bodyPr wrap="square" lIns="0" rIns="0" tIns="0" bIns="0" anchor="ctr">
+            <a:spAutoFit/>
+          </a:bodyPr>
+          <a:lstStyle/>
+          <a:p>
+            <a:pPr algn="r"/>
+            <a:r>
+              <a:rPr sz="3600" b="1">
+                <a:solidFill>
+                  <a:srgbClr val="4A5568"/>
+                </a:solidFill>
+                <a:latin typeface="Calibri"/>
+              </a:rPr>
+              <a:t>+</a:t>
+            </a:r>
+          </a:p>
+        </p:txBody>
+      </p:sp>
+      <p:sp>
+        <p:nvSpPr>
+          <p:cNvPr id="13" name="TextBox 12"/>
+          <p:cNvSpPr txBox="1"/>
+          <p:nvPr/>
+        </p:nvSpPr>
+        <p:spPr>
+          <a:xfrm>
+            <a:off x="9006840" y="3502152"/>
+            <a:ext cx="2468880" cy="658368"/>
+          </a:xfrm>
+          <a:prstGeom prst="rect">
+            <a:avLst/>
+          </a:prstGeom>
+          <a:noFill/>
+        </p:spPr>
+        <p:txBody>
+          <a:bodyPr wrap="square" lIns="0" rIns="0" tIns="0" bIns="0" anchor="ctr">
+            <a:spAutoFit/>
+          </a:bodyPr>
+          <a:lstStyle/>
+          <a:p>
+            <a:pPr algn="r"/>
+            <a:r>
+              <a:rPr sz="3400" b="1">
+                <a:solidFill>
+                  <a:srgbClr val="002060"/>
+                </a:solidFill>
+                <a:latin typeface="Calibri"/>
+              </a:rPr>
+              <a:t>.006"</a:t>
+            </a:r>
+          </a:p>
+        </p:txBody>
+      </p:sp>
+      <p:sp>
+        <p:nvSpPr>
+          <p:cNvPr id="14" name="TextBox 13"/>
+          <p:cNvSpPr txBox="1"/>
+          <p:nvPr/>
+        </p:nvSpPr>
+        <p:spPr>
+          <a:xfrm>
+            <a:off x="8915400" y="4453128"/>
+            <a:ext cx="2743200" cy="320040"/>
+          </a:xfrm>
+          <a:prstGeom prst="rect">
+            <a:avLst/>
+          </a:prstGeom>
+          <a:noFill/>
+        </p:spPr>
+        <p:txBody>
+          <a:bodyPr wrap="square" lIns="0" rIns="0" tIns="0" bIns="0" anchor="t">
+            <a:spAutoFit/>
+          </a:bodyPr>
+          <a:lstStyle/>
+          <a:p>
+            <a:pPr algn="l"/>
+            <a:r>
+              <a:rPr sz="1800" b="0">
+                <a:solidFill>
+                  <a:srgbClr val="4A5568"/>
+                </a:solidFill>
+                <a:latin typeface="Calibri"/>
+              </a:rPr>
+              <a:t>Leitura</a:t>
+            </a:r>
+          </a:p>
+        </p:txBody>
+      </p:sp>
+      <p:sp>
+        <p:nvSpPr>
+          <p:cNvPr id="15" name="Caixa Leitura"/>
+          <p:cNvSpPr/>
+          <p:nvPr/>
+        </p:nvSpPr>
+        <p:spPr>
+          <a:xfrm>
+            <a:off x="8915400" y="4800600"/>
+            <a:ext cx="2743200" cy="658368"/>
+          </a:xfrm>
+          <a:prstGeom prst="rect">
+            <a:avLst/>
+          </a:prstGeom>
+          <a:solidFill>
+            <a:srgbClr val="312B50"/>
+          </a:solidFill>
+          <a:ln>
+            <a:noFill/>
+          </a:ln>
+          <a:effectLst/>
+        </p:spPr>
+        <p:style>
+          <a:lnRef idx="1">
+            <a:schemeClr val="accent1"/>
+          </a:lnRef>
+          <a:fillRef idx="3">
+            <a:schemeClr val="accent1"/>
+          </a:fillRef>
+          <a:effectRef idx="2">
+            <a:schemeClr val="accent1"/>
+          </a:effectRef>
+          <a:fontRef idx="minor">
+            <a:schemeClr val="lt1"/>
+          </a:fontRef>
+        </p:style>
+        <p:txBody>
+          <a:bodyPr rtlCol="0" anchor="ctr"/>
+          <a:lstStyle/>
+          <a:p>
+            <a:pPr algn="ctr"/>
+          </a:p>
+        </p:txBody>
+      </p:sp>
+      <p:sp>
+        <p:nvSpPr>
+          <p:cNvPr id="16" name="TextBox 15"/>
+          <p:cNvSpPr txBox="1"/>
+          <p:nvPr/>
+        </p:nvSpPr>
+        <p:spPr>
+          <a:xfrm>
+            <a:off x="8412480" y="4800600"/>
+            <a:ext cx="411480" cy="658368"/>
+          </a:xfrm>
+          <a:prstGeom prst="rect">
+            <a:avLst/>
+          </a:prstGeom>
+          <a:noFill/>
+        </p:spPr>
+        <p:txBody>
+          <a:bodyPr wrap="square" lIns="0" rIns="0" tIns="0" bIns="0" anchor="ctr">
+            <a:spAutoFit/>
+          </a:bodyPr>
+          <a:lstStyle/>
+          <a:p>
+            <a:pPr algn="r"/>
+            <a:r>
+              <a:rPr sz="3600" b="1">
+                <a:solidFill>
+                  <a:srgbClr val="4A5568"/>
+                </a:solidFill>
+                <a:latin typeface="Calibri"/>
+              </a:rPr>
+              <a:t>=</a:t>
+            </a:r>
+          </a:p>
+        </p:txBody>
+      </p:sp>
+      <p:sp>
+        <p:nvSpPr>
+          <p:cNvPr id="17" name="TextBox 16"/>
+          <p:cNvSpPr txBox="1"/>
+          <p:nvPr/>
+        </p:nvSpPr>
+        <p:spPr>
+          <a:xfrm>
+            <a:off x="9006840" y="4800600"/>
+            <a:ext cx="2468880" cy="658368"/>
+          </a:xfrm>
+          <a:prstGeom prst="rect">
+            <a:avLst/>
+          </a:prstGeom>
+          <a:noFill/>
+        </p:spPr>
+        <p:txBody>
+          <a:bodyPr wrap="square" lIns="0" rIns="0" tIns="0" bIns="0" anchor="ctr">
+            <a:spAutoFit/>
+          </a:bodyPr>
+          <a:lstStyle/>
+          <a:p>
+            <a:pPr algn="r"/>
+            <a:r>
+              <a:rPr sz="3400" b="1">
+                <a:solidFill>
+                  <a:srgbClr val="FFFFFF"/>
+                </a:solidFill>
+                <a:latin typeface="Calibri"/>
+              </a:rPr>
+              <a:t>2.506"</a:t>
+            </a:r>
+          </a:p>
+        </p:txBody>
+      </p:sp>
+      <p:cxnSp>
+        <p:nvCxnSpPr>
+          <p:cNvPr id="18" name="Traço da soma"/>
+          <p:cNvCxnSpPr/>
+          <p:nvPr/>
+        </p:nvCxnSpPr>
+        <p:spPr>
+          <a:xfrm>
+            <a:off x="8412480" y="4325112"/>
+            <a:ext cx="3246120" cy="0"/>
+          </a:xfrm>
+          <a:prstGeom prst="line">
+            <a:avLst/>
+          </a:prstGeom>
+          <a:ln w="38100">
+            <a:solidFill>
+              <a:srgbClr val="002060"/>
+            </a:solidFill>
+          </a:ln>
+        </p:spPr>
+        <p:style>
+          <a:lnRef idx="2">
+            <a:schemeClr val="accent1"/>
+          </a:lnRef>
+          <a:fillRef idx="0">
+            <a:schemeClr val="accent1"/>
+          </a:fillRef>
+          <a:effectRef idx="1">
+            <a:schemeClr val="accent1"/>
+          </a:effectRef>
+          <a:fontRef idx="minor">
+            <a:schemeClr val="tx1"/>
+          </a:fontRef>
+        </p:style>
+      </p:cxnSp>
     </p:spTree>
   </p:cSld>
   <p:clrMapOvr>
@@ -21708,6 +24242,6988 @@
                 <a:latin typeface="Calibri"/>
               </a:rPr>
               <a:t>Leia o paquímetro e compare:  1.252" passa · 1.257" não passa</a:t>
+            </a:r>
+          </a:p>
+        </p:txBody>
+      </p:sp>
+    </p:spTree>
+  </p:cSld>
+  <p:clrMapOvr>
+    <a:masterClrMapping/>
+  </p:clrMapOvr>
+</p:sld>
+</file>
+
+<file path=ppt/slides/slide75.xml><?xml version="1.0" encoding="utf-8"?>
+<p:sld xmlns:a="http://schemas.openxmlformats.org/drawingml/2006/main" xmlns:p="http://schemas.openxmlformats.org/presentationml/2006/main" xmlns:r="http://schemas.openxmlformats.org/officeDocument/2006/relationships">
+  <p:cSld>
+    <p:spTree>
+      <p:nvGrpSpPr>
+        <p:cNvPr id="1" name=""/>
+        <p:cNvGrpSpPr/>
+        <p:nvPr/>
+      </p:nvGrpSpPr>
+      <p:grpSpPr/>
+      <p:pic>
+        <p:nvPicPr>
+          <p:cNvPr id="2" name="Fundo do modelo" descr="image.png"/>
+          <p:cNvPicPr>
+            <a:picLocks noChangeAspect="1"/>
+          </p:cNvPicPr>
+          <p:nvPr/>
+        </p:nvPicPr>
+        <p:blipFill>
+          <a:blip r:embed="rId2"/>
+          <a:stretch>
+            <a:fillRect/>
+          </a:stretch>
+        </p:blipFill>
+        <p:spPr>
+          <a:xfrm>
+            <a:off x="-29300" y="0"/>
+            <a:ext cx="12221300" cy="6857999"/>
+          </a:xfrm>
+          <a:prstGeom prst="rect">
+            <a:avLst/>
+          </a:prstGeom>
+        </p:spPr>
+      </p:pic>
+      <p:sp>
+        <p:nvSpPr>
+          <p:cNvPr id="3" name="Título"/>
+          <p:cNvSpPr txBox="1"/>
+          <p:nvPr/>
+        </p:nvSpPr>
+        <p:spPr>
+          <a:xfrm>
+            <a:off x="411480" y="713232"/>
+            <a:ext cx="9509760" cy="1051560"/>
+          </a:xfrm>
+          <a:prstGeom prst="rect">
+            <a:avLst/>
+          </a:prstGeom>
+          <a:noFill/>
+        </p:spPr>
+        <p:txBody>
+          <a:bodyPr wrap="square" anchor="ctr" lIns="73152" rIns="73152">
+            <a:spAutoFit/>
+          </a:bodyPr>
+          <a:lstStyle/>
+          <a:p>
+            <a:r>
+              <a:rPr sz="3800" b="1">
+                <a:solidFill>
+                  <a:srgbClr val="C00000"/>
+                </a:solidFill>
+                <a:latin typeface="Calibri"/>
+              </a:rPr>
+              <a:t>EXERCÍCIO 3: PASSA OU NÃO PASSA?</a:t>
+            </a:r>
+          </a:p>
+        </p:txBody>
+      </p:sp>
+      <p:sp>
+        <p:nvSpPr>
+          <p:cNvPr id="4" name="Faixa FORA"/>
+          <p:cNvSpPr/>
+          <p:nvPr/>
+        </p:nvSpPr>
+        <p:spPr>
+          <a:xfrm>
+            <a:off x="640080" y="2926080"/>
+            <a:ext cx="2176272" cy="868680"/>
+          </a:xfrm>
+          <a:prstGeom prst="rect">
+            <a:avLst/>
+          </a:prstGeom>
+          <a:solidFill>
+            <a:srgbClr val="F8DFDF"/>
+          </a:solidFill>
+          <a:ln>
+            <a:noFill/>
+          </a:ln>
+          <a:effectLst/>
+        </p:spPr>
+        <p:style>
+          <a:lnRef idx="1">
+            <a:schemeClr val="accent1"/>
+          </a:lnRef>
+          <a:fillRef idx="3">
+            <a:schemeClr val="accent1"/>
+          </a:fillRef>
+          <a:effectRef idx="2">
+            <a:schemeClr val="accent1"/>
+          </a:effectRef>
+          <a:fontRef idx="minor">
+            <a:schemeClr val="lt1"/>
+          </a:fontRef>
+        </p:style>
+        <p:txBody>
+          <a:bodyPr rtlCol="0" anchor="ctr"/>
+          <a:lstStyle/>
+          <a:p/>
+        </p:txBody>
+      </p:sp>
+      <p:sp>
+        <p:nvSpPr>
+          <p:cNvPr id="5" name="TextBox 4"/>
+          <p:cNvSpPr txBox="1"/>
+          <p:nvPr/>
+        </p:nvSpPr>
+        <p:spPr>
+          <a:xfrm>
+            <a:off x="640080" y="2926080"/>
+            <a:ext cx="2176272" cy="868680"/>
+          </a:xfrm>
+          <a:prstGeom prst="rect">
+            <a:avLst/>
+          </a:prstGeom>
+          <a:noFill/>
+        </p:spPr>
+        <p:txBody>
+          <a:bodyPr wrap="square" anchor="ctr" lIns="73152" rIns="73152" tIns="36576" bIns="36576">
+            <a:spAutoFit/>
+          </a:bodyPr>
+          <a:lstStyle/>
+          <a:p>
+            <a:pPr algn="ctr"/>
+            <a:r>
+              <a:rPr sz="2600" b="1" i="0">
+                <a:solidFill>
+                  <a:srgbClr val="C00000"/>
+                </a:solidFill>
+                <a:latin typeface="Calibri"/>
+              </a:rPr>
+              <a:t>NÃO PASSA</a:t>
+            </a:r>
+          </a:p>
+        </p:txBody>
+      </p:sp>
+      <p:sp>
+        <p:nvSpPr>
+          <p:cNvPr id="6" name="Faixa DENTRO"/>
+          <p:cNvSpPr/>
+          <p:nvPr/>
+        </p:nvSpPr>
+        <p:spPr>
+          <a:xfrm>
+            <a:off x="2816352" y="2926080"/>
+            <a:ext cx="6528816" cy="868680"/>
+          </a:xfrm>
+          <a:prstGeom prst="rect">
+            <a:avLst/>
+          </a:prstGeom>
+          <a:solidFill>
+            <a:srgbClr val="DDF0E4"/>
+          </a:solidFill>
+          <a:ln>
+            <a:noFill/>
+          </a:ln>
+          <a:effectLst/>
+        </p:spPr>
+        <p:style>
+          <a:lnRef idx="1">
+            <a:schemeClr val="accent1"/>
+          </a:lnRef>
+          <a:fillRef idx="3">
+            <a:schemeClr val="accent1"/>
+          </a:fillRef>
+          <a:effectRef idx="2">
+            <a:schemeClr val="accent1"/>
+          </a:effectRef>
+          <a:fontRef idx="minor">
+            <a:schemeClr val="lt1"/>
+          </a:fontRef>
+        </p:style>
+        <p:txBody>
+          <a:bodyPr rtlCol="0" anchor="ctr"/>
+          <a:lstStyle/>
+          <a:p/>
+        </p:txBody>
+      </p:sp>
+      <p:sp>
+        <p:nvSpPr>
+          <p:cNvPr id="7" name="TextBox 6"/>
+          <p:cNvSpPr txBox="1"/>
+          <p:nvPr/>
+        </p:nvSpPr>
+        <p:spPr>
+          <a:xfrm>
+            <a:off x="2816352" y="2926080"/>
+            <a:ext cx="6528816" cy="868680"/>
+          </a:xfrm>
+          <a:prstGeom prst="rect">
+            <a:avLst/>
+          </a:prstGeom>
+          <a:noFill/>
+        </p:spPr>
+        <p:txBody>
+          <a:bodyPr wrap="square" anchor="ctr" lIns="73152" rIns="73152" tIns="36576" bIns="36576">
+            <a:spAutoFit/>
+          </a:bodyPr>
+          <a:lstStyle/>
+          <a:p>
+            <a:pPr algn="ctr"/>
+            <a:r>
+              <a:rPr sz="2600" b="1" i="0">
+                <a:solidFill>
+                  <a:srgbClr val="1E7A46"/>
+                </a:solidFill>
+                <a:latin typeface="Calibri"/>
+              </a:rPr>
+              <a:t>PASSA</a:t>
+            </a:r>
+          </a:p>
+        </p:txBody>
+      </p:sp>
+      <p:sp>
+        <p:nvSpPr>
+          <p:cNvPr id="8" name="Faixa FORA"/>
+          <p:cNvSpPr/>
+          <p:nvPr/>
+        </p:nvSpPr>
+        <p:spPr>
+          <a:xfrm>
+            <a:off x="9345168" y="2926080"/>
+            <a:ext cx="2176271" cy="868680"/>
+          </a:xfrm>
+          <a:prstGeom prst="rect">
+            <a:avLst/>
+          </a:prstGeom>
+          <a:solidFill>
+            <a:srgbClr val="F8DFDF"/>
+          </a:solidFill>
+          <a:ln>
+            <a:noFill/>
+          </a:ln>
+          <a:effectLst/>
+        </p:spPr>
+        <p:style>
+          <a:lnRef idx="1">
+            <a:schemeClr val="accent1"/>
+          </a:lnRef>
+          <a:fillRef idx="3">
+            <a:schemeClr val="accent1"/>
+          </a:fillRef>
+          <a:effectRef idx="2">
+            <a:schemeClr val="accent1"/>
+          </a:effectRef>
+          <a:fontRef idx="minor">
+            <a:schemeClr val="lt1"/>
+          </a:fontRef>
+        </p:style>
+        <p:txBody>
+          <a:bodyPr rtlCol="0" anchor="ctr"/>
+          <a:lstStyle/>
+          <a:p/>
+        </p:txBody>
+      </p:sp>
+      <p:sp>
+        <p:nvSpPr>
+          <p:cNvPr id="9" name="TextBox 8"/>
+          <p:cNvSpPr txBox="1"/>
+          <p:nvPr/>
+        </p:nvSpPr>
+        <p:spPr>
+          <a:xfrm>
+            <a:off x="9345168" y="2926080"/>
+            <a:ext cx="2176271" cy="868680"/>
+          </a:xfrm>
+          <a:prstGeom prst="rect">
+            <a:avLst/>
+          </a:prstGeom>
+          <a:noFill/>
+        </p:spPr>
+        <p:txBody>
+          <a:bodyPr wrap="square" anchor="ctr" lIns="73152" rIns="73152" tIns="36576" bIns="36576">
+            <a:spAutoFit/>
+          </a:bodyPr>
+          <a:lstStyle/>
+          <a:p>
+            <a:pPr algn="ctr"/>
+            <a:r>
+              <a:rPr sz="2600" b="1" i="0">
+                <a:solidFill>
+                  <a:srgbClr val="C00000"/>
+                </a:solidFill>
+                <a:latin typeface="Calibri"/>
+              </a:rPr>
+              <a:t>NÃO PASSA</a:t>
+            </a:r>
+          </a:p>
+        </p:txBody>
+      </p:sp>
+      <p:sp>
+        <p:nvSpPr>
+          <p:cNvPr id="10" name="Linha mínima"/>
+          <p:cNvSpPr/>
+          <p:nvPr/>
+        </p:nvSpPr>
+        <p:spPr>
+          <a:xfrm>
+            <a:off x="2784348" y="2743200"/>
+            <a:ext cx="64008" cy="1234440"/>
+          </a:xfrm>
+          <a:prstGeom prst="rect">
+            <a:avLst/>
+          </a:prstGeom>
+          <a:solidFill>
+            <a:srgbClr val="002060"/>
+          </a:solidFill>
+          <a:ln>
+            <a:noFill/>
+          </a:ln>
+          <a:effectLst/>
+        </p:spPr>
+        <p:style>
+          <a:lnRef idx="1">
+            <a:schemeClr val="accent1"/>
+          </a:lnRef>
+          <a:fillRef idx="3">
+            <a:schemeClr val="accent1"/>
+          </a:fillRef>
+          <a:effectRef idx="2">
+            <a:schemeClr val="accent1"/>
+          </a:effectRef>
+          <a:fontRef idx="minor">
+            <a:schemeClr val="lt1"/>
+          </a:fontRef>
+        </p:style>
+        <p:txBody>
+          <a:bodyPr rtlCol="0" anchor="ctr"/>
+          <a:lstStyle/>
+          <a:p/>
+        </p:txBody>
+      </p:sp>
+      <p:sp>
+        <p:nvSpPr>
+          <p:cNvPr id="11" name="TextBox 10"/>
+          <p:cNvSpPr txBox="1"/>
+          <p:nvPr/>
+        </p:nvSpPr>
+        <p:spPr>
+          <a:xfrm>
+            <a:off x="1719072" y="1965960"/>
+            <a:ext cx="2194560" cy="777240"/>
+          </a:xfrm>
+          <a:prstGeom prst="rect">
+            <a:avLst/>
+          </a:prstGeom>
+          <a:noFill/>
+        </p:spPr>
+        <p:txBody>
+          <a:bodyPr wrap="square" anchor="b" lIns="73152" rIns="73152" tIns="36576" bIns="36576">
+            <a:spAutoFit/>
+          </a:bodyPr>
+          <a:lstStyle/>
+          <a:p>
+            <a:pPr algn="ctr"/>
+            <a:r>
+              <a:rPr sz="4400" b="1" i="0">
+                <a:solidFill>
+                  <a:srgbClr val="002060"/>
+                </a:solidFill>
+                <a:latin typeface="Calibri"/>
+              </a:rPr>
+              <a:t>?</a:t>
+            </a:r>
+          </a:p>
+        </p:txBody>
+      </p:sp>
+      <p:sp>
+        <p:nvSpPr>
+          <p:cNvPr id="12" name="TextBox 11"/>
+          <p:cNvSpPr txBox="1"/>
+          <p:nvPr/>
+        </p:nvSpPr>
+        <p:spPr>
+          <a:xfrm>
+            <a:off x="1719072" y="4023360"/>
+            <a:ext cx="2194560" cy="457200"/>
+          </a:xfrm>
+          <a:prstGeom prst="rect">
+            <a:avLst/>
+          </a:prstGeom>
+          <a:noFill/>
+        </p:spPr>
+        <p:txBody>
+          <a:bodyPr wrap="square" anchor="t" lIns="73152" rIns="73152" tIns="36576" bIns="36576">
+            <a:spAutoFit/>
+          </a:bodyPr>
+          <a:lstStyle/>
+          <a:p>
+            <a:pPr algn="ctr"/>
+            <a:r>
+              <a:rPr sz="2400" b="0" i="0">
+                <a:solidFill>
+                  <a:srgbClr val="4A5568"/>
+                </a:solidFill>
+                <a:latin typeface="Calibri"/>
+              </a:rPr>
+              <a:t>mínima</a:t>
+            </a:r>
+          </a:p>
+        </p:txBody>
+      </p:sp>
+      <p:sp>
+        <p:nvSpPr>
+          <p:cNvPr id="13" name="Marca nominal acima"/>
+          <p:cNvSpPr/>
+          <p:nvPr/>
+        </p:nvSpPr>
+        <p:spPr>
+          <a:xfrm>
+            <a:off x="6048756" y="2743200"/>
+            <a:ext cx="64008" cy="228600"/>
+          </a:xfrm>
+          <a:prstGeom prst="rect">
+            <a:avLst/>
+          </a:prstGeom>
+          <a:solidFill>
+            <a:srgbClr val="C00000"/>
+          </a:solidFill>
+          <a:ln>
+            <a:noFill/>
+          </a:ln>
+          <a:effectLst/>
+        </p:spPr>
+        <p:style>
+          <a:lnRef idx="1">
+            <a:schemeClr val="accent1"/>
+          </a:lnRef>
+          <a:fillRef idx="3">
+            <a:schemeClr val="accent1"/>
+          </a:fillRef>
+          <a:effectRef idx="2">
+            <a:schemeClr val="accent1"/>
+          </a:effectRef>
+          <a:fontRef idx="minor">
+            <a:schemeClr val="lt1"/>
+          </a:fontRef>
+        </p:style>
+        <p:txBody>
+          <a:bodyPr rtlCol="0" anchor="ctr"/>
+          <a:lstStyle/>
+          <a:p/>
+        </p:txBody>
+      </p:sp>
+      <p:sp>
+        <p:nvSpPr>
+          <p:cNvPr id="14" name="Marca nominal abaixo"/>
+          <p:cNvSpPr/>
+          <p:nvPr/>
+        </p:nvSpPr>
+        <p:spPr>
+          <a:xfrm>
+            <a:off x="6048756" y="3749040"/>
+            <a:ext cx="64008" cy="228600"/>
+          </a:xfrm>
+          <a:prstGeom prst="rect">
+            <a:avLst/>
+          </a:prstGeom>
+          <a:solidFill>
+            <a:srgbClr val="C00000"/>
+          </a:solidFill>
+          <a:ln>
+            <a:noFill/>
+          </a:ln>
+          <a:effectLst/>
+        </p:spPr>
+        <p:style>
+          <a:lnRef idx="1">
+            <a:schemeClr val="accent1"/>
+          </a:lnRef>
+          <a:fillRef idx="3">
+            <a:schemeClr val="accent1"/>
+          </a:fillRef>
+          <a:effectRef idx="2">
+            <a:schemeClr val="accent1"/>
+          </a:effectRef>
+          <a:fontRef idx="minor">
+            <a:schemeClr val="lt1"/>
+          </a:fontRef>
+        </p:style>
+        <p:txBody>
+          <a:bodyPr rtlCol="0" anchor="ctr"/>
+          <a:lstStyle/>
+          <a:p/>
+        </p:txBody>
+      </p:sp>
+      <p:sp>
+        <p:nvSpPr>
+          <p:cNvPr id="15" name="TextBox 14"/>
+          <p:cNvSpPr txBox="1"/>
+          <p:nvPr/>
+        </p:nvSpPr>
+        <p:spPr>
+          <a:xfrm>
+            <a:off x="4983480" y="1965960"/>
+            <a:ext cx="2194560" cy="777240"/>
+          </a:xfrm>
+          <a:prstGeom prst="rect">
+            <a:avLst/>
+          </a:prstGeom>
+          <a:noFill/>
+        </p:spPr>
+        <p:txBody>
+          <a:bodyPr wrap="square" anchor="b" lIns="73152" rIns="73152" tIns="36576" bIns="36576">
+            <a:spAutoFit/>
+          </a:bodyPr>
+          <a:lstStyle/>
+          <a:p>
+            <a:pPr algn="ctr"/>
+            <a:r>
+              <a:rPr sz="4400" b="1" i="0">
+                <a:solidFill>
+                  <a:srgbClr val="C00000"/>
+                </a:solidFill>
+                <a:latin typeface="Calibri"/>
+              </a:rPr>
+              <a:t>40</a:t>
+            </a:r>
+          </a:p>
+        </p:txBody>
+      </p:sp>
+      <p:sp>
+        <p:nvSpPr>
+          <p:cNvPr id="16" name="TextBox 15"/>
+          <p:cNvSpPr txBox="1"/>
+          <p:nvPr/>
+        </p:nvSpPr>
+        <p:spPr>
+          <a:xfrm>
+            <a:off x="4983480" y="4023360"/>
+            <a:ext cx="2194560" cy="457200"/>
+          </a:xfrm>
+          <a:prstGeom prst="rect">
+            <a:avLst/>
+          </a:prstGeom>
+          <a:noFill/>
+        </p:spPr>
+        <p:txBody>
+          <a:bodyPr wrap="square" anchor="t" lIns="73152" rIns="73152" tIns="36576" bIns="36576">
+            <a:spAutoFit/>
+          </a:bodyPr>
+          <a:lstStyle/>
+          <a:p>
+            <a:pPr algn="ctr"/>
+            <a:r>
+              <a:rPr sz="2400" b="0" i="0">
+                <a:solidFill>
+                  <a:srgbClr val="4A5568"/>
+                </a:solidFill>
+                <a:latin typeface="Calibri"/>
+              </a:rPr>
+              <a:t>nominal</a:t>
+            </a:r>
+          </a:p>
+        </p:txBody>
+      </p:sp>
+      <p:sp>
+        <p:nvSpPr>
+          <p:cNvPr id="17" name="Linha máxima"/>
+          <p:cNvSpPr/>
+          <p:nvPr/>
+        </p:nvSpPr>
+        <p:spPr>
+          <a:xfrm>
+            <a:off x="9313164" y="2743200"/>
+            <a:ext cx="64008" cy="1234440"/>
+          </a:xfrm>
+          <a:prstGeom prst="rect">
+            <a:avLst/>
+          </a:prstGeom>
+          <a:solidFill>
+            <a:srgbClr val="002060"/>
+          </a:solidFill>
+          <a:ln>
+            <a:noFill/>
+          </a:ln>
+          <a:effectLst/>
+        </p:spPr>
+        <p:style>
+          <a:lnRef idx="1">
+            <a:schemeClr val="accent1"/>
+          </a:lnRef>
+          <a:fillRef idx="3">
+            <a:schemeClr val="accent1"/>
+          </a:fillRef>
+          <a:effectRef idx="2">
+            <a:schemeClr val="accent1"/>
+          </a:effectRef>
+          <a:fontRef idx="minor">
+            <a:schemeClr val="lt1"/>
+          </a:fontRef>
+        </p:style>
+        <p:txBody>
+          <a:bodyPr rtlCol="0" anchor="ctr"/>
+          <a:lstStyle/>
+          <a:p/>
+        </p:txBody>
+      </p:sp>
+      <p:sp>
+        <p:nvSpPr>
+          <p:cNvPr id="18" name="TextBox 17"/>
+          <p:cNvSpPr txBox="1"/>
+          <p:nvPr/>
+        </p:nvSpPr>
+        <p:spPr>
+          <a:xfrm>
+            <a:off x="8247888" y="1965960"/>
+            <a:ext cx="2194560" cy="777240"/>
+          </a:xfrm>
+          <a:prstGeom prst="rect">
+            <a:avLst/>
+          </a:prstGeom>
+          <a:noFill/>
+        </p:spPr>
+        <p:txBody>
+          <a:bodyPr wrap="square" anchor="b" lIns="73152" rIns="73152" tIns="36576" bIns="36576">
+            <a:spAutoFit/>
+          </a:bodyPr>
+          <a:lstStyle/>
+          <a:p>
+            <a:pPr algn="ctr"/>
+            <a:r>
+              <a:rPr sz="4400" b="1" i="0">
+                <a:solidFill>
+                  <a:srgbClr val="002060"/>
+                </a:solidFill>
+                <a:latin typeface="Calibri"/>
+              </a:rPr>
+              <a:t>?</a:t>
+            </a:r>
+          </a:p>
+        </p:txBody>
+      </p:sp>
+      <p:sp>
+        <p:nvSpPr>
+          <p:cNvPr id="19" name="TextBox 18"/>
+          <p:cNvSpPr txBox="1"/>
+          <p:nvPr/>
+        </p:nvSpPr>
+        <p:spPr>
+          <a:xfrm>
+            <a:off x="8247888" y="4023360"/>
+            <a:ext cx="2194560" cy="457200"/>
+          </a:xfrm>
+          <a:prstGeom prst="rect">
+            <a:avLst/>
+          </a:prstGeom>
+          <a:noFill/>
+        </p:spPr>
+        <p:txBody>
+          <a:bodyPr wrap="square" anchor="t" lIns="73152" rIns="73152" tIns="36576" bIns="36576">
+            <a:spAutoFit/>
+          </a:bodyPr>
+          <a:lstStyle/>
+          <a:p>
+            <a:pPr algn="ctr"/>
+            <a:r>
+              <a:rPr sz="2400" b="0" i="0">
+                <a:solidFill>
+                  <a:srgbClr val="4A5568"/>
+                </a:solidFill>
+                <a:latin typeface="Calibri"/>
+              </a:rPr>
+              <a:t>máxima</a:t>
+            </a:r>
+          </a:p>
+        </p:txBody>
+      </p:sp>
+      <p:cxnSp>
+        <p:nvCxnSpPr>
+          <p:cNvPr id="20" name="Connector 19"/>
+          <p:cNvCxnSpPr/>
+          <p:nvPr/>
+        </p:nvCxnSpPr>
+        <p:spPr>
+          <a:xfrm>
+            <a:off x="2816352" y="4663440"/>
+            <a:ext cx="6528816" cy="0"/>
+          </a:xfrm>
+          <a:prstGeom prst="line">
+            <a:avLst/>
+          </a:prstGeom>
+          <a:ln w="31750">
+            <a:solidFill>
+              <a:srgbClr val="002060"/>
+            </a:solidFill>
+            <a:headEnd type="triangle"/>
+            <a:tailEnd type="triangle"/>
+          </a:ln>
+        </p:spPr>
+        <p:style>
+          <a:lnRef idx="2">
+            <a:schemeClr val="accent1"/>
+          </a:lnRef>
+          <a:fillRef idx="0">
+            <a:schemeClr val="accent1"/>
+          </a:fillRef>
+          <a:effectRef idx="1">
+            <a:schemeClr val="accent1"/>
+          </a:effectRef>
+          <a:fontRef idx="minor">
+            <a:schemeClr val="tx1"/>
+          </a:fontRef>
+        </p:style>
+      </p:cxnSp>
+      <p:sp>
+        <p:nvSpPr>
+          <p:cNvPr id="21" name="TextBox 20"/>
+          <p:cNvSpPr txBox="1"/>
+          <p:nvPr/>
+        </p:nvSpPr>
+        <p:spPr>
+          <a:xfrm>
+            <a:off x="640080" y="4754880"/>
+            <a:ext cx="10881360" cy="594360"/>
+          </a:xfrm>
+          <a:prstGeom prst="rect">
+            <a:avLst/>
+          </a:prstGeom>
+          <a:noFill/>
+        </p:spPr>
+        <p:txBody>
+          <a:bodyPr wrap="square" anchor="t" lIns="73152" rIns="73152" tIns="36576" bIns="36576">
+            <a:spAutoFit/>
+          </a:bodyPr>
+          <a:lstStyle/>
+          <a:p>
+            <a:pPr algn="ctr"/>
+            <a:r>
+              <a:rPr sz="3000" b="1" i="0">
+                <a:solidFill>
+                  <a:srgbClr val="002060"/>
+                </a:solidFill>
+                <a:latin typeface="Calibri"/>
+              </a:rPr>
+              <a:t>Cota 40 ± 0,3. As peças mediram: 40,2 · 40,35 · 39,7 · 39,6</a:t>
+            </a:r>
+          </a:p>
+        </p:txBody>
+      </p:sp>
+      <p:sp>
+        <p:nvSpPr>
+          <p:cNvPr id="22" name="TextBox 21"/>
+          <p:cNvSpPr txBox="1"/>
+          <p:nvPr/>
+        </p:nvSpPr>
+        <p:spPr>
+          <a:xfrm>
+            <a:off x="640080" y="5349240"/>
+            <a:ext cx="10881360" cy="548640"/>
+          </a:xfrm>
+          <a:prstGeom prst="rect">
+            <a:avLst/>
+          </a:prstGeom>
+          <a:noFill/>
+        </p:spPr>
+        <p:txBody>
+          <a:bodyPr wrap="square" anchor="t" lIns="73152" rIns="73152" tIns="36576" bIns="36576">
+            <a:spAutoFit/>
+          </a:bodyPr>
+          <a:lstStyle/>
+          <a:p>
+            <a:pPr algn="ctr"/>
+            <a:r>
+              <a:rPr sz="2400" b="0" i="0">
+                <a:solidFill>
+                  <a:srgbClr val="4A5568"/>
+                </a:solidFill>
+                <a:latin typeface="Calibri"/>
+              </a:rPr>
+              <a:t>Ache a mínima e a máxima. Quais peças passam?</a:t>
+            </a:r>
+          </a:p>
+        </p:txBody>
+      </p:sp>
+    </p:spTree>
+  </p:cSld>
+  <p:clrMapOvr>
+    <a:masterClrMapping/>
+  </p:clrMapOvr>
+</p:sld>
+</file>
+
+<file path=ppt/slides/slide76.xml><?xml version="1.0" encoding="utf-8"?>
+<p:sld xmlns:a="http://schemas.openxmlformats.org/drawingml/2006/main" xmlns:p="http://schemas.openxmlformats.org/presentationml/2006/main" xmlns:r="http://schemas.openxmlformats.org/officeDocument/2006/relationships">
+  <p:cSld>
+    <p:spTree>
+      <p:nvGrpSpPr>
+        <p:cNvPr id="1" name=""/>
+        <p:cNvGrpSpPr/>
+        <p:nvPr/>
+      </p:nvGrpSpPr>
+      <p:grpSpPr/>
+      <p:pic>
+        <p:nvPicPr>
+          <p:cNvPr id="2" name="Fundo do modelo" descr="image.png"/>
+          <p:cNvPicPr>
+            <a:picLocks noChangeAspect="1"/>
+          </p:cNvPicPr>
+          <p:nvPr/>
+        </p:nvPicPr>
+        <p:blipFill>
+          <a:blip r:embed="rId2"/>
+          <a:stretch>
+            <a:fillRect/>
+          </a:stretch>
+        </p:blipFill>
+        <p:spPr>
+          <a:xfrm>
+            <a:off x="-29300" y="0"/>
+            <a:ext cx="12221300" cy="6857999"/>
+          </a:xfrm>
+          <a:prstGeom prst="rect">
+            <a:avLst/>
+          </a:prstGeom>
+        </p:spPr>
+      </p:pic>
+      <p:sp>
+        <p:nvSpPr>
+          <p:cNvPr id="3" name="Título"/>
+          <p:cNvSpPr txBox="1"/>
+          <p:nvPr/>
+        </p:nvSpPr>
+        <p:spPr>
+          <a:xfrm>
+            <a:off x="411480" y="713232"/>
+            <a:ext cx="9509760" cy="1051560"/>
+          </a:xfrm>
+          <a:prstGeom prst="rect">
+            <a:avLst/>
+          </a:prstGeom>
+          <a:noFill/>
+        </p:spPr>
+        <p:txBody>
+          <a:bodyPr wrap="square" anchor="ctr" lIns="73152" rIns="73152">
+            <a:spAutoFit/>
+          </a:bodyPr>
+          <a:lstStyle/>
+          <a:p>
+            <a:r>
+              <a:rPr sz="3800" b="1">
+                <a:solidFill>
+                  <a:srgbClr val="C00000"/>
+                </a:solidFill>
+                <a:latin typeface="Calibri"/>
+              </a:rPr>
+              <a:t>EXERCÍCIO 3: RESPOSTA</a:t>
+            </a:r>
+          </a:p>
+        </p:txBody>
+      </p:sp>
+      <p:sp>
+        <p:nvSpPr>
+          <p:cNvPr id="4" name="Faixa FORA"/>
+          <p:cNvSpPr/>
+          <p:nvPr/>
+        </p:nvSpPr>
+        <p:spPr>
+          <a:xfrm>
+            <a:off x="640080" y="2926080"/>
+            <a:ext cx="2176272" cy="868680"/>
+          </a:xfrm>
+          <a:prstGeom prst="rect">
+            <a:avLst/>
+          </a:prstGeom>
+          <a:solidFill>
+            <a:srgbClr val="F8DFDF"/>
+          </a:solidFill>
+          <a:ln>
+            <a:noFill/>
+          </a:ln>
+          <a:effectLst/>
+        </p:spPr>
+        <p:style>
+          <a:lnRef idx="1">
+            <a:schemeClr val="accent1"/>
+          </a:lnRef>
+          <a:fillRef idx="3">
+            <a:schemeClr val="accent1"/>
+          </a:fillRef>
+          <a:effectRef idx="2">
+            <a:schemeClr val="accent1"/>
+          </a:effectRef>
+          <a:fontRef idx="minor">
+            <a:schemeClr val="lt1"/>
+          </a:fontRef>
+        </p:style>
+        <p:txBody>
+          <a:bodyPr rtlCol="0" anchor="ctr"/>
+          <a:lstStyle/>
+          <a:p/>
+        </p:txBody>
+      </p:sp>
+      <p:sp>
+        <p:nvSpPr>
+          <p:cNvPr id="5" name="TextBox 4"/>
+          <p:cNvSpPr txBox="1"/>
+          <p:nvPr/>
+        </p:nvSpPr>
+        <p:spPr>
+          <a:xfrm>
+            <a:off x="640080" y="2926080"/>
+            <a:ext cx="2176272" cy="868680"/>
+          </a:xfrm>
+          <a:prstGeom prst="rect">
+            <a:avLst/>
+          </a:prstGeom>
+          <a:noFill/>
+        </p:spPr>
+        <p:txBody>
+          <a:bodyPr wrap="square" anchor="ctr" lIns="73152" rIns="73152" tIns="36576" bIns="36576">
+            <a:spAutoFit/>
+          </a:bodyPr>
+          <a:lstStyle/>
+          <a:p>
+            <a:pPr algn="ctr"/>
+            <a:r>
+              <a:rPr sz="2600" b="1" i="0">
+                <a:solidFill>
+                  <a:srgbClr val="C00000"/>
+                </a:solidFill>
+                <a:latin typeface="Calibri"/>
+              </a:rPr>
+              <a:t>NÃO PASSA</a:t>
+            </a:r>
+          </a:p>
+        </p:txBody>
+      </p:sp>
+      <p:sp>
+        <p:nvSpPr>
+          <p:cNvPr id="6" name="Faixa DENTRO"/>
+          <p:cNvSpPr/>
+          <p:nvPr/>
+        </p:nvSpPr>
+        <p:spPr>
+          <a:xfrm>
+            <a:off x="2816352" y="2926080"/>
+            <a:ext cx="6528816" cy="868680"/>
+          </a:xfrm>
+          <a:prstGeom prst="rect">
+            <a:avLst/>
+          </a:prstGeom>
+          <a:solidFill>
+            <a:srgbClr val="DDF0E4"/>
+          </a:solidFill>
+          <a:ln>
+            <a:noFill/>
+          </a:ln>
+          <a:effectLst/>
+        </p:spPr>
+        <p:style>
+          <a:lnRef idx="1">
+            <a:schemeClr val="accent1"/>
+          </a:lnRef>
+          <a:fillRef idx="3">
+            <a:schemeClr val="accent1"/>
+          </a:fillRef>
+          <a:effectRef idx="2">
+            <a:schemeClr val="accent1"/>
+          </a:effectRef>
+          <a:fontRef idx="minor">
+            <a:schemeClr val="lt1"/>
+          </a:fontRef>
+        </p:style>
+        <p:txBody>
+          <a:bodyPr rtlCol="0" anchor="ctr"/>
+          <a:lstStyle/>
+          <a:p/>
+        </p:txBody>
+      </p:sp>
+      <p:sp>
+        <p:nvSpPr>
+          <p:cNvPr id="7" name="TextBox 6"/>
+          <p:cNvSpPr txBox="1"/>
+          <p:nvPr/>
+        </p:nvSpPr>
+        <p:spPr>
+          <a:xfrm>
+            <a:off x="2816352" y="2926080"/>
+            <a:ext cx="6528816" cy="868680"/>
+          </a:xfrm>
+          <a:prstGeom prst="rect">
+            <a:avLst/>
+          </a:prstGeom>
+          <a:noFill/>
+        </p:spPr>
+        <p:txBody>
+          <a:bodyPr wrap="square" anchor="ctr" lIns="73152" rIns="73152" tIns="36576" bIns="36576">
+            <a:spAutoFit/>
+          </a:bodyPr>
+          <a:lstStyle/>
+          <a:p>
+            <a:pPr algn="ctr"/>
+            <a:r>
+              <a:rPr sz="2600" b="1" i="0">
+                <a:solidFill>
+                  <a:srgbClr val="1E7A46"/>
+                </a:solidFill>
+                <a:latin typeface="Calibri"/>
+              </a:rPr>
+              <a:t>PASSA</a:t>
+            </a:r>
+          </a:p>
+        </p:txBody>
+      </p:sp>
+      <p:sp>
+        <p:nvSpPr>
+          <p:cNvPr id="8" name="Faixa FORA"/>
+          <p:cNvSpPr/>
+          <p:nvPr/>
+        </p:nvSpPr>
+        <p:spPr>
+          <a:xfrm>
+            <a:off x="9345168" y="2926080"/>
+            <a:ext cx="2176271" cy="868680"/>
+          </a:xfrm>
+          <a:prstGeom prst="rect">
+            <a:avLst/>
+          </a:prstGeom>
+          <a:solidFill>
+            <a:srgbClr val="F8DFDF"/>
+          </a:solidFill>
+          <a:ln>
+            <a:noFill/>
+          </a:ln>
+          <a:effectLst/>
+        </p:spPr>
+        <p:style>
+          <a:lnRef idx="1">
+            <a:schemeClr val="accent1"/>
+          </a:lnRef>
+          <a:fillRef idx="3">
+            <a:schemeClr val="accent1"/>
+          </a:fillRef>
+          <a:effectRef idx="2">
+            <a:schemeClr val="accent1"/>
+          </a:effectRef>
+          <a:fontRef idx="minor">
+            <a:schemeClr val="lt1"/>
+          </a:fontRef>
+        </p:style>
+        <p:txBody>
+          <a:bodyPr rtlCol="0" anchor="ctr"/>
+          <a:lstStyle/>
+          <a:p/>
+        </p:txBody>
+      </p:sp>
+      <p:sp>
+        <p:nvSpPr>
+          <p:cNvPr id="9" name="TextBox 8"/>
+          <p:cNvSpPr txBox="1"/>
+          <p:nvPr/>
+        </p:nvSpPr>
+        <p:spPr>
+          <a:xfrm>
+            <a:off x="9345168" y="2926080"/>
+            <a:ext cx="2176271" cy="868680"/>
+          </a:xfrm>
+          <a:prstGeom prst="rect">
+            <a:avLst/>
+          </a:prstGeom>
+          <a:noFill/>
+        </p:spPr>
+        <p:txBody>
+          <a:bodyPr wrap="square" anchor="ctr" lIns="73152" rIns="73152" tIns="36576" bIns="36576">
+            <a:spAutoFit/>
+          </a:bodyPr>
+          <a:lstStyle/>
+          <a:p>
+            <a:pPr algn="ctr"/>
+            <a:r>
+              <a:rPr sz="2600" b="1" i="0">
+                <a:solidFill>
+                  <a:srgbClr val="C00000"/>
+                </a:solidFill>
+                <a:latin typeface="Calibri"/>
+              </a:rPr>
+              <a:t>NÃO PASSA</a:t>
+            </a:r>
+          </a:p>
+        </p:txBody>
+      </p:sp>
+      <p:sp>
+        <p:nvSpPr>
+          <p:cNvPr id="10" name="Linha mínima"/>
+          <p:cNvSpPr/>
+          <p:nvPr/>
+        </p:nvSpPr>
+        <p:spPr>
+          <a:xfrm>
+            <a:off x="2784348" y="2743200"/>
+            <a:ext cx="64008" cy="1234440"/>
+          </a:xfrm>
+          <a:prstGeom prst="rect">
+            <a:avLst/>
+          </a:prstGeom>
+          <a:solidFill>
+            <a:srgbClr val="002060"/>
+          </a:solidFill>
+          <a:ln>
+            <a:noFill/>
+          </a:ln>
+          <a:effectLst/>
+        </p:spPr>
+        <p:style>
+          <a:lnRef idx="1">
+            <a:schemeClr val="accent1"/>
+          </a:lnRef>
+          <a:fillRef idx="3">
+            <a:schemeClr val="accent1"/>
+          </a:fillRef>
+          <a:effectRef idx="2">
+            <a:schemeClr val="accent1"/>
+          </a:effectRef>
+          <a:fontRef idx="minor">
+            <a:schemeClr val="lt1"/>
+          </a:fontRef>
+        </p:style>
+        <p:txBody>
+          <a:bodyPr rtlCol="0" anchor="ctr"/>
+          <a:lstStyle/>
+          <a:p/>
+        </p:txBody>
+      </p:sp>
+      <p:sp>
+        <p:nvSpPr>
+          <p:cNvPr id="11" name="TextBox 10"/>
+          <p:cNvSpPr txBox="1"/>
+          <p:nvPr/>
+        </p:nvSpPr>
+        <p:spPr>
+          <a:xfrm>
+            <a:off x="1719072" y="1965960"/>
+            <a:ext cx="2194560" cy="777240"/>
+          </a:xfrm>
+          <a:prstGeom prst="rect">
+            <a:avLst/>
+          </a:prstGeom>
+          <a:noFill/>
+        </p:spPr>
+        <p:txBody>
+          <a:bodyPr wrap="square" anchor="b" lIns="73152" rIns="73152" tIns="36576" bIns="36576">
+            <a:spAutoFit/>
+          </a:bodyPr>
+          <a:lstStyle/>
+          <a:p>
+            <a:pPr algn="ctr"/>
+            <a:r>
+              <a:rPr sz="4400" b="1" i="0">
+                <a:solidFill>
+                  <a:srgbClr val="002060"/>
+                </a:solidFill>
+                <a:latin typeface="Calibri"/>
+              </a:rPr>
+              <a:t>39,7</a:t>
+            </a:r>
+          </a:p>
+        </p:txBody>
+      </p:sp>
+      <p:sp>
+        <p:nvSpPr>
+          <p:cNvPr id="12" name="TextBox 11"/>
+          <p:cNvSpPr txBox="1"/>
+          <p:nvPr/>
+        </p:nvSpPr>
+        <p:spPr>
+          <a:xfrm>
+            <a:off x="1719072" y="4023360"/>
+            <a:ext cx="2194560" cy="457200"/>
+          </a:xfrm>
+          <a:prstGeom prst="rect">
+            <a:avLst/>
+          </a:prstGeom>
+          <a:noFill/>
+        </p:spPr>
+        <p:txBody>
+          <a:bodyPr wrap="square" anchor="t" lIns="73152" rIns="73152" tIns="36576" bIns="36576">
+            <a:spAutoFit/>
+          </a:bodyPr>
+          <a:lstStyle/>
+          <a:p>
+            <a:pPr algn="ctr"/>
+            <a:r>
+              <a:rPr sz="2400" b="0" i="0">
+                <a:solidFill>
+                  <a:srgbClr val="4A5568"/>
+                </a:solidFill>
+                <a:latin typeface="Calibri"/>
+              </a:rPr>
+              <a:t>mínima</a:t>
+            </a:r>
+          </a:p>
+        </p:txBody>
+      </p:sp>
+      <p:sp>
+        <p:nvSpPr>
+          <p:cNvPr id="13" name="Marca nominal acima"/>
+          <p:cNvSpPr/>
+          <p:nvPr/>
+        </p:nvSpPr>
+        <p:spPr>
+          <a:xfrm>
+            <a:off x="6048756" y="2743200"/>
+            <a:ext cx="64008" cy="228600"/>
+          </a:xfrm>
+          <a:prstGeom prst="rect">
+            <a:avLst/>
+          </a:prstGeom>
+          <a:solidFill>
+            <a:srgbClr val="C00000"/>
+          </a:solidFill>
+          <a:ln>
+            <a:noFill/>
+          </a:ln>
+          <a:effectLst/>
+        </p:spPr>
+        <p:style>
+          <a:lnRef idx="1">
+            <a:schemeClr val="accent1"/>
+          </a:lnRef>
+          <a:fillRef idx="3">
+            <a:schemeClr val="accent1"/>
+          </a:fillRef>
+          <a:effectRef idx="2">
+            <a:schemeClr val="accent1"/>
+          </a:effectRef>
+          <a:fontRef idx="minor">
+            <a:schemeClr val="lt1"/>
+          </a:fontRef>
+        </p:style>
+        <p:txBody>
+          <a:bodyPr rtlCol="0" anchor="ctr"/>
+          <a:lstStyle/>
+          <a:p/>
+        </p:txBody>
+      </p:sp>
+      <p:sp>
+        <p:nvSpPr>
+          <p:cNvPr id="14" name="Marca nominal abaixo"/>
+          <p:cNvSpPr/>
+          <p:nvPr/>
+        </p:nvSpPr>
+        <p:spPr>
+          <a:xfrm>
+            <a:off x="6048756" y="3749040"/>
+            <a:ext cx="64008" cy="228600"/>
+          </a:xfrm>
+          <a:prstGeom prst="rect">
+            <a:avLst/>
+          </a:prstGeom>
+          <a:solidFill>
+            <a:srgbClr val="C00000"/>
+          </a:solidFill>
+          <a:ln>
+            <a:noFill/>
+          </a:ln>
+          <a:effectLst/>
+        </p:spPr>
+        <p:style>
+          <a:lnRef idx="1">
+            <a:schemeClr val="accent1"/>
+          </a:lnRef>
+          <a:fillRef idx="3">
+            <a:schemeClr val="accent1"/>
+          </a:fillRef>
+          <a:effectRef idx="2">
+            <a:schemeClr val="accent1"/>
+          </a:effectRef>
+          <a:fontRef idx="minor">
+            <a:schemeClr val="lt1"/>
+          </a:fontRef>
+        </p:style>
+        <p:txBody>
+          <a:bodyPr rtlCol="0" anchor="ctr"/>
+          <a:lstStyle/>
+          <a:p/>
+        </p:txBody>
+      </p:sp>
+      <p:sp>
+        <p:nvSpPr>
+          <p:cNvPr id="15" name="TextBox 14"/>
+          <p:cNvSpPr txBox="1"/>
+          <p:nvPr/>
+        </p:nvSpPr>
+        <p:spPr>
+          <a:xfrm>
+            <a:off x="4983480" y="1965960"/>
+            <a:ext cx="2194560" cy="777240"/>
+          </a:xfrm>
+          <a:prstGeom prst="rect">
+            <a:avLst/>
+          </a:prstGeom>
+          <a:noFill/>
+        </p:spPr>
+        <p:txBody>
+          <a:bodyPr wrap="square" anchor="b" lIns="73152" rIns="73152" tIns="36576" bIns="36576">
+            <a:spAutoFit/>
+          </a:bodyPr>
+          <a:lstStyle/>
+          <a:p>
+            <a:pPr algn="ctr"/>
+            <a:r>
+              <a:rPr sz="4400" b="1" i="0">
+                <a:solidFill>
+                  <a:srgbClr val="C00000"/>
+                </a:solidFill>
+                <a:latin typeface="Calibri"/>
+              </a:rPr>
+              <a:t>40</a:t>
+            </a:r>
+          </a:p>
+        </p:txBody>
+      </p:sp>
+      <p:sp>
+        <p:nvSpPr>
+          <p:cNvPr id="16" name="TextBox 15"/>
+          <p:cNvSpPr txBox="1"/>
+          <p:nvPr/>
+        </p:nvSpPr>
+        <p:spPr>
+          <a:xfrm>
+            <a:off x="4983480" y="4023360"/>
+            <a:ext cx="2194560" cy="457200"/>
+          </a:xfrm>
+          <a:prstGeom prst="rect">
+            <a:avLst/>
+          </a:prstGeom>
+          <a:noFill/>
+        </p:spPr>
+        <p:txBody>
+          <a:bodyPr wrap="square" anchor="t" lIns="73152" rIns="73152" tIns="36576" bIns="36576">
+            <a:spAutoFit/>
+          </a:bodyPr>
+          <a:lstStyle/>
+          <a:p>
+            <a:pPr algn="ctr"/>
+            <a:r>
+              <a:rPr sz="2400" b="0" i="0">
+                <a:solidFill>
+                  <a:srgbClr val="4A5568"/>
+                </a:solidFill>
+                <a:latin typeface="Calibri"/>
+              </a:rPr>
+              <a:t>nominal</a:t>
+            </a:r>
+          </a:p>
+        </p:txBody>
+      </p:sp>
+      <p:sp>
+        <p:nvSpPr>
+          <p:cNvPr id="17" name="Linha máxima"/>
+          <p:cNvSpPr/>
+          <p:nvPr/>
+        </p:nvSpPr>
+        <p:spPr>
+          <a:xfrm>
+            <a:off x="9313164" y="2743200"/>
+            <a:ext cx="64008" cy="1234440"/>
+          </a:xfrm>
+          <a:prstGeom prst="rect">
+            <a:avLst/>
+          </a:prstGeom>
+          <a:solidFill>
+            <a:srgbClr val="002060"/>
+          </a:solidFill>
+          <a:ln>
+            <a:noFill/>
+          </a:ln>
+          <a:effectLst/>
+        </p:spPr>
+        <p:style>
+          <a:lnRef idx="1">
+            <a:schemeClr val="accent1"/>
+          </a:lnRef>
+          <a:fillRef idx="3">
+            <a:schemeClr val="accent1"/>
+          </a:fillRef>
+          <a:effectRef idx="2">
+            <a:schemeClr val="accent1"/>
+          </a:effectRef>
+          <a:fontRef idx="minor">
+            <a:schemeClr val="lt1"/>
+          </a:fontRef>
+        </p:style>
+        <p:txBody>
+          <a:bodyPr rtlCol="0" anchor="ctr"/>
+          <a:lstStyle/>
+          <a:p/>
+        </p:txBody>
+      </p:sp>
+      <p:sp>
+        <p:nvSpPr>
+          <p:cNvPr id="18" name="TextBox 17"/>
+          <p:cNvSpPr txBox="1"/>
+          <p:nvPr/>
+        </p:nvSpPr>
+        <p:spPr>
+          <a:xfrm>
+            <a:off x="8247888" y="1965960"/>
+            <a:ext cx="2194560" cy="777240"/>
+          </a:xfrm>
+          <a:prstGeom prst="rect">
+            <a:avLst/>
+          </a:prstGeom>
+          <a:noFill/>
+        </p:spPr>
+        <p:txBody>
+          <a:bodyPr wrap="square" anchor="b" lIns="73152" rIns="73152" tIns="36576" bIns="36576">
+            <a:spAutoFit/>
+          </a:bodyPr>
+          <a:lstStyle/>
+          <a:p>
+            <a:pPr algn="ctr"/>
+            <a:r>
+              <a:rPr sz="4400" b="1" i="0">
+                <a:solidFill>
+                  <a:srgbClr val="002060"/>
+                </a:solidFill>
+                <a:latin typeface="Calibri"/>
+              </a:rPr>
+              <a:t>40,3</a:t>
+            </a:r>
+          </a:p>
+        </p:txBody>
+      </p:sp>
+      <p:sp>
+        <p:nvSpPr>
+          <p:cNvPr id="19" name="TextBox 18"/>
+          <p:cNvSpPr txBox="1"/>
+          <p:nvPr/>
+        </p:nvSpPr>
+        <p:spPr>
+          <a:xfrm>
+            <a:off x="8247888" y="4023360"/>
+            <a:ext cx="2194560" cy="457200"/>
+          </a:xfrm>
+          <a:prstGeom prst="rect">
+            <a:avLst/>
+          </a:prstGeom>
+          <a:noFill/>
+        </p:spPr>
+        <p:txBody>
+          <a:bodyPr wrap="square" anchor="t" lIns="73152" rIns="73152" tIns="36576" bIns="36576">
+            <a:spAutoFit/>
+          </a:bodyPr>
+          <a:lstStyle/>
+          <a:p>
+            <a:pPr algn="ctr"/>
+            <a:r>
+              <a:rPr sz="2400" b="0" i="0">
+                <a:solidFill>
+                  <a:srgbClr val="4A5568"/>
+                </a:solidFill>
+                <a:latin typeface="Calibri"/>
+              </a:rPr>
+              <a:t>máxima</a:t>
+            </a:r>
+          </a:p>
+        </p:txBody>
+      </p:sp>
+      <p:cxnSp>
+        <p:nvCxnSpPr>
+          <p:cNvPr id="20" name="Connector 19"/>
+          <p:cNvCxnSpPr/>
+          <p:nvPr/>
+        </p:nvCxnSpPr>
+        <p:spPr>
+          <a:xfrm>
+            <a:off x="2816352" y="4663440"/>
+            <a:ext cx="6528816" cy="0"/>
+          </a:xfrm>
+          <a:prstGeom prst="line">
+            <a:avLst/>
+          </a:prstGeom>
+          <a:ln w="31750">
+            <a:solidFill>
+              <a:srgbClr val="002060"/>
+            </a:solidFill>
+            <a:headEnd type="triangle"/>
+            <a:tailEnd type="triangle"/>
+          </a:ln>
+        </p:spPr>
+        <p:style>
+          <a:lnRef idx="2">
+            <a:schemeClr val="accent1"/>
+          </a:lnRef>
+          <a:fillRef idx="0">
+            <a:schemeClr val="accent1"/>
+          </a:fillRef>
+          <a:effectRef idx="1">
+            <a:schemeClr val="accent1"/>
+          </a:effectRef>
+          <a:fontRef idx="minor">
+            <a:schemeClr val="tx1"/>
+          </a:fontRef>
+        </p:style>
+      </p:cxnSp>
+      <p:sp>
+        <p:nvSpPr>
+          <p:cNvPr id="21" name="TextBox 20"/>
+          <p:cNvSpPr txBox="1"/>
+          <p:nvPr/>
+        </p:nvSpPr>
+        <p:spPr>
+          <a:xfrm>
+            <a:off x="640080" y="4754880"/>
+            <a:ext cx="10881360" cy="594360"/>
+          </a:xfrm>
+          <a:prstGeom prst="rect">
+            <a:avLst/>
+          </a:prstGeom>
+          <a:noFill/>
+        </p:spPr>
+        <p:txBody>
+          <a:bodyPr wrap="square" anchor="t" lIns="73152" rIns="73152" tIns="36576" bIns="36576">
+            <a:spAutoFit/>
+          </a:bodyPr>
+          <a:lstStyle/>
+          <a:p>
+            <a:pPr algn="ctr"/>
+            <a:r>
+              <a:rPr sz="3000" b="1" i="0">
+                <a:solidFill>
+                  <a:srgbClr val="002060"/>
+                </a:solidFill>
+                <a:latin typeface="Calibri"/>
+              </a:rPr>
+              <a:t>Passam: 40,2 e 39,7 (no limite)  ·  Não passam: 40,35 e 39,6</a:t>
+            </a:r>
+          </a:p>
+        </p:txBody>
+      </p:sp>
+      <p:sp>
+        <p:nvSpPr>
+          <p:cNvPr id="22" name="TextBox 21"/>
+          <p:cNvSpPr txBox="1"/>
+          <p:nvPr/>
+        </p:nvSpPr>
+        <p:spPr>
+          <a:xfrm>
+            <a:off x="640080" y="5349240"/>
+            <a:ext cx="10881360" cy="548640"/>
+          </a:xfrm>
+          <a:prstGeom prst="rect">
+            <a:avLst/>
+          </a:prstGeom>
+          <a:noFill/>
+        </p:spPr>
+        <p:txBody>
+          <a:bodyPr wrap="square" anchor="t" lIns="73152" rIns="73152" tIns="36576" bIns="36576">
+            <a:spAutoFit/>
+          </a:bodyPr>
+          <a:lstStyle/>
+          <a:p>
+            <a:pPr algn="ctr"/>
+            <a:r>
+              <a:rPr sz="2400" b="0" i="0">
+                <a:solidFill>
+                  <a:srgbClr val="4A5568"/>
+                </a:solidFill>
+                <a:latin typeface="Calibri"/>
+              </a:rPr>
+              <a:t>Aceita de 40 − 0,3 = 39,7 até 40 + 0,3 = 40,3 mm</a:t>
+            </a:r>
+          </a:p>
+        </p:txBody>
+      </p:sp>
+    </p:spTree>
+  </p:cSld>
+  <p:clrMapOvr>
+    <a:masterClrMapping/>
+  </p:clrMapOvr>
+</p:sld>
+</file>
+
+<file path=ppt/slides/slide77.xml><?xml version="1.0" encoding="utf-8"?>
+<p:sld xmlns:a="http://schemas.openxmlformats.org/drawingml/2006/main" xmlns:p="http://schemas.openxmlformats.org/presentationml/2006/main" xmlns:r="http://schemas.openxmlformats.org/officeDocument/2006/relationships">
+  <p:cSld>
+    <p:spTree>
+      <p:nvGrpSpPr>
+        <p:cNvPr id="1" name=""/>
+        <p:cNvGrpSpPr/>
+        <p:nvPr/>
+      </p:nvGrpSpPr>
+      <p:grpSpPr/>
+      <p:pic>
+        <p:nvPicPr>
+          <p:cNvPr id="2" name="Fundo do modelo" descr="image.png"/>
+          <p:cNvPicPr>
+            <a:picLocks noChangeAspect="1"/>
+          </p:cNvPicPr>
+          <p:nvPr/>
+        </p:nvPicPr>
+        <p:blipFill>
+          <a:blip r:embed="rId2"/>
+          <a:stretch>
+            <a:fillRect/>
+          </a:stretch>
+        </p:blipFill>
+        <p:spPr>
+          <a:xfrm>
+            <a:off x="-29300" y="0"/>
+            <a:ext cx="12221300" cy="6857999"/>
+          </a:xfrm>
+          <a:prstGeom prst="rect">
+            <a:avLst/>
+          </a:prstGeom>
+        </p:spPr>
+      </p:pic>
+      <p:sp>
+        <p:nvSpPr>
+          <p:cNvPr id="3" name="Título"/>
+          <p:cNvSpPr txBox="1"/>
+          <p:nvPr/>
+        </p:nvSpPr>
+        <p:spPr>
+          <a:xfrm>
+            <a:off x="411480" y="713232"/>
+            <a:ext cx="9509760" cy="1051560"/>
+          </a:xfrm>
+          <a:prstGeom prst="rect">
+            <a:avLst/>
+          </a:prstGeom>
+          <a:noFill/>
+        </p:spPr>
+        <p:txBody>
+          <a:bodyPr wrap="square" anchor="ctr" lIns="73152" rIns="73152">
+            <a:spAutoFit/>
+          </a:bodyPr>
+          <a:lstStyle/>
+          <a:p>
+            <a:r>
+              <a:rPr sz="3800" b="1">
+                <a:solidFill>
+                  <a:srgbClr val="C00000"/>
+                </a:solidFill>
+                <a:latin typeface="Calibri"/>
+              </a:rPr>
+              <a:t>EXERCÍCIO 6: TUDO JUNTO</a:t>
+            </a:r>
+          </a:p>
+        </p:txBody>
+      </p:sp>
+      <p:sp>
+        <p:nvSpPr>
+          <p:cNvPr id="4" name="Faixa FORA"/>
+          <p:cNvSpPr/>
+          <p:nvPr/>
+        </p:nvSpPr>
+        <p:spPr>
+          <a:xfrm>
+            <a:off x="640080" y="2926080"/>
+            <a:ext cx="2176272" cy="868680"/>
+          </a:xfrm>
+          <a:prstGeom prst="rect">
+            <a:avLst/>
+          </a:prstGeom>
+          <a:solidFill>
+            <a:srgbClr val="F8DFDF"/>
+          </a:solidFill>
+          <a:ln>
+            <a:noFill/>
+          </a:ln>
+          <a:effectLst/>
+        </p:spPr>
+        <p:style>
+          <a:lnRef idx="1">
+            <a:schemeClr val="accent1"/>
+          </a:lnRef>
+          <a:fillRef idx="3">
+            <a:schemeClr val="accent1"/>
+          </a:fillRef>
+          <a:effectRef idx="2">
+            <a:schemeClr val="accent1"/>
+          </a:effectRef>
+          <a:fontRef idx="minor">
+            <a:schemeClr val="lt1"/>
+          </a:fontRef>
+        </p:style>
+        <p:txBody>
+          <a:bodyPr rtlCol="0" anchor="ctr"/>
+          <a:lstStyle/>
+          <a:p/>
+        </p:txBody>
+      </p:sp>
+      <p:sp>
+        <p:nvSpPr>
+          <p:cNvPr id="5" name="TextBox 4"/>
+          <p:cNvSpPr txBox="1"/>
+          <p:nvPr/>
+        </p:nvSpPr>
+        <p:spPr>
+          <a:xfrm>
+            <a:off x="640080" y="2926080"/>
+            <a:ext cx="2176272" cy="868680"/>
+          </a:xfrm>
+          <a:prstGeom prst="rect">
+            <a:avLst/>
+          </a:prstGeom>
+          <a:noFill/>
+        </p:spPr>
+        <p:txBody>
+          <a:bodyPr wrap="square" anchor="ctr" lIns="73152" rIns="73152" tIns="36576" bIns="36576">
+            <a:spAutoFit/>
+          </a:bodyPr>
+          <a:lstStyle/>
+          <a:p>
+            <a:pPr algn="ctr"/>
+            <a:r>
+              <a:rPr sz="2600" b="1" i="0">
+                <a:solidFill>
+                  <a:srgbClr val="C00000"/>
+                </a:solidFill>
+                <a:latin typeface="Calibri"/>
+              </a:rPr>
+              <a:t>FORA</a:t>
+            </a:r>
+          </a:p>
+        </p:txBody>
+      </p:sp>
+      <p:sp>
+        <p:nvSpPr>
+          <p:cNvPr id="6" name="Faixa DENTRO"/>
+          <p:cNvSpPr/>
+          <p:nvPr/>
+        </p:nvSpPr>
+        <p:spPr>
+          <a:xfrm>
+            <a:off x="2816352" y="2926080"/>
+            <a:ext cx="6528816" cy="868680"/>
+          </a:xfrm>
+          <a:prstGeom prst="rect">
+            <a:avLst/>
+          </a:prstGeom>
+          <a:solidFill>
+            <a:srgbClr val="DDF0E4"/>
+          </a:solidFill>
+          <a:ln>
+            <a:noFill/>
+          </a:ln>
+          <a:effectLst/>
+        </p:spPr>
+        <p:style>
+          <a:lnRef idx="1">
+            <a:schemeClr val="accent1"/>
+          </a:lnRef>
+          <a:fillRef idx="3">
+            <a:schemeClr val="accent1"/>
+          </a:fillRef>
+          <a:effectRef idx="2">
+            <a:schemeClr val="accent1"/>
+          </a:effectRef>
+          <a:fontRef idx="minor">
+            <a:schemeClr val="lt1"/>
+          </a:fontRef>
+        </p:style>
+        <p:txBody>
+          <a:bodyPr rtlCol="0" anchor="ctr"/>
+          <a:lstStyle/>
+          <a:p/>
+        </p:txBody>
+      </p:sp>
+      <p:sp>
+        <p:nvSpPr>
+          <p:cNvPr id="7" name="TextBox 6"/>
+          <p:cNvSpPr txBox="1"/>
+          <p:nvPr/>
+        </p:nvSpPr>
+        <p:spPr>
+          <a:xfrm>
+            <a:off x="2816352" y="2926080"/>
+            <a:ext cx="6528816" cy="868680"/>
+          </a:xfrm>
+          <a:prstGeom prst="rect">
+            <a:avLst/>
+          </a:prstGeom>
+          <a:noFill/>
+        </p:spPr>
+        <p:txBody>
+          <a:bodyPr wrap="square" anchor="ctr" lIns="73152" rIns="73152" tIns="36576" bIns="36576">
+            <a:spAutoFit/>
+          </a:bodyPr>
+          <a:lstStyle/>
+          <a:p>
+            <a:pPr algn="ctr"/>
+            <a:r>
+              <a:rPr sz="2600" b="1" i="0">
+                <a:solidFill>
+                  <a:srgbClr val="1E7A46"/>
+                </a:solidFill>
+                <a:latin typeface="Calibri"/>
+              </a:rPr>
+              <a:t>DENTRO</a:t>
+            </a:r>
+          </a:p>
+        </p:txBody>
+      </p:sp>
+      <p:sp>
+        <p:nvSpPr>
+          <p:cNvPr id="8" name="Faixa FORA"/>
+          <p:cNvSpPr/>
+          <p:nvPr/>
+        </p:nvSpPr>
+        <p:spPr>
+          <a:xfrm>
+            <a:off x="9345168" y="2926080"/>
+            <a:ext cx="2176271" cy="868680"/>
+          </a:xfrm>
+          <a:prstGeom prst="rect">
+            <a:avLst/>
+          </a:prstGeom>
+          <a:solidFill>
+            <a:srgbClr val="F8DFDF"/>
+          </a:solidFill>
+          <a:ln>
+            <a:noFill/>
+          </a:ln>
+          <a:effectLst/>
+        </p:spPr>
+        <p:style>
+          <a:lnRef idx="1">
+            <a:schemeClr val="accent1"/>
+          </a:lnRef>
+          <a:fillRef idx="3">
+            <a:schemeClr val="accent1"/>
+          </a:fillRef>
+          <a:effectRef idx="2">
+            <a:schemeClr val="accent1"/>
+          </a:effectRef>
+          <a:fontRef idx="minor">
+            <a:schemeClr val="lt1"/>
+          </a:fontRef>
+        </p:style>
+        <p:txBody>
+          <a:bodyPr rtlCol="0" anchor="ctr"/>
+          <a:lstStyle/>
+          <a:p/>
+        </p:txBody>
+      </p:sp>
+      <p:sp>
+        <p:nvSpPr>
+          <p:cNvPr id="9" name="TextBox 8"/>
+          <p:cNvSpPr txBox="1"/>
+          <p:nvPr/>
+        </p:nvSpPr>
+        <p:spPr>
+          <a:xfrm>
+            <a:off x="9345168" y="2926080"/>
+            <a:ext cx="2176271" cy="868680"/>
+          </a:xfrm>
+          <a:prstGeom prst="rect">
+            <a:avLst/>
+          </a:prstGeom>
+          <a:noFill/>
+        </p:spPr>
+        <p:txBody>
+          <a:bodyPr wrap="square" anchor="ctr" lIns="73152" rIns="73152" tIns="36576" bIns="36576">
+            <a:spAutoFit/>
+          </a:bodyPr>
+          <a:lstStyle/>
+          <a:p>
+            <a:pPr algn="ctr"/>
+            <a:r>
+              <a:rPr sz="2600" b="1" i="0">
+                <a:solidFill>
+                  <a:srgbClr val="C00000"/>
+                </a:solidFill>
+                <a:latin typeface="Calibri"/>
+              </a:rPr>
+              <a:t>FORA</a:t>
+            </a:r>
+          </a:p>
+        </p:txBody>
+      </p:sp>
+      <p:sp>
+        <p:nvSpPr>
+          <p:cNvPr id="10" name="Linha mínima"/>
+          <p:cNvSpPr/>
+          <p:nvPr/>
+        </p:nvSpPr>
+        <p:spPr>
+          <a:xfrm>
+            <a:off x="2784348" y="2743200"/>
+            <a:ext cx="64008" cy="1234440"/>
+          </a:xfrm>
+          <a:prstGeom prst="rect">
+            <a:avLst/>
+          </a:prstGeom>
+          <a:solidFill>
+            <a:srgbClr val="002060"/>
+          </a:solidFill>
+          <a:ln>
+            <a:noFill/>
+          </a:ln>
+          <a:effectLst/>
+        </p:spPr>
+        <p:style>
+          <a:lnRef idx="1">
+            <a:schemeClr val="accent1"/>
+          </a:lnRef>
+          <a:fillRef idx="3">
+            <a:schemeClr val="accent1"/>
+          </a:fillRef>
+          <a:effectRef idx="2">
+            <a:schemeClr val="accent1"/>
+          </a:effectRef>
+          <a:fontRef idx="minor">
+            <a:schemeClr val="lt1"/>
+          </a:fontRef>
+        </p:style>
+        <p:txBody>
+          <a:bodyPr rtlCol="0" anchor="ctr"/>
+          <a:lstStyle/>
+          <a:p/>
+        </p:txBody>
+      </p:sp>
+      <p:sp>
+        <p:nvSpPr>
+          <p:cNvPr id="11" name="TextBox 10"/>
+          <p:cNvSpPr txBox="1"/>
+          <p:nvPr/>
+        </p:nvSpPr>
+        <p:spPr>
+          <a:xfrm>
+            <a:off x="1719072" y="1965960"/>
+            <a:ext cx="2194560" cy="777240"/>
+          </a:xfrm>
+          <a:prstGeom prst="rect">
+            <a:avLst/>
+          </a:prstGeom>
+          <a:noFill/>
+        </p:spPr>
+        <p:txBody>
+          <a:bodyPr wrap="square" anchor="b" lIns="73152" rIns="73152" tIns="36576" bIns="36576">
+            <a:spAutoFit/>
+          </a:bodyPr>
+          <a:lstStyle/>
+          <a:p>
+            <a:pPr algn="ctr"/>
+            <a:r>
+              <a:rPr sz="4400" b="1" i="0">
+                <a:solidFill>
+                  <a:srgbClr val="002060"/>
+                </a:solidFill>
+                <a:latin typeface="Calibri"/>
+              </a:rPr>
+              <a:t>?</a:t>
+            </a:r>
+          </a:p>
+        </p:txBody>
+      </p:sp>
+      <p:sp>
+        <p:nvSpPr>
+          <p:cNvPr id="12" name="TextBox 11"/>
+          <p:cNvSpPr txBox="1"/>
+          <p:nvPr/>
+        </p:nvSpPr>
+        <p:spPr>
+          <a:xfrm>
+            <a:off x="1719072" y="4023360"/>
+            <a:ext cx="2194560" cy="457200"/>
+          </a:xfrm>
+          <a:prstGeom prst="rect">
+            <a:avLst/>
+          </a:prstGeom>
+          <a:noFill/>
+        </p:spPr>
+        <p:txBody>
+          <a:bodyPr wrap="square" anchor="t" lIns="73152" rIns="73152" tIns="36576" bIns="36576">
+            <a:spAutoFit/>
+          </a:bodyPr>
+          <a:lstStyle/>
+          <a:p>
+            <a:pPr algn="ctr"/>
+            <a:r>
+              <a:rPr sz="2400" b="0" i="0">
+                <a:solidFill>
+                  <a:srgbClr val="4A5568"/>
+                </a:solidFill>
+                <a:latin typeface="Calibri"/>
+              </a:rPr>
+              <a:t>mínima</a:t>
+            </a:r>
+          </a:p>
+        </p:txBody>
+      </p:sp>
+      <p:sp>
+        <p:nvSpPr>
+          <p:cNvPr id="13" name="Marca nominal acima"/>
+          <p:cNvSpPr/>
+          <p:nvPr/>
+        </p:nvSpPr>
+        <p:spPr>
+          <a:xfrm>
+            <a:off x="6048756" y="2743200"/>
+            <a:ext cx="64008" cy="228600"/>
+          </a:xfrm>
+          <a:prstGeom prst="rect">
+            <a:avLst/>
+          </a:prstGeom>
+          <a:solidFill>
+            <a:srgbClr val="C00000"/>
+          </a:solidFill>
+          <a:ln>
+            <a:noFill/>
+          </a:ln>
+          <a:effectLst/>
+        </p:spPr>
+        <p:style>
+          <a:lnRef idx="1">
+            <a:schemeClr val="accent1"/>
+          </a:lnRef>
+          <a:fillRef idx="3">
+            <a:schemeClr val="accent1"/>
+          </a:fillRef>
+          <a:effectRef idx="2">
+            <a:schemeClr val="accent1"/>
+          </a:effectRef>
+          <a:fontRef idx="minor">
+            <a:schemeClr val="lt1"/>
+          </a:fontRef>
+        </p:style>
+        <p:txBody>
+          <a:bodyPr rtlCol="0" anchor="ctr"/>
+          <a:lstStyle/>
+          <a:p/>
+        </p:txBody>
+      </p:sp>
+      <p:sp>
+        <p:nvSpPr>
+          <p:cNvPr id="14" name="Marca nominal abaixo"/>
+          <p:cNvSpPr/>
+          <p:nvPr/>
+        </p:nvSpPr>
+        <p:spPr>
+          <a:xfrm>
+            <a:off x="6048756" y="3749040"/>
+            <a:ext cx="64008" cy="228600"/>
+          </a:xfrm>
+          <a:prstGeom prst="rect">
+            <a:avLst/>
+          </a:prstGeom>
+          <a:solidFill>
+            <a:srgbClr val="C00000"/>
+          </a:solidFill>
+          <a:ln>
+            <a:noFill/>
+          </a:ln>
+          <a:effectLst/>
+        </p:spPr>
+        <p:style>
+          <a:lnRef idx="1">
+            <a:schemeClr val="accent1"/>
+          </a:lnRef>
+          <a:fillRef idx="3">
+            <a:schemeClr val="accent1"/>
+          </a:fillRef>
+          <a:effectRef idx="2">
+            <a:schemeClr val="accent1"/>
+          </a:effectRef>
+          <a:fontRef idx="minor">
+            <a:schemeClr val="lt1"/>
+          </a:fontRef>
+        </p:style>
+        <p:txBody>
+          <a:bodyPr rtlCol="0" anchor="ctr"/>
+          <a:lstStyle/>
+          <a:p/>
+        </p:txBody>
+      </p:sp>
+      <p:sp>
+        <p:nvSpPr>
+          <p:cNvPr id="15" name="TextBox 14"/>
+          <p:cNvSpPr txBox="1"/>
+          <p:nvPr/>
+        </p:nvSpPr>
+        <p:spPr>
+          <a:xfrm>
+            <a:off x="4983480" y="1965960"/>
+            <a:ext cx="2194560" cy="777240"/>
+          </a:xfrm>
+          <a:prstGeom prst="rect">
+            <a:avLst/>
+          </a:prstGeom>
+          <a:noFill/>
+        </p:spPr>
+        <p:txBody>
+          <a:bodyPr wrap="square" anchor="b" lIns="73152" rIns="73152" tIns="36576" bIns="36576">
+            <a:spAutoFit/>
+          </a:bodyPr>
+          <a:lstStyle/>
+          <a:p>
+            <a:pPr algn="ctr"/>
+            <a:r>
+              <a:rPr sz="4400" b="1" i="0">
+                <a:solidFill>
+                  <a:srgbClr val="C00000"/>
+                </a:solidFill>
+                <a:latin typeface="Calibri"/>
+              </a:rPr>
+              <a:t>2.500"</a:t>
+            </a:r>
+          </a:p>
+        </p:txBody>
+      </p:sp>
+      <p:sp>
+        <p:nvSpPr>
+          <p:cNvPr id="16" name="TextBox 15"/>
+          <p:cNvSpPr txBox="1"/>
+          <p:nvPr/>
+        </p:nvSpPr>
+        <p:spPr>
+          <a:xfrm>
+            <a:off x="4983480" y="4023360"/>
+            <a:ext cx="2194560" cy="457200"/>
+          </a:xfrm>
+          <a:prstGeom prst="rect">
+            <a:avLst/>
+          </a:prstGeom>
+          <a:noFill/>
+        </p:spPr>
+        <p:txBody>
+          <a:bodyPr wrap="square" anchor="t" lIns="73152" rIns="73152" tIns="36576" bIns="36576">
+            <a:spAutoFit/>
+          </a:bodyPr>
+          <a:lstStyle/>
+          <a:p>
+            <a:pPr algn="ctr"/>
+            <a:r>
+              <a:rPr sz="2400" b="0" i="0">
+                <a:solidFill>
+                  <a:srgbClr val="4A5568"/>
+                </a:solidFill>
+                <a:latin typeface="Calibri"/>
+              </a:rPr>
+              <a:t>nominal</a:t>
+            </a:r>
+          </a:p>
+        </p:txBody>
+      </p:sp>
+      <p:sp>
+        <p:nvSpPr>
+          <p:cNvPr id="17" name="Linha máxima"/>
+          <p:cNvSpPr/>
+          <p:nvPr/>
+        </p:nvSpPr>
+        <p:spPr>
+          <a:xfrm>
+            <a:off x="9313164" y="2743200"/>
+            <a:ext cx="64008" cy="1234440"/>
+          </a:xfrm>
+          <a:prstGeom prst="rect">
+            <a:avLst/>
+          </a:prstGeom>
+          <a:solidFill>
+            <a:srgbClr val="002060"/>
+          </a:solidFill>
+          <a:ln>
+            <a:noFill/>
+          </a:ln>
+          <a:effectLst/>
+        </p:spPr>
+        <p:style>
+          <a:lnRef idx="1">
+            <a:schemeClr val="accent1"/>
+          </a:lnRef>
+          <a:fillRef idx="3">
+            <a:schemeClr val="accent1"/>
+          </a:fillRef>
+          <a:effectRef idx="2">
+            <a:schemeClr val="accent1"/>
+          </a:effectRef>
+          <a:fontRef idx="minor">
+            <a:schemeClr val="lt1"/>
+          </a:fontRef>
+        </p:style>
+        <p:txBody>
+          <a:bodyPr rtlCol="0" anchor="ctr"/>
+          <a:lstStyle/>
+          <a:p/>
+        </p:txBody>
+      </p:sp>
+      <p:sp>
+        <p:nvSpPr>
+          <p:cNvPr id="18" name="TextBox 17"/>
+          <p:cNvSpPr txBox="1"/>
+          <p:nvPr/>
+        </p:nvSpPr>
+        <p:spPr>
+          <a:xfrm>
+            <a:off x="8247888" y="1965960"/>
+            <a:ext cx="2194560" cy="777240"/>
+          </a:xfrm>
+          <a:prstGeom prst="rect">
+            <a:avLst/>
+          </a:prstGeom>
+          <a:noFill/>
+        </p:spPr>
+        <p:txBody>
+          <a:bodyPr wrap="square" anchor="b" lIns="73152" rIns="73152" tIns="36576" bIns="36576">
+            <a:spAutoFit/>
+          </a:bodyPr>
+          <a:lstStyle/>
+          <a:p>
+            <a:pPr algn="ctr"/>
+            <a:r>
+              <a:rPr sz="4400" b="1" i="0">
+                <a:solidFill>
+                  <a:srgbClr val="002060"/>
+                </a:solidFill>
+                <a:latin typeface="Calibri"/>
+              </a:rPr>
+              <a:t>?</a:t>
+            </a:r>
+          </a:p>
+        </p:txBody>
+      </p:sp>
+      <p:sp>
+        <p:nvSpPr>
+          <p:cNvPr id="19" name="TextBox 18"/>
+          <p:cNvSpPr txBox="1"/>
+          <p:nvPr/>
+        </p:nvSpPr>
+        <p:spPr>
+          <a:xfrm>
+            <a:off x="8247888" y="4023360"/>
+            <a:ext cx="2194560" cy="457200"/>
+          </a:xfrm>
+          <a:prstGeom prst="rect">
+            <a:avLst/>
+          </a:prstGeom>
+          <a:noFill/>
+        </p:spPr>
+        <p:txBody>
+          <a:bodyPr wrap="square" anchor="t" lIns="73152" rIns="73152" tIns="36576" bIns="36576">
+            <a:spAutoFit/>
+          </a:bodyPr>
+          <a:lstStyle/>
+          <a:p>
+            <a:pPr algn="ctr"/>
+            <a:r>
+              <a:rPr sz="2400" b="0" i="0">
+                <a:solidFill>
+                  <a:srgbClr val="4A5568"/>
+                </a:solidFill>
+                <a:latin typeface="Calibri"/>
+              </a:rPr>
+              <a:t>máxima</a:t>
+            </a:r>
+          </a:p>
+        </p:txBody>
+      </p:sp>
+      <p:cxnSp>
+        <p:nvCxnSpPr>
+          <p:cNvPr id="20" name="Connector 19"/>
+          <p:cNvCxnSpPr/>
+          <p:nvPr/>
+        </p:nvCxnSpPr>
+        <p:spPr>
+          <a:xfrm>
+            <a:off x="2816352" y="4663440"/>
+            <a:ext cx="6528816" cy="0"/>
+          </a:xfrm>
+          <a:prstGeom prst="line">
+            <a:avLst/>
+          </a:prstGeom>
+          <a:ln w="31750">
+            <a:solidFill>
+              <a:srgbClr val="002060"/>
+            </a:solidFill>
+            <a:headEnd type="triangle"/>
+            <a:tailEnd type="triangle"/>
+          </a:ln>
+        </p:spPr>
+        <p:style>
+          <a:lnRef idx="2">
+            <a:schemeClr val="accent1"/>
+          </a:lnRef>
+          <a:fillRef idx="0">
+            <a:schemeClr val="accent1"/>
+          </a:fillRef>
+          <a:effectRef idx="1">
+            <a:schemeClr val="accent1"/>
+          </a:effectRef>
+          <a:fontRef idx="minor">
+            <a:schemeClr val="tx1"/>
+          </a:fontRef>
+        </p:style>
+      </p:cxnSp>
+      <p:sp>
+        <p:nvSpPr>
+          <p:cNvPr id="21" name="TextBox 20"/>
+          <p:cNvSpPr txBox="1"/>
+          <p:nvPr/>
+        </p:nvSpPr>
+        <p:spPr>
+          <a:xfrm>
+            <a:off x="640080" y="4754880"/>
+            <a:ext cx="10881360" cy="594360"/>
+          </a:xfrm>
+          <a:prstGeom prst="rect">
+            <a:avLst/>
+          </a:prstGeom>
+          <a:noFill/>
+        </p:spPr>
+        <p:txBody>
+          <a:bodyPr wrap="square" anchor="t" lIns="73152" rIns="73152" tIns="36576" bIns="36576">
+            <a:spAutoFit/>
+          </a:bodyPr>
+          <a:lstStyle/>
+          <a:p>
+            <a:pPr algn="ctr"/>
+            <a:r>
+              <a:rPr sz="3000" b="1" i="0">
+                <a:solidFill>
+                  <a:srgbClr val="002060"/>
+                </a:solidFill>
+                <a:latin typeface="Calibri"/>
+              </a:rPr>
+              <a:t>Cota 2.500" ± .010". No exercício 5, o paquímetro leu 2.506".</a:t>
+            </a:r>
+          </a:p>
+        </p:txBody>
+      </p:sp>
+      <p:sp>
+        <p:nvSpPr>
+          <p:cNvPr id="22" name="TextBox 21"/>
+          <p:cNvSpPr txBox="1"/>
+          <p:nvPr/>
+        </p:nvSpPr>
+        <p:spPr>
+          <a:xfrm>
+            <a:off x="640080" y="5349240"/>
+            <a:ext cx="10881360" cy="548640"/>
+          </a:xfrm>
+          <a:prstGeom prst="rect">
+            <a:avLst/>
+          </a:prstGeom>
+          <a:noFill/>
+        </p:spPr>
+        <p:txBody>
+          <a:bodyPr wrap="square" anchor="t" lIns="73152" rIns="73152" tIns="36576" bIns="36576">
+            <a:spAutoFit/>
+          </a:bodyPr>
+          <a:lstStyle/>
+          <a:p>
+            <a:pPr algn="ctr"/>
+            <a:r>
+              <a:rPr sz="2400" b="0" i="0">
+                <a:solidFill>
+                  <a:srgbClr val="4A5568"/>
+                </a:solidFill>
+                <a:latin typeface="Calibri"/>
+              </a:rPr>
+              <a:t>Ache a mínima e a máxima. A peça passa ou não passa?</a:t>
+            </a:r>
+          </a:p>
+        </p:txBody>
+      </p:sp>
+    </p:spTree>
+  </p:cSld>
+  <p:clrMapOvr>
+    <a:masterClrMapping/>
+  </p:clrMapOvr>
+</p:sld>
+</file>
+
+<file path=ppt/slides/slide78.xml><?xml version="1.0" encoding="utf-8"?>
+<p:sld xmlns:a="http://schemas.openxmlformats.org/drawingml/2006/main" xmlns:p="http://schemas.openxmlformats.org/presentationml/2006/main" xmlns:r="http://schemas.openxmlformats.org/officeDocument/2006/relationships">
+  <p:cSld>
+    <p:spTree>
+      <p:nvGrpSpPr>
+        <p:cNvPr id="1" name=""/>
+        <p:cNvGrpSpPr/>
+        <p:nvPr/>
+      </p:nvGrpSpPr>
+      <p:grpSpPr/>
+      <p:pic>
+        <p:nvPicPr>
+          <p:cNvPr id="2" name="Fundo do modelo" descr="image.png"/>
+          <p:cNvPicPr>
+            <a:picLocks noChangeAspect="1"/>
+          </p:cNvPicPr>
+          <p:nvPr/>
+        </p:nvPicPr>
+        <p:blipFill>
+          <a:blip r:embed="rId2"/>
+          <a:stretch>
+            <a:fillRect/>
+          </a:stretch>
+        </p:blipFill>
+        <p:spPr>
+          <a:xfrm>
+            <a:off x="-29300" y="0"/>
+            <a:ext cx="12221300" cy="6857999"/>
+          </a:xfrm>
+          <a:prstGeom prst="rect">
+            <a:avLst/>
+          </a:prstGeom>
+        </p:spPr>
+      </p:pic>
+      <p:sp>
+        <p:nvSpPr>
+          <p:cNvPr id="3" name="Título"/>
+          <p:cNvSpPr txBox="1"/>
+          <p:nvPr/>
+        </p:nvSpPr>
+        <p:spPr>
+          <a:xfrm>
+            <a:off x="411480" y="713232"/>
+            <a:ext cx="9509760" cy="1051560"/>
+          </a:xfrm>
+          <a:prstGeom prst="rect">
+            <a:avLst/>
+          </a:prstGeom>
+          <a:noFill/>
+        </p:spPr>
+        <p:txBody>
+          <a:bodyPr wrap="square" anchor="ctr" lIns="73152" rIns="73152">
+            <a:spAutoFit/>
+          </a:bodyPr>
+          <a:lstStyle/>
+          <a:p>
+            <a:r>
+              <a:rPr sz="3800" b="1">
+                <a:solidFill>
+                  <a:srgbClr val="C00000"/>
+                </a:solidFill>
+                <a:latin typeface="Calibri"/>
+              </a:rPr>
+              <a:t>EXERCÍCIO 6: RESPOSTA</a:t>
+            </a:r>
+          </a:p>
+        </p:txBody>
+      </p:sp>
+      <p:sp>
+        <p:nvSpPr>
+          <p:cNvPr id="4" name="Faixa FORA"/>
+          <p:cNvSpPr/>
+          <p:nvPr/>
+        </p:nvSpPr>
+        <p:spPr>
+          <a:xfrm>
+            <a:off x="640080" y="2926080"/>
+            <a:ext cx="2176272" cy="868680"/>
+          </a:xfrm>
+          <a:prstGeom prst="rect">
+            <a:avLst/>
+          </a:prstGeom>
+          <a:solidFill>
+            <a:srgbClr val="F8DFDF"/>
+          </a:solidFill>
+          <a:ln>
+            <a:noFill/>
+          </a:ln>
+          <a:effectLst/>
+        </p:spPr>
+        <p:style>
+          <a:lnRef idx="1">
+            <a:schemeClr val="accent1"/>
+          </a:lnRef>
+          <a:fillRef idx="3">
+            <a:schemeClr val="accent1"/>
+          </a:fillRef>
+          <a:effectRef idx="2">
+            <a:schemeClr val="accent1"/>
+          </a:effectRef>
+          <a:fontRef idx="minor">
+            <a:schemeClr val="lt1"/>
+          </a:fontRef>
+        </p:style>
+        <p:txBody>
+          <a:bodyPr rtlCol="0" anchor="ctr"/>
+          <a:lstStyle/>
+          <a:p/>
+        </p:txBody>
+      </p:sp>
+      <p:sp>
+        <p:nvSpPr>
+          <p:cNvPr id="5" name="TextBox 4"/>
+          <p:cNvSpPr txBox="1"/>
+          <p:nvPr/>
+        </p:nvSpPr>
+        <p:spPr>
+          <a:xfrm>
+            <a:off x="640080" y="2926080"/>
+            <a:ext cx="2176272" cy="868680"/>
+          </a:xfrm>
+          <a:prstGeom prst="rect">
+            <a:avLst/>
+          </a:prstGeom>
+          <a:noFill/>
+        </p:spPr>
+        <p:txBody>
+          <a:bodyPr wrap="square" anchor="ctr" lIns="73152" rIns="73152" tIns="36576" bIns="36576">
+            <a:spAutoFit/>
+          </a:bodyPr>
+          <a:lstStyle/>
+          <a:p>
+            <a:pPr algn="ctr"/>
+            <a:r>
+              <a:rPr sz="2600" b="1" i="0">
+                <a:solidFill>
+                  <a:srgbClr val="C00000"/>
+                </a:solidFill>
+                <a:latin typeface="Calibri"/>
+              </a:rPr>
+              <a:t>FORA</a:t>
+            </a:r>
+          </a:p>
+        </p:txBody>
+      </p:sp>
+      <p:sp>
+        <p:nvSpPr>
+          <p:cNvPr id="6" name="Faixa DENTRO"/>
+          <p:cNvSpPr/>
+          <p:nvPr/>
+        </p:nvSpPr>
+        <p:spPr>
+          <a:xfrm>
+            <a:off x="2816352" y="2926080"/>
+            <a:ext cx="6528816" cy="868680"/>
+          </a:xfrm>
+          <a:prstGeom prst="rect">
+            <a:avLst/>
+          </a:prstGeom>
+          <a:solidFill>
+            <a:srgbClr val="DDF0E4"/>
+          </a:solidFill>
+          <a:ln>
+            <a:noFill/>
+          </a:ln>
+          <a:effectLst/>
+        </p:spPr>
+        <p:style>
+          <a:lnRef idx="1">
+            <a:schemeClr val="accent1"/>
+          </a:lnRef>
+          <a:fillRef idx="3">
+            <a:schemeClr val="accent1"/>
+          </a:fillRef>
+          <a:effectRef idx="2">
+            <a:schemeClr val="accent1"/>
+          </a:effectRef>
+          <a:fontRef idx="minor">
+            <a:schemeClr val="lt1"/>
+          </a:fontRef>
+        </p:style>
+        <p:txBody>
+          <a:bodyPr rtlCol="0" anchor="ctr"/>
+          <a:lstStyle/>
+          <a:p/>
+        </p:txBody>
+      </p:sp>
+      <p:sp>
+        <p:nvSpPr>
+          <p:cNvPr id="7" name="TextBox 6"/>
+          <p:cNvSpPr txBox="1"/>
+          <p:nvPr/>
+        </p:nvSpPr>
+        <p:spPr>
+          <a:xfrm>
+            <a:off x="2816352" y="2926080"/>
+            <a:ext cx="6528816" cy="868680"/>
+          </a:xfrm>
+          <a:prstGeom prst="rect">
+            <a:avLst/>
+          </a:prstGeom>
+          <a:noFill/>
+        </p:spPr>
+        <p:txBody>
+          <a:bodyPr wrap="square" anchor="ctr" lIns="73152" rIns="73152" tIns="36576" bIns="36576">
+            <a:spAutoFit/>
+          </a:bodyPr>
+          <a:lstStyle/>
+          <a:p>
+            <a:pPr algn="ctr"/>
+            <a:r>
+              <a:rPr sz="2600" b="1" i="0">
+                <a:solidFill>
+                  <a:srgbClr val="1E7A46"/>
+                </a:solidFill>
+                <a:latin typeface="Calibri"/>
+              </a:rPr>
+              <a:t>DENTRO</a:t>
+            </a:r>
+          </a:p>
+        </p:txBody>
+      </p:sp>
+      <p:sp>
+        <p:nvSpPr>
+          <p:cNvPr id="8" name="Faixa FORA"/>
+          <p:cNvSpPr/>
+          <p:nvPr/>
+        </p:nvSpPr>
+        <p:spPr>
+          <a:xfrm>
+            <a:off x="9345168" y="2926080"/>
+            <a:ext cx="2176271" cy="868680"/>
+          </a:xfrm>
+          <a:prstGeom prst="rect">
+            <a:avLst/>
+          </a:prstGeom>
+          <a:solidFill>
+            <a:srgbClr val="F8DFDF"/>
+          </a:solidFill>
+          <a:ln>
+            <a:noFill/>
+          </a:ln>
+          <a:effectLst/>
+        </p:spPr>
+        <p:style>
+          <a:lnRef idx="1">
+            <a:schemeClr val="accent1"/>
+          </a:lnRef>
+          <a:fillRef idx="3">
+            <a:schemeClr val="accent1"/>
+          </a:fillRef>
+          <a:effectRef idx="2">
+            <a:schemeClr val="accent1"/>
+          </a:effectRef>
+          <a:fontRef idx="minor">
+            <a:schemeClr val="lt1"/>
+          </a:fontRef>
+        </p:style>
+        <p:txBody>
+          <a:bodyPr rtlCol="0" anchor="ctr"/>
+          <a:lstStyle/>
+          <a:p/>
+        </p:txBody>
+      </p:sp>
+      <p:sp>
+        <p:nvSpPr>
+          <p:cNvPr id="9" name="TextBox 8"/>
+          <p:cNvSpPr txBox="1"/>
+          <p:nvPr/>
+        </p:nvSpPr>
+        <p:spPr>
+          <a:xfrm>
+            <a:off x="9345168" y="2926080"/>
+            <a:ext cx="2176271" cy="868680"/>
+          </a:xfrm>
+          <a:prstGeom prst="rect">
+            <a:avLst/>
+          </a:prstGeom>
+          <a:noFill/>
+        </p:spPr>
+        <p:txBody>
+          <a:bodyPr wrap="square" anchor="ctr" lIns="73152" rIns="73152" tIns="36576" bIns="36576">
+            <a:spAutoFit/>
+          </a:bodyPr>
+          <a:lstStyle/>
+          <a:p>
+            <a:pPr algn="ctr"/>
+            <a:r>
+              <a:rPr sz="2600" b="1" i="0">
+                <a:solidFill>
+                  <a:srgbClr val="C00000"/>
+                </a:solidFill>
+                <a:latin typeface="Calibri"/>
+              </a:rPr>
+              <a:t>FORA</a:t>
+            </a:r>
+          </a:p>
+        </p:txBody>
+      </p:sp>
+      <p:sp>
+        <p:nvSpPr>
+          <p:cNvPr id="10" name="Linha mínima"/>
+          <p:cNvSpPr/>
+          <p:nvPr/>
+        </p:nvSpPr>
+        <p:spPr>
+          <a:xfrm>
+            <a:off x="2784348" y="2743200"/>
+            <a:ext cx="64008" cy="1234440"/>
+          </a:xfrm>
+          <a:prstGeom prst="rect">
+            <a:avLst/>
+          </a:prstGeom>
+          <a:solidFill>
+            <a:srgbClr val="002060"/>
+          </a:solidFill>
+          <a:ln>
+            <a:noFill/>
+          </a:ln>
+          <a:effectLst/>
+        </p:spPr>
+        <p:style>
+          <a:lnRef idx="1">
+            <a:schemeClr val="accent1"/>
+          </a:lnRef>
+          <a:fillRef idx="3">
+            <a:schemeClr val="accent1"/>
+          </a:fillRef>
+          <a:effectRef idx="2">
+            <a:schemeClr val="accent1"/>
+          </a:effectRef>
+          <a:fontRef idx="minor">
+            <a:schemeClr val="lt1"/>
+          </a:fontRef>
+        </p:style>
+        <p:txBody>
+          <a:bodyPr rtlCol="0" anchor="ctr"/>
+          <a:lstStyle/>
+          <a:p/>
+        </p:txBody>
+      </p:sp>
+      <p:sp>
+        <p:nvSpPr>
+          <p:cNvPr id="11" name="TextBox 10"/>
+          <p:cNvSpPr txBox="1"/>
+          <p:nvPr/>
+        </p:nvSpPr>
+        <p:spPr>
+          <a:xfrm>
+            <a:off x="1719072" y="1965960"/>
+            <a:ext cx="2194560" cy="777240"/>
+          </a:xfrm>
+          <a:prstGeom prst="rect">
+            <a:avLst/>
+          </a:prstGeom>
+          <a:noFill/>
+        </p:spPr>
+        <p:txBody>
+          <a:bodyPr wrap="square" anchor="b" lIns="73152" rIns="73152" tIns="36576" bIns="36576">
+            <a:spAutoFit/>
+          </a:bodyPr>
+          <a:lstStyle/>
+          <a:p>
+            <a:pPr algn="ctr"/>
+            <a:r>
+              <a:rPr sz="4400" b="1" i="0">
+                <a:solidFill>
+                  <a:srgbClr val="002060"/>
+                </a:solidFill>
+                <a:latin typeface="Calibri"/>
+              </a:rPr>
+              <a:t>2.490"</a:t>
+            </a:r>
+          </a:p>
+        </p:txBody>
+      </p:sp>
+      <p:sp>
+        <p:nvSpPr>
+          <p:cNvPr id="12" name="TextBox 11"/>
+          <p:cNvSpPr txBox="1"/>
+          <p:nvPr/>
+        </p:nvSpPr>
+        <p:spPr>
+          <a:xfrm>
+            <a:off x="1719072" y="4023360"/>
+            <a:ext cx="2194560" cy="457200"/>
+          </a:xfrm>
+          <a:prstGeom prst="rect">
+            <a:avLst/>
+          </a:prstGeom>
+          <a:noFill/>
+        </p:spPr>
+        <p:txBody>
+          <a:bodyPr wrap="square" anchor="t" lIns="73152" rIns="73152" tIns="36576" bIns="36576">
+            <a:spAutoFit/>
+          </a:bodyPr>
+          <a:lstStyle/>
+          <a:p>
+            <a:pPr algn="ctr"/>
+            <a:r>
+              <a:rPr sz="2400" b="0" i="0">
+                <a:solidFill>
+                  <a:srgbClr val="4A5568"/>
+                </a:solidFill>
+                <a:latin typeface="Calibri"/>
+              </a:rPr>
+              <a:t>mínima</a:t>
+            </a:r>
+          </a:p>
+        </p:txBody>
+      </p:sp>
+      <p:sp>
+        <p:nvSpPr>
+          <p:cNvPr id="13" name="Marca nominal acima"/>
+          <p:cNvSpPr/>
+          <p:nvPr/>
+        </p:nvSpPr>
+        <p:spPr>
+          <a:xfrm>
+            <a:off x="6048756" y="2743200"/>
+            <a:ext cx="64008" cy="228600"/>
+          </a:xfrm>
+          <a:prstGeom prst="rect">
+            <a:avLst/>
+          </a:prstGeom>
+          <a:solidFill>
+            <a:srgbClr val="C00000"/>
+          </a:solidFill>
+          <a:ln>
+            <a:noFill/>
+          </a:ln>
+          <a:effectLst/>
+        </p:spPr>
+        <p:style>
+          <a:lnRef idx="1">
+            <a:schemeClr val="accent1"/>
+          </a:lnRef>
+          <a:fillRef idx="3">
+            <a:schemeClr val="accent1"/>
+          </a:fillRef>
+          <a:effectRef idx="2">
+            <a:schemeClr val="accent1"/>
+          </a:effectRef>
+          <a:fontRef idx="minor">
+            <a:schemeClr val="lt1"/>
+          </a:fontRef>
+        </p:style>
+        <p:txBody>
+          <a:bodyPr rtlCol="0" anchor="ctr"/>
+          <a:lstStyle/>
+          <a:p/>
+        </p:txBody>
+      </p:sp>
+      <p:sp>
+        <p:nvSpPr>
+          <p:cNvPr id="14" name="Marca nominal abaixo"/>
+          <p:cNvSpPr/>
+          <p:nvPr/>
+        </p:nvSpPr>
+        <p:spPr>
+          <a:xfrm>
+            <a:off x="6048756" y="3749040"/>
+            <a:ext cx="64008" cy="228600"/>
+          </a:xfrm>
+          <a:prstGeom prst="rect">
+            <a:avLst/>
+          </a:prstGeom>
+          <a:solidFill>
+            <a:srgbClr val="C00000"/>
+          </a:solidFill>
+          <a:ln>
+            <a:noFill/>
+          </a:ln>
+          <a:effectLst/>
+        </p:spPr>
+        <p:style>
+          <a:lnRef idx="1">
+            <a:schemeClr val="accent1"/>
+          </a:lnRef>
+          <a:fillRef idx="3">
+            <a:schemeClr val="accent1"/>
+          </a:fillRef>
+          <a:effectRef idx="2">
+            <a:schemeClr val="accent1"/>
+          </a:effectRef>
+          <a:fontRef idx="minor">
+            <a:schemeClr val="lt1"/>
+          </a:fontRef>
+        </p:style>
+        <p:txBody>
+          <a:bodyPr rtlCol="0" anchor="ctr"/>
+          <a:lstStyle/>
+          <a:p/>
+        </p:txBody>
+      </p:sp>
+      <p:sp>
+        <p:nvSpPr>
+          <p:cNvPr id="15" name="TextBox 14"/>
+          <p:cNvSpPr txBox="1"/>
+          <p:nvPr/>
+        </p:nvSpPr>
+        <p:spPr>
+          <a:xfrm>
+            <a:off x="4983480" y="1965960"/>
+            <a:ext cx="2194560" cy="777240"/>
+          </a:xfrm>
+          <a:prstGeom prst="rect">
+            <a:avLst/>
+          </a:prstGeom>
+          <a:noFill/>
+        </p:spPr>
+        <p:txBody>
+          <a:bodyPr wrap="square" anchor="b" lIns="73152" rIns="73152" tIns="36576" bIns="36576">
+            <a:spAutoFit/>
+          </a:bodyPr>
+          <a:lstStyle/>
+          <a:p>
+            <a:pPr algn="ctr"/>
+            <a:r>
+              <a:rPr sz="4400" b="1" i="0">
+                <a:solidFill>
+                  <a:srgbClr val="C00000"/>
+                </a:solidFill>
+                <a:latin typeface="Calibri"/>
+              </a:rPr>
+              <a:t>2.500"</a:t>
+            </a:r>
+          </a:p>
+        </p:txBody>
+      </p:sp>
+      <p:sp>
+        <p:nvSpPr>
+          <p:cNvPr id="16" name="TextBox 15"/>
+          <p:cNvSpPr txBox="1"/>
+          <p:nvPr/>
+        </p:nvSpPr>
+        <p:spPr>
+          <a:xfrm>
+            <a:off x="4983480" y="4023360"/>
+            <a:ext cx="2194560" cy="457200"/>
+          </a:xfrm>
+          <a:prstGeom prst="rect">
+            <a:avLst/>
+          </a:prstGeom>
+          <a:noFill/>
+        </p:spPr>
+        <p:txBody>
+          <a:bodyPr wrap="square" anchor="t" lIns="73152" rIns="73152" tIns="36576" bIns="36576">
+            <a:spAutoFit/>
+          </a:bodyPr>
+          <a:lstStyle/>
+          <a:p>
+            <a:pPr algn="ctr"/>
+            <a:r>
+              <a:rPr sz="2400" b="0" i="0">
+                <a:solidFill>
+                  <a:srgbClr val="4A5568"/>
+                </a:solidFill>
+                <a:latin typeface="Calibri"/>
+              </a:rPr>
+              <a:t>nominal</a:t>
+            </a:r>
+          </a:p>
+        </p:txBody>
+      </p:sp>
+      <p:sp>
+        <p:nvSpPr>
+          <p:cNvPr id="17" name="Linha máxima"/>
+          <p:cNvSpPr/>
+          <p:nvPr/>
+        </p:nvSpPr>
+        <p:spPr>
+          <a:xfrm>
+            <a:off x="9313164" y="2743200"/>
+            <a:ext cx="64008" cy="1234440"/>
+          </a:xfrm>
+          <a:prstGeom prst="rect">
+            <a:avLst/>
+          </a:prstGeom>
+          <a:solidFill>
+            <a:srgbClr val="002060"/>
+          </a:solidFill>
+          <a:ln>
+            <a:noFill/>
+          </a:ln>
+          <a:effectLst/>
+        </p:spPr>
+        <p:style>
+          <a:lnRef idx="1">
+            <a:schemeClr val="accent1"/>
+          </a:lnRef>
+          <a:fillRef idx="3">
+            <a:schemeClr val="accent1"/>
+          </a:fillRef>
+          <a:effectRef idx="2">
+            <a:schemeClr val="accent1"/>
+          </a:effectRef>
+          <a:fontRef idx="minor">
+            <a:schemeClr val="lt1"/>
+          </a:fontRef>
+        </p:style>
+        <p:txBody>
+          <a:bodyPr rtlCol="0" anchor="ctr"/>
+          <a:lstStyle/>
+          <a:p/>
+        </p:txBody>
+      </p:sp>
+      <p:sp>
+        <p:nvSpPr>
+          <p:cNvPr id="18" name="TextBox 17"/>
+          <p:cNvSpPr txBox="1"/>
+          <p:nvPr/>
+        </p:nvSpPr>
+        <p:spPr>
+          <a:xfrm>
+            <a:off x="8247888" y="1965960"/>
+            <a:ext cx="2194560" cy="777240"/>
+          </a:xfrm>
+          <a:prstGeom prst="rect">
+            <a:avLst/>
+          </a:prstGeom>
+          <a:noFill/>
+        </p:spPr>
+        <p:txBody>
+          <a:bodyPr wrap="square" anchor="b" lIns="73152" rIns="73152" tIns="36576" bIns="36576">
+            <a:spAutoFit/>
+          </a:bodyPr>
+          <a:lstStyle/>
+          <a:p>
+            <a:pPr algn="ctr"/>
+            <a:r>
+              <a:rPr sz="4400" b="1" i="0">
+                <a:solidFill>
+                  <a:srgbClr val="002060"/>
+                </a:solidFill>
+                <a:latin typeface="Calibri"/>
+              </a:rPr>
+              <a:t>2.510"</a:t>
+            </a:r>
+          </a:p>
+        </p:txBody>
+      </p:sp>
+      <p:sp>
+        <p:nvSpPr>
+          <p:cNvPr id="19" name="TextBox 18"/>
+          <p:cNvSpPr txBox="1"/>
+          <p:nvPr/>
+        </p:nvSpPr>
+        <p:spPr>
+          <a:xfrm>
+            <a:off x="8247888" y="4023360"/>
+            <a:ext cx="2194560" cy="457200"/>
+          </a:xfrm>
+          <a:prstGeom prst="rect">
+            <a:avLst/>
+          </a:prstGeom>
+          <a:noFill/>
+        </p:spPr>
+        <p:txBody>
+          <a:bodyPr wrap="square" anchor="t" lIns="73152" rIns="73152" tIns="36576" bIns="36576">
+            <a:spAutoFit/>
+          </a:bodyPr>
+          <a:lstStyle/>
+          <a:p>
+            <a:pPr algn="ctr"/>
+            <a:r>
+              <a:rPr sz="2400" b="0" i="0">
+                <a:solidFill>
+                  <a:srgbClr val="4A5568"/>
+                </a:solidFill>
+                <a:latin typeface="Calibri"/>
+              </a:rPr>
+              <a:t>máxima</a:t>
+            </a:r>
+          </a:p>
+        </p:txBody>
+      </p:sp>
+      <p:cxnSp>
+        <p:nvCxnSpPr>
+          <p:cNvPr id="20" name="Connector 19"/>
+          <p:cNvCxnSpPr/>
+          <p:nvPr/>
+        </p:nvCxnSpPr>
+        <p:spPr>
+          <a:xfrm>
+            <a:off x="2816352" y="4663440"/>
+            <a:ext cx="6528816" cy="0"/>
+          </a:xfrm>
+          <a:prstGeom prst="line">
+            <a:avLst/>
+          </a:prstGeom>
+          <a:ln w="31750">
+            <a:solidFill>
+              <a:srgbClr val="002060"/>
+            </a:solidFill>
+            <a:headEnd type="triangle"/>
+            <a:tailEnd type="triangle"/>
+          </a:ln>
+        </p:spPr>
+        <p:style>
+          <a:lnRef idx="2">
+            <a:schemeClr val="accent1"/>
+          </a:lnRef>
+          <a:fillRef idx="0">
+            <a:schemeClr val="accent1"/>
+          </a:fillRef>
+          <a:effectRef idx="1">
+            <a:schemeClr val="accent1"/>
+          </a:effectRef>
+          <a:fontRef idx="minor">
+            <a:schemeClr val="tx1"/>
+          </a:fontRef>
+        </p:style>
+      </p:cxnSp>
+      <p:sp>
+        <p:nvSpPr>
+          <p:cNvPr id="21" name="TextBox 20"/>
+          <p:cNvSpPr txBox="1"/>
+          <p:nvPr/>
+        </p:nvSpPr>
+        <p:spPr>
+          <a:xfrm>
+            <a:off x="640080" y="4754880"/>
+            <a:ext cx="10881360" cy="594360"/>
+          </a:xfrm>
+          <a:prstGeom prst="rect">
+            <a:avLst/>
+          </a:prstGeom>
+          <a:noFill/>
+        </p:spPr>
+        <p:txBody>
+          <a:bodyPr wrap="square" anchor="t" lIns="73152" rIns="73152" tIns="36576" bIns="36576">
+            <a:spAutoFit/>
+          </a:bodyPr>
+          <a:lstStyle/>
+          <a:p>
+            <a:pPr algn="ctr"/>
+            <a:r>
+              <a:rPr sz="3000" b="1" i="0">
+                <a:solidFill>
+                  <a:srgbClr val="002060"/>
+                </a:solidFill>
+                <a:latin typeface="Calibri"/>
+              </a:rPr>
+              <a:t>Aceita de 2.490" a 2.510". 2.506" está dentro: PASSA.</a:t>
+            </a:r>
+          </a:p>
+        </p:txBody>
+      </p:sp>
+      <p:sp>
+        <p:nvSpPr>
+          <p:cNvPr id="22" name="TextBox 21"/>
+          <p:cNvSpPr txBox="1"/>
+          <p:nvPr/>
+        </p:nvSpPr>
+        <p:spPr>
+          <a:xfrm>
+            <a:off x="640080" y="5349240"/>
+            <a:ext cx="10881360" cy="548640"/>
+          </a:xfrm>
+          <a:prstGeom prst="rect">
+            <a:avLst/>
+          </a:prstGeom>
+          <a:noFill/>
+        </p:spPr>
+        <p:txBody>
+          <a:bodyPr wrap="square" anchor="t" lIns="73152" rIns="73152" tIns="36576" bIns="36576">
+            <a:spAutoFit/>
+          </a:bodyPr>
+          <a:lstStyle/>
+          <a:p>
+            <a:pPr algn="ctr"/>
+            <a:r>
+              <a:rPr sz="2400" b="0" i="0">
+                <a:solidFill>
+                  <a:srgbClr val="4A5568"/>
+                </a:solidFill>
+                <a:latin typeface="Calibri"/>
+              </a:rPr>
+              <a:t>Se o paquímetro lesse 2.512", não passaria: acima da máxima.</a:t>
+            </a:r>
+          </a:p>
+        </p:txBody>
+      </p:sp>
+    </p:spTree>
+  </p:cSld>
+  <p:clrMapOvr>
+    <a:masterClrMapping/>
+  </p:clrMapOvr>
+</p:sld>
+</file>
+
+<file path=ppt/slides/slide80.xml><?xml version="1.0" encoding="utf-8"?>
+<p:sld xmlns:a="http://schemas.openxmlformats.org/drawingml/2006/main" xmlns:p="http://schemas.openxmlformats.org/presentationml/2006/main" xmlns:r="http://schemas.openxmlformats.org/officeDocument/2006/relationships">
+  <p:cSld>
+    <p:spTree>
+      <p:nvGrpSpPr>
+        <p:cNvPr id="1" name=""/>
+        <p:cNvGrpSpPr/>
+        <p:nvPr/>
+      </p:nvGrpSpPr>
+      <p:grpSpPr/>
+      <p:pic>
+        <p:nvPicPr>
+          <p:cNvPr id="2" name="Fundo do modelo" descr="image.png"/>
+          <p:cNvPicPr>
+            <a:picLocks noChangeAspect="1"/>
+          </p:cNvPicPr>
+          <p:nvPr/>
+        </p:nvPicPr>
+        <p:blipFill>
+          <a:blip r:embed="rId2"/>
+          <a:stretch>
+            <a:fillRect/>
+          </a:stretch>
+        </p:blipFill>
+        <p:spPr>
+          <a:xfrm>
+            <a:off x="-29300" y="0"/>
+            <a:ext cx="12221300" cy="6857999"/>
+          </a:xfrm>
+          <a:prstGeom prst="rect">
+            <a:avLst/>
+          </a:prstGeom>
+        </p:spPr>
+      </p:pic>
+      <p:sp>
+        <p:nvSpPr>
+          <p:cNvPr id="3" name="Título"/>
+          <p:cNvSpPr txBox="1"/>
+          <p:nvPr/>
+        </p:nvSpPr>
+        <p:spPr>
+          <a:xfrm>
+            <a:off x="411480" y="713232"/>
+            <a:ext cx="9509760" cy="1051560"/>
+          </a:xfrm>
+          <a:prstGeom prst="rect">
+            <a:avLst/>
+          </a:prstGeom>
+          <a:noFill/>
+        </p:spPr>
+        <p:txBody>
+          <a:bodyPr wrap="square" anchor="ctr" lIns="73152" rIns="73152">
+            <a:spAutoFit/>
+          </a:bodyPr>
+          <a:lstStyle/>
+          <a:p>
+            <a:r>
+              <a:rPr sz="3800" b="1">
+                <a:solidFill>
+                  <a:srgbClr val="C00000"/>
+                </a:solidFill>
+                <a:latin typeface="Calibri"/>
+              </a:rPr>
+              <a:t>EXERCÍCIO 1</a:t>
+            </a:r>
+          </a:p>
+        </p:txBody>
+      </p:sp>
+      <p:sp>
+        <p:nvSpPr>
+          <p:cNvPr id="4" name="TextBox 3"/>
+          <p:cNvSpPr txBox="1"/>
+          <p:nvPr/>
+        </p:nvSpPr>
+        <p:spPr>
+          <a:xfrm>
+            <a:off x="502920" y="1828799"/>
+            <a:ext cx="5486400" cy="548640"/>
+          </a:xfrm>
+          <a:prstGeom prst="rect">
+            <a:avLst/>
+          </a:prstGeom>
+          <a:noFill/>
+        </p:spPr>
+        <p:txBody>
+          <a:bodyPr wrap="square" anchor="t" lIns="73152" rIns="73152" tIns="36576" bIns="36576">
+            <a:spAutoFit/>
+          </a:bodyPr>
+          <a:lstStyle/>
+          <a:p>
+            <a:pPr algn="l"/>
+            <a:r>
+              <a:rPr sz="2400" b="0" i="0">
+                <a:solidFill>
+                  <a:srgbClr val="4A5568"/>
+                </a:solidFill>
+                <a:latin typeface="Calibri"/>
+              </a:rPr>
+              <a:t>Encontre os valores (em mm):</a:t>
+            </a:r>
+          </a:p>
+        </p:txBody>
+      </p:sp>
+      <p:sp>
+        <p:nvSpPr>
+          <p:cNvPr id="5" name="Pino"/>
+          <p:cNvSpPr/>
+          <p:nvPr/>
+        </p:nvSpPr>
+        <p:spPr>
+          <a:xfrm>
+            <a:off x="731520" y="2651760"/>
+            <a:ext cx="3291840" cy="2011680"/>
+          </a:xfrm>
+          <a:prstGeom prst="rect">
+            <a:avLst/>
+          </a:prstGeom>
+          <a:solidFill>
+            <a:srgbClr val="C9D2DE"/>
+          </a:solidFill>
+          <a:ln w="19050">
+            <a:solidFill>
+              <a:srgbClr val="002060"/>
+            </a:solidFill>
+          </a:ln>
+          <a:effectLst/>
+        </p:spPr>
+        <p:style>
+          <a:lnRef idx="1">
+            <a:schemeClr val="accent1"/>
+          </a:lnRef>
+          <a:fillRef idx="3">
+            <a:schemeClr val="accent1"/>
+          </a:fillRef>
+          <a:effectRef idx="2">
+            <a:schemeClr val="accent1"/>
+          </a:effectRef>
+          <a:fontRef idx="minor">
+            <a:schemeClr val="lt1"/>
+          </a:fontRef>
+        </p:style>
+        <p:txBody>
+          <a:bodyPr rtlCol="0" anchor="ctr"/>
+          <a:lstStyle/>
+          <a:p/>
+        </p:txBody>
+      </p:sp>
+      <p:cxnSp>
+        <p:nvCxnSpPr>
+          <p:cNvPr id="6" name="Connector 5"/>
+          <p:cNvCxnSpPr/>
+          <p:nvPr/>
+        </p:nvCxnSpPr>
+        <p:spPr>
+          <a:xfrm>
+            <a:off x="4297680" y="2651760"/>
+            <a:ext cx="0" cy="2011680"/>
+          </a:xfrm>
+          <a:prstGeom prst="line">
+            <a:avLst/>
+          </a:prstGeom>
+          <a:ln w="25400">
+            <a:solidFill>
+              <a:srgbClr val="002060"/>
+            </a:solidFill>
+            <a:headEnd type="triangle"/>
+            <a:tailEnd type="triangle"/>
+          </a:ln>
+        </p:spPr>
+        <p:style>
+          <a:lnRef idx="2">
+            <a:schemeClr val="accent1"/>
+          </a:lnRef>
+          <a:fillRef idx="0">
+            <a:schemeClr val="accent1"/>
+          </a:fillRef>
+          <a:effectRef idx="1">
+            <a:schemeClr val="accent1"/>
+          </a:effectRef>
+          <a:fontRef idx="minor">
+            <a:schemeClr val="tx1"/>
+          </a:fontRef>
+        </p:style>
+      </p:cxnSp>
+      <p:sp>
+        <p:nvSpPr>
+          <p:cNvPr id="7" name="TextBox 6"/>
+          <p:cNvSpPr txBox="1"/>
+          <p:nvPr/>
+        </p:nvSpPr>
+        <p:spPr>
+          <a:xfrm>
+            <a:off x="731520" y="4892040"/>
+            <a:ext cx="3291840" cy="502920"/>
+          </a:xfrm>
+          <a:prstGeom prst="rect">
+            <a:avLst/>
+          </a:prstGeom>
+          <a:noFill/>
+        </p:spPr>
+        <p:txBody>
+          <a:bodyPr wrap="square" anchor="t" lIns="73152" rIns="73152" tIns="36576" bIns="36576">
+            <a:spAutoFit/>
+          </a:bodyPr>
+          <a:lstStyle/>
+          <a:p>
+            <a:pPr algn="ctr"/>
+            <a:r>
+              <a:rPr sz="2000" b="0" i="0">
+                <a:solidFill>
+                  <a:srgbClr val="4A5568"/>
+                </a:solidFill>
+                <a:latin typeface="Calibri"/>
+              </a:rPr>
+              <a:t>pino (vista lateral)</a:t>
+            </a:r>
+          </a:p>
+        </p:txBody>
+      </p:sp>
+      <p:sp>
+        <p:nvSpPr>
+          <p:cNvPr id="8" name="TextBox 7"/>
+          <p:cNvSpPr txBox="1"/>
+          <p:nvPr/>
+        </p:nvSpPr>
+        <p:spPr>
+          <a:xfrm>
+            <a:off x="4343400" y="3246120"/>
+            <a:ext cx="1645920" cy="822960"/>
+          </a:xfrm>
+          <a:prstGeom prst="rect">
+            <a:avLst/>
+          </a:prstGeom>
+          <a:noFill/>
+        </p:spPr>
+        <p:txBody>
+          <a:bodyPr wrap="square" anchor="ctr" lIns="73152" rIns="73152" tIns="36576" bIns="36576">
+            <a:spAutoFit/>
+          </a:bodyPr>
+          <a:lstStyle/>
+          <a:p>
+            <a:pPr algn="l"/>
+            <a:r>
+              <a:rPr sz="2800" b="1" i="0">
+                <a:solidFill>
+                  <a:srgbClr val="C00000"/>
+                </a:solidFill>
+                <a:latin typeface="Calibri"/>
+              </a:rPr>
+              <a:t>Ø 18 ± 0,1</a:t>
+            </a:r>
+          </a:p>
+        </p:txBody>
+      </p:sp>
+      <p:sp>
+        <p:nvSpPr>
+          <p:cNvPr id="9" name="Linha Nominal"/>
+          <p:cNvSpPr/>
+          <p:nvPr/>
+        </p:nvSpPr>
+        <p:spPr>
+          <a:xfrm>
+            <a:off x="6172200" y="1920239"/>
+            <a:ext cx="5440680" cy="896112"/>
+          </a:xfrm>
+          <a:prstGeom prst="roundRect">
+            <a:avLst>
+              <a:gd name="adj" fmla="val 8000"/>
+            </a:avLst>
+          </a:prstGeom>
+          <a:solidFill>
+            <a:srgbClr val="EEF1F6"/>
+          </a:solidFill>
+          <a:ln>
+            <a:noFill/>
+          </a:ln>
+          <a:effectLst/>
+        </p:spPr>
+        <p:style>
+          <a:lnRef idx="1">
+            <a:schemeClr val="accent1"/>
+          </a:lnRef>
+          <a:fillRef idx="3">
+            <a:schemeClr val="accent1"/>
+          </a:fillRef>
+          <a:effectRef idx="2">
+            <a:schemeClr val="accent1"/>
+          </a:effectRef>
+          <a:fontRef idx="minor">
+            <a:schemeClr val="lt1"/>
+          </a:fontRef>
+        </p:style>
+        <p:txBody>
+          <a:bodyPr rtlCol="0" anchor="ctr"/>
+          <a:lstStyle/>
+          <a:p/>
+        </p:txBody>
+      </p:sp>
+      <p:sp>
+        <p:nvSpPr>
+          <p:cNvPr id="10" name="TextBox 9"/>
+          <p:cNvSpPr txBox="1"/>
+          <p:nvPr/>
+        </p:nvSpPr>
+        <p:spPr>
+          <a:xfrm>
+            <a:off x="6355080" y="1920239"/>
+            <a:ext cx="1783080" cy="896112"/>
+          </a:xfrm>
+          <a:prstGeom prst="rect">
+            <a:avLst/>
+          </a:prstGeom>
+          <a:noFill/>
+        </p:spPr>
+        <p:txBody>
+          <a:bodyPr wrap="square" anchor="ctr" lIns="73152" rIns="73152" tIns="36576" bIns="36576">
+            <a:spAutoFit/>
+          </a:bodyPr>
+          <a:lstStyle/>
+          <a:p>
+            <a:pPr algn="l"/>
+            <a:r>
+              <a:rPr sz="2800" b="1" i="0">
+                <a:solidFill>
+                  <a:srgbClr val="002060"/>
+                </a:solidFill>
+                <a:latin typeface="Calibri"/>
+              </a:rPr>
+              <a:t>Nominal</a:t>
+            </a:r>
+          </a:p>
+        </p:txBody>
+      </p:sp>
+      <p:sp>
+        <p:nvSpPr>
+          <p:cNvPr id="11" name="Espaço Nominal"/>
+          <p:cNvSpPr/>
+          <p:nvPr/>
+        </p:nvSpPr>
+        <p:spPr>
+          <a:xfrm>
+            <a:off x="8183879" y="2029967"/>
+            <a:ext cx="1783080" cy="676656"/>
+          </a:xfrm>
+          <a:prstGeom prst="roundRect">
+            <a:avLst>
+              <a:gd name="adj" fmla="val 8000"/>
+            </a:avLst>
+          </a:prstGeom>
+          <a:solidFill>
+            <a:srgbClr val="FFFFFF"/>
+          </a:solidFill>
+          <a:ln w="19050">
+            <a:solidFill>
+              <a:srgbClr val="4A5568"/>
+            </a:solidFill>
+          </a:ln>
+          <a:effectLst/>
+        </p:spPr>
+        <p:style>
+          <a:lnRef idx="1">
+            <a:schemeClr val="accent1"/>
+          </a:lnRef>
+          <a:fillRef idx="3">
+            <a:schemeClr val="accent1"/>
+          </a:fillRef>
+          <a:effectRef idx="2">
+            <a:schemeClr val="accent1"/>
+          </a:effectRef>
+          <a:fontRef idx="minor">
+            <a:schemeClr val="lt1"/>
+          </a:fontRef>
+        </p:style>
+        <p:txBody>
+          <a:bodyPr rtlCol="0" anchor="ctr"/>
+          <a:lstStyle/>
+          <a:p/>
+        </p:txBody>
+      </p:sp>
+      <p:sp>
+        <p:nvSpPr>
+          <p:cNvPr id="12" name="TextBox 11"/>
+          <p:cNvSpPr txBox="1"/>
+          <p:nvPr/>
+        </p:nvSpPr>
+        <p:spPr>
+          <a:xfrm>
+            <a:off x="8183879" y="2029967"/>
+            <a:ext cx="1783080" cy="676656"/>
+          </a:xfrm>
+          <a:prstGeom prst="rect">
+            <a:avLst/>
+          </a:prstGeom>
+          <a:noFill/>
+        </p:spPr>
+        <p:txBody>
+          <a:bodyPr wrap="square" anchor="ctr" lIns="73152" rIns="73152" tIns="36576" bIns="36576">
+            <a:spAutoFit/>
+          </a:bodyPr>
+          <a:lstStyle/>
+          <a:p>
+            <a:pPr algn="ctr"/>
+            <a:r>
+              <a:rPr sz="3000" b="1" i="0">
+                <a:solidFill>
+                  <a:srgbClr val="4A5568"/>
+                </a:solidFill>
+                <a:latin typeface="Calibri"/>
+              </a:rPr>
+              <a:t>?</a:t>
+            </a:r>
+          </a:p>
+        </p:txBody>
+      </p:sp>
+      <p:sp>
+        <p:nvSpPr>
+          <p:cNvPr id="13" name="Linha Máxima"/>
+          <p:cNvSpPr/>
+          <p:nvPr/>
+        </p:nvSpPr>
+        <p:spPr>
+          <a:xfrm>
+            <a:off x="6172200" y="2926079"/>
+            <a:ext cx="5440680" cy="896112"/>
+          </a:xfrm>
+          <a:prstGeom prst="roundRect">
+            <a:avLst>
+              <a:gd name="adj" fmla="val 8000"/>
+            </a:avLst>
+          </a:prstGeom>
+          <a:solidFill>
+            <a:srgbClr val="EEF1F6"/>
+          </a:solidFill>
+          <a:ln>
+            <a:noFill/>
+          </a:ln>
+          <a:effectLst/>
+        </p:spPr>
+        <p:style>
+          <a:lnRef idx="1">
+            <a:schemeClr val="accent1"/>
+          </a:lnRef>
+          <a:fillRef idx="3">
+            <a:schemeClr val="accent1"/>
+          </a:fillRef>
+          <a:effectRef idx="2">
+            <a:schemeClr val="accent1"/>
+          </a:effectRef>
+          <a:fontRef idx="minor">
+            <a:schemeClr val="lt1"/>
+          </a:fontRef>
+        </p:style>
+        <p:txBody>
+          <a:bodyPr rtlCol="0" anchor="ctr"/>
+          <a:lstStyle/>
+          <a:p/>
+        </p:txBody>
+      </p:sp>
+      <p:sp>
+        <p:nvSpPr>
+          <p:cNvPr id="14" name="TextBox 13"/>
+          <p:cNvSpPr txBox="1"/>
+          <p:nvPr/>
+        </p:nvSpPr>
+        <p:spPr>
+          <a:xfrm>
+            <a:off x="6355080" y="2926079"/>
+            <a:ext cx="1783080" cy="896112"/>
+          </a:xfrm>
+          <a:prstGeom prst="rect">
+            <a:avLst/>
+          </a:prstGeom>
+          <a:noFill/>
+        </p:spPr>
+        <p:txBody>
+          <a:bodyPr wrap="square" anchor="ctr" lIns="73152" rIns="73152" tIns="36576" bIns="36576">
+            <a:spAutoFit/>
+          </a:bodyPr>
+          <a:lstStyle/>
+          <a:p>
+            <a:pPr algn="l"/>
+            <a:r>
+              <a:rPr sz="2800" b="1" i="0">
+                <a:solidFill>
+                  <a:srgbClr val="002060"/>
+                </a:solidFill>
+                <a:latin typeface="Calibri"/>
+              </a:rPr>
+              <a:t>Máxima</a:t>
+            </a:r>
+          </a:p>
+        </p:txBody>
+      </p:sp>
+      <p:sp>
+        <p:nvSpPr>
+          <p:cNvPr id="15" name="Espaço Máxima"/>
+          <p:cNvSpPr/>
+          <p:nvPr/>
+        </p:nvSpPr>
+        <p:spPr>
+          <a:xfrm>
+            <a:off x="8183879" y="3035808"/>
+            <a:ext cx="1783080" cy="676656"/>
+          </a:xfrm>
+          <a:prstGeom prst="roundRect">
+            <a:avLst>
+              <a:gd name="adj" fmla="val 8000"/>
+            </a:avLst>
+          </a:prstGeom>
+          <a:solidFill>
+            <a:srgbClr val="FFFFFF"/>
+          </a:solidFill>
+          <a:ln w="19050">
+            <a:solidFill>
+              <a:srgbClr val="4A5568"/>
+            </a:solidFill>
+          </a:ln>
+          <a:effectLst/>
+        </p:spPr>
+        <p:style>
+          <a:lnRef idx="1">
+            <a:schemeClr val="accent1"/>
+          </a:lnRef>
+          <a:fillRef idx="3">
+            <a:schemeClr val="accent1"/>
+          </a:fillRef>
+          <a:effectRef idx="2">
+            <a:schemeClr val="accent1"/>
+          </a:effectRef>
+          <a:fontRef idx="minor">
+            <a:schemeClr val="lt1"/>
+          </a:fontRef>
+        </p:style>
+        <p:txBody>
+          <a:bodyPr rtlCol="0" anchor="ctr"/>
+          <a:lstStyle/>
+          <a:p/>
+        </p:txBody>
+      </p:sp>
+      <p:sp>
+        <p:nvSpPr>
+          <p:cNvPr id="16" name="TextBox 15"/>
+          <p:cNvSpPr txBox="1"/>
+          <p:nvPr/>
+        </p:nvSpPr>
+        <p:spPr>
+          <a:xfrm>
+            <a:off x="8183879" y="3035808"/>
+            <a:ext cx="1783080" cy="676656"/>
+          </a:xfrm>
+          <a:prstGeom prst="rect">
+            <a:avLst/>
+          </a:prstGeom>
+          <a:noFill/>
+        </p:spPr>
+        <p:txBody>
+          <a:bodyPr wrap="square" anchor="ctr" lIns="73152" rIns="73152" tIns="36576" bIns="36576">
+            <a:spAutoFit/>
+          </a:bodyPr>
+          <a:lstStyle/>
+          <a:p>
+            <a:pPr algn="ctr"/>
+            <a:r>
+              <a:rPr sz="3000" b="1" i="0">
+                <a:solidFill>
+                  <a:srgbClr val="4A5568"/>
+                </a:solidFill>
+                <a:latin typeface="Calibri"/>
+              </a:rPr>
+              <a:t>?</a:t>
+            </a:r>
+          </a:p>
+        </p:txBody>
+      </p:sp>
+      <p:sp>
+        <p:nvSpPr>
+          <p:cNvPr id="17" name="Linha Mínima"/>
+          <p:cNvSpPr/>
+          <p:nvPr/>
+        </p:nvSpPr>
+        <p:spPr>
+          <a:xfrm>
+            <a:off x="6172200" y="3931920"/>
+            <a:ext cx="5440680" cy="896112"/>
+          </a:xfrm>
+          <a:prstGeom prst="roundRect">
+            <a:avLst>
+              <a:gd name="adj" fmla="val 8000"/>
+            </a:avLst>
+          </a:prstGeom>
+          <a:solidFill>
+            <a:srgbClr val="EEF1F6"/>
+          </a:solidFill>
+          <a:ln>
+            <a:noFill/>
+          </a:ln>
+          <a:effectLst/>
+        </p:spPr>
+        <p:style>
+          <a:lnRef idx="1">
+            <a:schemeClr val="accent1"/>
+          </a:lnRef>
+          <a:fillRef idx="3">
+            <a:schemeClr val="accent1"/>
+          </a:fillRef>
+          <a:effectRef idx="2">
+            <a:schemeClr val="accent1"/>
+          </a:effectRef>
+          <a:fontRef idx="minor">
+            <a:schemeClr val="lt1"/>
+          </a:fontRef>
+        </p:style>
+        <p:txBody>
+          <a:bodyPr rtlCol="0" anchor="ctr"/>
+          <a:lstStyle/>
+          <a:p/>
+        </p:txBody>
+      </p:sp>
+      <p:sp>
+        <p:nvSpPr>
+          <p:cNvPr id="18" name="TextBox 17"/>
+          <p:cNvSpPr txBox="1"/>
+          <p:nvPr/>
+        </p:nvSpPr>
+        <p:spPr>
+          <a:xfrm>
+            <a:off x="6355080" y="3931920"/>
+            <a:ext cx="1783080" cy="896112"/>
+          </a:xfrm>
+          <a:prstGeom prst="rect">
+            <a:avLst/>
+          </a:prstGeom>
+          <a:noFill/>
+        </p:spPr>
+        <p:txBody>
+          <a:bodyPr wrap="square" anchor="ctr" lIns="73152" rIns="73152" tIns="36576" bIns="36576">
+            <a:spAutoFit/>
+          </a:bodyPr>
+          <a:lstStyle/>
+          <a:p>
+            <a:pPr algn="l"/>
+            <a:r>
+              <a:rPr sz="2800" b="1" i="0">
+                <a:solidFill>
+                  <a:srgbClr val="002060"/>
+                </a:solidFill>
+                <a:latin typeface="Calibri"/>
+              </a:rPr>
+              <a:t>Mínima</a:t>
+            </a:r>
+          </a:p>
+        </p:txBody>
+      </p:sp>
+      <p:sp>
+        <p:nvSpPr>
+          <p:cNvPr id="19" name="Espaço Mínima"/>
+          <p:cNvSpPr/>
+          <p:nvPr/>
+        </p:nvSpPr>
+        <p:spPr>
+          <a:xfrm>
+            <a:off x="8183879" y="4041648"/>
+            <a:ext cx="1783080" cy="676656"/>
+          </a:xfrm>
+          <a:prstGeom prst="roundRect">
+            <a:avLst>
+              <a:gd name="adj" fmla="val 8000"/>
+            </a:avLst>
+          </a:prstGeom>
+          <a:solidFill>
+            <a:srgbClr val="FFFFFF"/>
+          </a:solidFill>
+          <a:ln w="19050">
+            <a:solidFill>
+              <a:srgbClr val="4A5568"/>
+            </a:solidFill>
+          </a:ln>
+          <a:effectLst/>
+        </p:spPr>
+        <p:style>
+          <a:lnRef idx="1">
+            <a:schemeClr val="accent1"/>
+          </a:lnRef>
+          <a:fillRef idx="3">
+            <a:schemeClr val="accent1"/>
+          </a:fillRef>
+          <a:effectRef idx="2">
+            <a:schemeClr val="accent1"/>
+          </a:effectRef>
+          <a:fontRef idx="minor">
+            <a:schemeClr val="lt1"/>
+          </a:fontRef>
+        </p:style>
+        <p:txBody>
+          <a:bodyPr rtlCol="0" anchor="ctr"/>
+          <a:lstStyle/>
+          <a:p/>
+        </p:txBody>
+      </p:sp>
+      <p:sp>
+        <p:nvSpPr>
+          <p:cNvPr id="20" name="TextBox 19"/>
+          <p:cNvSpPr txBox="1"/>
+          <p:nvPr/>
+        </p:nvSpPr>
+        <p:spPr>
+          <a:xfrm>
+            <a:off x="8183879" y="4041648"/>
+            <a:ext cx="1783080" cy="676656"/>
+          </a:xfrm>
+          <a:prstGeom prst="rect">
+            <a:avLst/>
+          </a:prstGeom>
+          <a:noFill/>
+        </p:spPr>
+        <p:txBody>
+          <a:bodyPr wrap="square" anchor="ctr" lIns="73152" rIns="73152" tIns="36576" bIns="36576">
+            <a:spAutoFit/>
+          </a:bodyPr>
+          <a:lstStyle/>
+          <a:p>
+            <a:pPr algn="ctr"/>
+            <a:r>
+              <a:rPr sz="3000" b="1" i="0">
+                <a:solidFill>
+                  <a:srgbClr val="4A5568"/>
+                </a:solidFill>
+                <a:latin typeface="Calibri"/>
+              </a:rPr>
+              <a:t>?</a:t>
+            </a:r>
+          </a:p>
+        </p:txBody>
+      </p:sp>
+      <p:sp>
+        <p:nvSpPr>
+          <p:cNvPr id="21" name="Linha Faixa"/>
+          <p:cNvSpPr/>
+          <p:nvPr/>
+        </p:nvSpPr>
+        <p:spPr>
+          <a:xfrm>
+            <a:off x="6172200" y="4937760"/>
+            <a:ext cx="5440680" cy="896112"/>
+          </a:xfrm>
+          <a:prstGeom prst="roundRect">
+            <a:avLst>
+              <a:gd name="adj" fmla="val 8000"/>
+            </a:avLst>
+          </a:prstGeom>
+          <a:solidFill>
+            <a:srgbClr val="EEF1F6"/>
+          </a:solidFill>
+          <a:ln>
+            <a:noFill/>
+          </a:ln>
+          <a:effectLst/>
+        </p:spPr>
+        <p:style>
+          <a:lnRef idx="1">
+            <a:schemeClr val="accent1"/>
+          </a:lnRef>
+          <a:fillRef idx="3">
+            <a:schemeClr val="accent1"/>
+          </a:fillRef>
+          <a:effectRef idx="2">
+            <a:schemeClr val="accent1"/>
+          </a:effectRef>
+          <a:fontRef idx="minor">
+            <a:schemeClr val="lt1"/>
+          </a:fontRef>
+        </p:style>
+        <p:txBody>
+          <a:bodyPr rtlCol="0" anchor="ctr"/>
+          <a:lstStyle/>
+          <a:p/>
+        </p:txBody>
+      </p:sp>
+      <p:sp>
+        <p:nvSpPr>
+          <p:cNvPr id="22" name="TextBox 21"/>
+          <p:cNvSpPr txBox="1"/>
+          <p:nvPr/>
+        </p:nvSpPr>
+        <p:spPr>
+          <a:xfrm>
+            <a:off x="6355080" y="4937760"/>
+            <a:ext cx="1783080" cy="896112"/>
+          </a:xfrm>
+          <a:prstGeom prst="rect">
+            <a:avLst/>
+          </a:prstGeom>
+          <a:noFill/>
+        </p:spPr>
+        <p:txBody>
+          <a:bodyPr wrap="square" anchor="ctr" lIns="73152" rIns="73152" tIns="36576" bIns="36576">
+            <a:spAutoFit/>
+          </a:bodyPr>
+          <a:lstStyle/>
+          <a:p>
+            <a:pPr algn="l"/>
+            <a:r>
+              <a:rPr sz="2800" b="1" i="0">
+                <a:solidFill>
+                  <a:srgbClr val="002060"/>
+                </a:solidFill>
+                <a:latin typeface="Calibri"/>
+              </a:rPr>
+              <a:t>Faixa</a:t>
+            </a:r>
+          </a:p>
+        </p:txBody>
+      </p:sp>
+      <p:sp>
+        <p:nvSpPr>
+          <p:cNvPr id="23" name="Espaço Faixa"/>
+          <p:cNvSpPr/>
+          <p:nvPr/>
+        </p:nvSpPr>
+        <p:spPr>
+          <a:xfrm>
+            <a:off x="8183879" y="5047488"/>
+            <a:ext cx="1783080" cy="676656"/>
+          </a:xfrm>
+          <a:prstGeom prst="roundRect">
+            <a:avLst>
+              <a:gd name="adj" fmla="val 8000"/>
+            </a:avLst>
+          </a:prstGeom>
+          <a:solidFill>
+            <a:srgbClr val="FFFFFF"/>
+          </a:solidFill>
+          <a:ln w="19050">
+            <a:solidFill>
+              <a:srgbClr val="4A5568"/>
+            </a:solidFill>
+          </a:ln>
+          <a:effectLst/>
+        </p:spPr>
+        <p:style>
+          <a:lnRef idx="1">
+            <a:schemeClr val="accent1"/>
+          </a:lnRef>
+          <a:fillRef idx="3">
+            <a:schemeClr val="accent1"/>
+          </a:fillRef>
+          <a:effectRef idx="2">
+            <a:schemeClr val="accent1"/>
+          </a:effectRef>
+          <a:fontRef idx="minor">
+            <a:schemeClr val="lt1"/>
+          </a:fontRef>
+        </p:style>
+        <p:txBody>
+          <a:bodyPr rtlCol="0" anchor="ctr"/>
+          <a:lstStyle/>
+          <a:p/>
+        </p:txBody>
+      </p:sp>
+      <p:sp>
+        <p:nvSpPr>
+          <p:cNvPr id="24" name="TextBox 23"/>
+          <p:cNvSpPr txBox="1"/>
+          <p:nvPr/>
+        </p:nvSpPr>
+        <p:spPr>
+          <a:xfrm>
+            <a:off x="8183879" y="5047488"/>
+            <a:ext cx="1783080" cy="676656"/>
+          </a:xfrm>
+          <a:prstGeom prst="rect">
+            <a:avLst/>
+          </a:prstGeom>
+          <a:noFill/>
+        </p:spPr>
+        <p:txBody>
+          <a:bodyPr wrap="square" anchor="ctr" lIns="73152" rIns="73152" tIns="36576" bIns="36576">
+            <a:spAutoFit/>
+          </a:bodyPr>
+          <a:lstStyle/>
+          <a:p>
+            <a:pPr algn="ctr"/>
+            <a:r>
+              <a:rPr sz="3000" b="1" i="0">
+                <a:solidFill>
+                  <a:srgbClr val="4A5568"/>
+                </a:solidFill>
+                <a:latin typeface="Calibri"/>
+              </a:rPr>
+              <a:t>?</a:t>
+            </a:r>
+          </a:p>
+        </p:txBody>
+      </p:sp>
+    </p:spTree>
+  </p:cSld>
+  <p:clrMapOvr>
+    <a:masterClrMapping/>
+  </p:clrMapOvr>
+</p:sld>
+</file>
+
+<file path=ppt/slides/slide81.xml><?xml version="1.0" encoding="utf-8"?>
+<p:sld xmlns:a="http://schemas.openxmlformats.org/drawingml/2006/main" xmlns:p="http://schemas.openxmlformats.org/presentationml/2006/main" xmlns:r="http://schemas.openxmlformats.org/officeDocument/2006/relationships">
+  <p:cSld>
+    <p:spTree>
+      <p:nvGrpSpPr>
+        <p:cNvPr id="1" name=""/>
+        <p:cNvGrpSpPr/>
+        <p:nvPr/>
+      </p:nvGrpSpPr>
+      <p:grpSpPr/>
+      <p:pic>
+        <p:nvPicPr>
+          <p:cNvPr id="2" name="Fundo do modelo" descr="image.png"/>
+          <p:cNvPicPr>
+            <a:picLocks noChangeAspect="1"/>
+          </p:cNvPicPr>
+          <p:nvPr/>
+        </p:nvPicPr>
+        <p:blipFill>
+          <a:blip r:embed="rId2"/>
+          <a:stretch>
+            <a:fillRect/>
+          </a:stretch>
+        </p:blipFill>
+        <p:spPr>
+          <a:xfrm>
+            <a:off x="-29300" y="0"/>
+            <a:ext cx="12221300" cy="6857999"/>
+          </a:xfrm>
+          <a:prstGeom prst="rect">
+            <a:avLst/>
+          </a:prstGeom>
+        </p:spPr>
+      </p:pic>
+      <p:sp>
+        <p:nvSpPr>
+          <p:cNvPr id="3" name="Título"/>
+          <p:cNvSpPr txBox="1"/>
+          <p:nvPr/>
+        </p:nvSpPr>
+        <p:spPr>
+          <a:xfrm>
+            <a:off x="411480" y="713232"/>
+            <a:ext cx="9509760" cy="1051560"/>
+          </a:xfrm>
+          <a:prstGeom prst="rect">
+            <a:avLst/>
+          </a:prstGeom>
+          <a:noFill/>
+        </p:spPr>
+        <p:txBody>
+          <a:bodyPr wrap="square" anchor="ctr" lIns="73152" rIns="73152">
+            <a:spAutoFit/>
+          </a:bodyPr>
+          <a:lstStyle/>
+          <a:p>
+            <a:r>
+              <a:rPr sz="3800" b="1">
+                <a:solidFill>
+                  <a:srgbClr val="C00000"/>
+                </a:solidFill>
+                <a:latin typeface="Calibri"/>
+              </a:rPr>
+              <a:t>EXERCÍCIO 1: RESPOSTA</a:t>
+            </a:r>
+          </a:p>
+        </p:txBody>
+      </p:sp>
+      <p:sp>
+        <p:nvSpPr>
+          <p:cNvPr id="4" name="TextBox 3"/>
+          <p:cNvSpPr txBox="1"/>
+          <p:nvPr/>
+        </p:nvSpPr>
+        <p:spPr>
+          <a:xfrm>
+            <a:off x="502920" y="1828799"/>
+            <a:ext cx="5486400" cy="548640"/>
+          </a:xfrm>
+          <a:prstGeom prst="rect">
+            <a:avLst/>
+          </a:prstGeom>
+          <a:noFill/>
+        </p:spPr>
+        <p:txBody>
+          <a:bodyPr wrap="square" anchor="t" lIns="73152" rIns="73152" tIns="36576" bIns="36576">
+            <a:spAutoFit/>
+          </a:bodyPr>
+          <a:lstStyle/>
+          <a:p>
+            <a:pPr algn="l"/>
+            <a:r>
+              <a:rPr sz="2400" b="0" i="0">
+                <a:solidFill>
+                  <a:srgbClr val="4A5568"/>
+                </a:solidFill>
+                <a:latin typeface="Calibri"/>
+              </a:rPr>
+              <a:t>Encontre os valores (em mm):</a:t>
+            </a:r>
+          </a:p>
+        </p:txBody>
+      </p:sp>
+      <p:sp>
+        <p:nvSpPr>
+          <p:cNvPr id="5" name="Pino"/>
+          <p:cNvSpPr/>
+          <p:nvPr/>
+        </p:nvSpPr>
+        <p:spPr>
+          <a:xfrm>
+            <a:off x="731520" y="2651760"/>
+            <a:ext cx="3291840" cy="2011680"/>
+          </a:xfrm>
+          <a:prstGeom prst="rect">
+            <a:avLst/>
+          </a:prstGeom>
+          <a:solidFill>
+            <a:srgbClr val="C9D2DE"/>
+          </a:solidFill>
+          <a:ln w="19050">
+            <a:solidFill>
+              <a:srgbClr val="002060"/>
+            </a:solidFill>
+          </a:ln>
+          <a:effectLst/>
+        </p:spPr>
+        <p:style>
+          <a:lnRef idx="1">
+            <a:schemeClr val="accent1"/>
+          </a:lnRef>
+          <a:fillRef idx="3">
+            <a:schemeClr val="accent1"/>
+          </a:fillRef>
+          <a:effectRef idx="2">
+            <a:schemeClr val="accent1"/>
+          </a:effectRef>
+          <a:fontRef idx="minor">
+            <a:schemeClr val="lt1"/>
+          </a:fontRef>
+        </p:style>
+        <p:txBody>
+          <a:bodyPr rtlCol="0" anchor="ctr"/>
+          <a:lstStyle/>
+          <a:p/>
+        </p:txBody>
+      </p:sp>
+      <p:cxnSp>
+        <p:nvCxnSpPr>
+          <p:cNvPr id="6" name="Connector 5"/>
+          <p:cNvCxnSpPr/>
+          <p:nvPr/>
+        </p:nvCxnSpPr>
+        <p:spPr>
+          <a:xfrm>
+            <a:off x="4297680" y="2651760"/>
+            <a:ext cx="0" cy="2011680"/>
+          </a:xfrm>
+          <a:prstGeom prst="line">
+            <a:avLst/>
+          </a:prstGeom>
+          <a:ln w="25400">
+            <a:solidFill>
+              <a:srgbClr val="002060"/>
+            </a:solidFill>
+            <a:headEnd type="triangle"/>
+            <a:tailEnd type="triangle"/>
+          </a:ln>
+        </p:spPr>
+        <p:style>
+          <a:lnRef idx="2">
+            <a:schemeClr val="accent1"/>
+          </a:lnRef>
+          <a:fillRef idx="0">
+            <a:schemeClr val="accent1"/>
+          </a:fillRef>
+          <a:effectRef idx="1">
+            <a:schemeClr val="accent1"/>
+          </a:effectRef>
+          <a:fontRef idx="minor">
+            <a:schemeClr val="tx1"/>
+          </a:fontRef>
+        </p:style>
+      </p:cxnSp>
+      <p:sp>
+        <p:nvSpPr>
+          <p:cNvPr id="7" name="TextBox 6"/>
+          <p:cNvSpPr txBox="1"/>
+          <p:nvPr/>
+        </p:nvSpPr>
+        <p:spPr>
+          <a:xfrm>
+            <a:off x="731520" y="4892040"/>
+            <a:ext cx="3291840" cy="502920"/>
+          </a:xfrm>
+          <a:prstGeom prst="rect">
+            <a:avLst/>
+          </a:prstGeom>
+          <a:noFill/>
+        </p:spPr>
+        <p:txBody>
+          <a:bodyPr wrap="square" anchor="t" lIns="73152" rIns="73152" tIns="36576" bIns="36576">
+            <a:spAutoFit/>
+          </a:bodyPr>
+          <a:lstStyle/>
+          <a:p>
+            <a:pPr algn="ctr"/>
+            <a:r>
+              <a:rPr sz="2000" b="0" i="0">
+                <a:solidFill>
+                  <a:srgbClr val="4A5568"/>
+                </a:solidFill>
+                <a:latin typeface="Calibri"/>
+              </a:rPr>
+              <a:t>pino (vista lateral)</a:t>
+            </a:r>
+          </a:p>
+        </p:txBody>
+      </p:sp>
+      <p:sp>
+        <p:nvSpPr>
+          <p:cNvPr id="8" name="TextBox 7"/>
+          <p:cNvSpPr txBox="1"/>
+          <p:nvPr/>
+        </p:nvSpPr>
+        <p:spPr>
+          <a:xfrm>
+            <a:off x="4343400" y="3246120"/>
+            <a:ext cx="1645920" cy="822960"/>
+          </a:xfrm>
+          <a:prstGeom prst="rect">
+            <a:avLst/>
+          </a:prstGeom>
+          <a:noFill/>
+        </p:spPr>
+        <p:txBody>
+          <a:bodyPr wrap="square" anchor="ctr" lIns="73152" rIns="73152" tIns="36576" bIns="36576">
+            <a:spAutoFit/>
+          </a:bodyPr>
+          <a:lstStyle/>
+          <a:p>
+            <a:pPr algn="l"/>
+            <a:r>
+              <a:rPr sz="2800" b="1" i="0">
+                <a:solidFill>
+                  <a:srgbClr val="C00000"/>
+                </a:solidFill>
+                <a:latin typeface="Calibri"/>
+              </a:rPr>
+              <a:t>Ø 18 ± 0,1</a:t>
+            </a:r>
+          </a:p>
+        </p:txBody>
+      </p:sp>
+      <p:sp>
+        <p:nvSpPr>
+          <p:cNvPr id="9" name="Linha Nominal"/>
+          <p:cNvSpPr/>
+          <p:nvPr/>
+        </p:nvSpPr>
+        <p:spPr>
+          <a:xfrm>
+            <a:off x="6172200" y="1920239"/>
+            <a:ext cx="5440680" cy="896112"/>
+          </a:xfrm>
+          <a:prstGeom prst="roundRect">
+            <a:avLst>
+              <a:gd name="adj" fmla="val 8000"/>
+            </a:avLst>
+          </a:prstGeom>
+          <a:solidFill>
+            <a:srgbClr val="EEF1F6"/>
+          </a:solidFill>
+          <a:ln>
+            <a:noFill/>
+          </a:ln>
+          <a:effectLst/>
+        </p:spPr>
+        <p:style>
+          <a:lnRef idx="1">
+            <a:schemeClr val="accent1"/>
+          </a:lnRef>
+          <a:fillRef idx="3">
+            <a:schemeClr val="accent1"/>
+          </a:fillRef>
+          <a:effectRef idx="2">
+            <a:schemeClr val="accent1"/>
+          </a:effectRef>
+          <a:fontRef idx="minor">
+            <a:schemeClr val="lt1"/>
+          </a:fontRef>
+        </p:style>
+        <p:txBody>
+          <a:bodyPr rtlCol="0" anchor="ctr"/>
+          <a:lstStyle/>
+          <a:p/>
+        </p:txBody>
+      </p:sp>
+      <p:sp>
+        <p:nvSpPr>
+          <p:cNvPr id="10" name="TextBox 9"/>
+          <p:cNvSpPr txBox="1"/>
+          <p:nvPr/>
+        </p:nvSpPr>
+        <p:spPr>
+          <a:xfrm>
+            <a:off x="6355080" y="1920239"/>
+            <a:ext cx="1783080" cy="896112"/>
+          </a:xfrm>
+          <a:prstGeom prst="rect">
+            <a:avLst/>
+          </a:prstGeom>
+          <a:noFill/>
+        </p:spPr>
+        <p:txBody>
+          <a:bodyPr wrap="square" anchor="ctr" lIns="73152" rIns="73152" tIns="36576" bIns="36576">
+            <a:spAutoFit/>
+          </a:bodyPr>
+          <a:lstStyle/>
+          <a:p>
+            <a:pPr algn="l"/>
+            <a:r>
+              <a:rPr sz="2800" b="1" i="0">
+                <a:solidFill>
+                  <a:srgbClr val="002060"/>
+                </a:solidFill>
+                <a:latin typeface="Calibri"/>
+              </a:rPr>
+              <a:t>Nominal</a:t>
+            </a:r>
+          </a:p>
+        </p:txBody>
+      </p:sp>
+      <p:sp>
+        <p:nvSpPr>
+          <p:cNvPr id="11" name="Resposta Nominal"/>
+          <p:cNvSpPr/>
+          <p:nvPr/>
+        </p:nvSpPr>
+        <p:spPr>
+          <a:xfrm>
+            <a:off x="8183879" y="2029967"/>
+            <a:ext cx="1783080" cy="676656"/>
+          </a:xfrm>
+          <a:prstGeom prst="roundRect">
+            <a:avLst>
+              <a:gd name="adj" fmla="val 8000"/>
+            </a:avLst>
+          </a:prstGeom>
+          <a:solidFill>
+            <a:srgbClr val="FFFFFF"/>
+          </a:solidFill>
+          <a:ln w="19050">
+            <a:solidFill>
+              <a:srgbClr val="1E7A46"/>
+            </a:solidFill>
+          </a:ln>
+          <a:effectLst/>
+        </p:spPr>
+        <p:style>
+          <a:lnRef idx="1">
+            <a:schemeClr val="accent1"/>
+          </a:lnRef>
+          <a:fillRef idx="3">
+            <a:schemeClr val="accent1"/>
+          </a:fillRef>
+          <a:effectRef idx="2">
+            <a:schemeClr val="accent1"/>
+          </a:effectRef>
+          <a:fontRef idx="minor">
+            <a:schemeClr val="lt1"/>
+          </a:fontRef>
+        </p:style>
+        <p:txBody>
+          <a:bodyPr rtlCol="0" anchor="ctr"/>
+          <a:lstStyle/>
+          <a:p/>
+        </p:txBody>
+      </p:sp>
+      <p:sp>
+        <p:nvSpPr>
+          <p:cNvPr id="12" name="TextBox 11"/>
+          <p:cNvSpPr txBox="1"/>
+          <p:nvPr/>
+        </p:nvSpPr>
+        <p:spPr>
+          <a:xfrm>
+            <a:off x="8183879" y="2029967"/>
+            <a:ext cx="1783080" cy="676656"/>
+          </a:xfrm>
+          <a:prstGeom prst="rect">
+            <a:avLst/>
+          </a:prstGeom>
+          <a:noFill/>
+        </p:spPr>
+        <p:txBody>
+          <a:bodyPr wrap="square" anchor="ctr" lIns="73152" rIns="73152" tIns="36576" bIns="36576">
+            <a:spAutoFit/>
+          </a:bodyPr>
+          <a:lstStyle/>
+          <a:p>
+            <a:pPr algn="ctr"/>
+            <a:r>
+              <a:rPr sz="3000" b="1" i="0">
+                <a:solidFill>
+                  <a:srgbClr val="1E7A46"/>
+                </a:solidFill>
+                <a:latin typeface="Calibri"/>
+              </a:rPr>
+              <a:t>18</a:t>
+            </a:r>
+          </a:p>
+        </p:txBody>
+      </p:sp>
+      <p:sp>
+        <p:nvSpPr>
+          <p:cNvPr id="13" name="TextBox 12"/>
+          <p:cNvSpPr txBox="1"/>
+          <p:nvPr/>
+        </p:nvSpPr>
+        <p:spPr>
+          <a:xfrm>
+            <a:off x="10012680" y="1920239"/>
+            <a:ext cx="1554480" cy="896112"/>
+          </a:xfrm>
+          <a:prstGeom prst="rect">
+            <a:avLst/>
+          </a:prstGeom>
+          <a:noFill/>
+        </p:spPr>
+        <p:txBody>
+          <a:bodyPr wrap="square" anchor="ctr" lIns="73152" rIns="73152" tIns="36576" bIns="36576">
+            <a:spAutoFit/>
+          </a:bodyPr>
+          <a:lstStyle/>
+          <a:p>
+            <a:pPr algn="l"/>
+            <a:r>
+              <a:rPr sz="2000" b="0" i="0">
+                <a:solidFill>
+                  <a:srgbClr val="4A5568"/>
+                </a:solidFill>
+                <a:latin typeface="Calibri"/>
+              </a:rPr>
+              <a:t>antes do ±</a:t>
+            </a:r>
+          </a:p>
+        </p:txBody>
+      </p:sp>
+      <p:sp>
+        <p:nvSpPr>
+          <p:cNvPr id="14" name="Linha Máxima"/>
+          <p:cNvSpPr/>
+          <p:nvPr/>
+        </p:nvSpPr>
+        <p:spPr>
+          <a:xfrm>
+            <a:off x="6172200" y="2926079"/>
+            <a:ext cx="5440680" cy="896112"/>
+          </a:xfrm>
+          <a:prstGeom prst="roundRect">
+            <a:avLst>
+              <a:gd name="adj" fmla="val 8000"/>
+            </a:avLst>
+          </a:prstGeom>
+          <a:solidFill>
+            <a:srgbClr val="EEF1F6"/>
+          </a:solidFill>
+          <a:ln>
+            <a:noFill/>
+          </a:ln>
+          <a:effectLst/>
+        </p:spPr>
+        <p:style>
+          <a:lnRef idx="1">
+            <a:schemeClr val="accent1"/>
+          </a:lnRef>
+          <a:fillRef idx="3">
+            <a:schemeClr val="accent1"/>
+          </a:fillRef>
+          <a:effectRef idx="2">
+            <a:schemeClr val="accent1"/>
+          </a:effectRef>
+          <a:fontRef idx="minor">
+            <a:schemeClr val="lt1"/>
+          </a:fontRef>
+        </p:style>
+        <p:txBody>
+          <a:bodyPr rtlCol="0" anchor="ctr"/>
+          <a:lstStyle/>
+          <a:p/>
+        </p:txBody>
+      </p:sp>
+      <p:sp>
+        <p:nvSpPr>
+          <p:cNvPr id="15" name="TextBox 14"/>
+          <p:cNvSpPr txBox="1"/>
+          <p:nvPr/>
+        </p:nvSpPr>
+        <p:spPr>
+          <a:xfrm>
+            <a:off x="6355080" y="2926079"/>
+            <a:ext cx="1783080" cy="896112"/>
+          </a:xfrm>
+          <a:prstGeom prst="rect">
+            <a:avLst/>
+          </a:prstGeom>
+          <a:noFill/>
+        </p:spPr>
+        <p:txBody>
+          <a:bodyPr wrap="square" anchor="ctr" lIns="73152" rIns="73152" tIns="36576" bIns="36576">
+            <a:spAutoFit/>
+          </a:bodyPr>
+          <a:lstStyle/>
+          <a:p>
+            <a:pPr algn="l"/>
+            <a:r>
+              <a:rPr sz="2800" b="1" i="0">
+                <a:solidFill>
+                  <a:srgbClr val="002060"/>
+                </a:solidFill>
+                <a:latin typeface="Calibri"/>
+              </a:rPr>
+              <a:t>Máxima</a:t>
+            </a:r>
+          </a:p>
+        </p:txBody>
+      </p:sp>
+      <p:sp>
+        <p:nvSpPr>
+          <p:cNvPr id="16" name="Resposta Máxima"/>
+          <p:cNvSpPr/>
+          <p:nvPr/>
+        </p:nvSpPr>
+        <p:spPr>
+          <a:xfrm>
+            <a:off x="8183879" y="3035808"/>
+            <a:ext cx="1783080" cy="676656"/>
+          </a:xfrm>
+          <a:prstGeom prst="roundRect">
+            <a:avLst>
+              <a:gd name="adj" fmla="val 8000"/>
+            </a:avLst>
+          </a:prstGeom>
+          <a:solidFill>
+            <a:srgbClr val="FFFFFF"/>
+          </a:solidFill>
+          <a:ln w="19050">
+            <a:solidFill>
+              <a:srgbClr val="1E7A46"/>
+            </a:solidFill>
+          </a:ln>
+          <a:effectLst/>
+        </p:spPr>
+        <p:style>
+          <a:lnRef idx="1">
+            <a:schemeClr val="accent1"/>
+          </a:lnRef>
+          <a:fillRef idx="3">
+            <a:schemeClr val="accent1"/>
+          </a:fillRef>
+          <a:effectRef idx="2">
+            <a:schemeClr val="accent1"/>
+          </a:effectRef>
+          <a:fontRef idx="minor">
+            <a:schemeClr val="lt1"/>
+          </a:fontRef>
+        </p:style>
+        <p:txBody>
+          <a:bodyPr rtlCol="0" anchor="ctr"/>
+          <a:lstStyle/>
+          <a:p/>
+        </p:txBody>
+      </p:sp>
+      <p:sp>
+        <p:nvSpPr>
+          <p:cNvPr id="17" name="TextBox 16"/>
+          <p:cNvSpPr txBox="1"/>
+          <p:nvPr/>
+        </p:nvSpPr>
+        <p:spPr>
+          <a:xfrm>
+            <a:off x="8183879" y="3035808"/>
+            <a:ext cx="1783080" cy="676656"/>
+          </a:xfrm>
+          <a:prstGeom prst="rect">
+            <a:avLst/>
+          </a:prstGeom>
+          <a:noFill/>
+        </p:spPr>
+        <p:txBody>
+          <a:bodyPr wrap="square" anchor="ctr" lIns="73152" rIns="73152" tIns="36576" bIns="36576">
+            <a:spAutoFit/>
+          </a:bodyPr>
+          <a:lstStyle/>
+          <a:p>
+            <a:pPr algn="ctr"/>
+            <a:r>
+              <a:rPr sz="3000" b="1" i="0">
+                <a:solidFill>
+                  <a:srgbClr val="1E7A46"/>
+                </a:solidFill>
+                <a:latin typeface="Calibri"/>
+              </a:rPr>
+              <a:t>18,1</a:t>
+            </a:r>
+          </a:p>
+        </p:txBody>
+      </p:sp>
+      <p:sp>
+        <p:nvSpPr>
+          <p:cNvPr id="18" name="TextBox 17"/>
+          <p:cNvSpPr txBox="1"/>
+          <p:nvPr/>
+        </p:nvSpPr>
+        <p:spPr>
+          <a:xfrm>
+            <a:off x="10012680" y="2926079"/>
+            <a:ext cx="1554480" cy="896112"/>
+          </a:xfrm>
+          <a:prstGeom prst="rect">
+            <a:avLst/>
+          </a:prstGeom>
+          <a:noFill/>
+        </p:spPr>
+        <p:txBody>
+          <a:bodyPr wrap="square" anchor="ctr" lIns="73152" rIns="73152" tIns="36576" bIns="36576">
+            <a:spAutoFit/>
+          </a:bodyPr>
+          <a:lstStyle/>
+          <a:p>
+            <a:pPr algn="l"/>
+            <a:r>
+              <a:rPr sz="2000" b="0" i="0">
+                <a:solidFill>
+                  <a:srgbClr val="4A5568"/>
+                </a:solidFill>
+                <a:latin typeface="Calibri"/>
+              </a:rPr>
+              <a:t>18 + 0,1</a:t>
+            </a:r>
+          </a:p>
+        </p:txBody>
+      </p:sp>
+      <p:sp>
+        <p:nvSpPr>
+          <p:cNvPr id="19" name="Linha Mínima"/>
+          <p:cNvSpPr/>
+          <p:nvPr/>
+        </p:nvSpPr>
+        <p:spPr>
+          <a:xfrm>
+            <a:off x="6172200" y="3931920"/>
+            <a:ext cx="5440680" cy="896112"/>
+          </a:xfrm>
+          <a:prstGeom prst="roundRect">
+            <a:avLst>
+              <a:gd name="adj" fmla="val 8000"/>
+            </a:avLst>
+          </a:prstGeom>
+          <a:solidFill>
+            <a:srgbClr val="EEF1F6"/>
+          </a:solidFill>
+          <a:ln>
+            <a:noFill/>
+          </a:ln>
+          <a:effectLst/>
+        </p:spPr>
+        <p:style>
+          <a:lnRef idx="1">
+            <a:schemeClr val="accent1"/>
+          </a:lnRef>
+          <a:fillRef idx="3">
+            <a:schemeClr val="accent1"/>
+          </a:fillRef>
+          <a:effectRef idx="2">
+            <a:schemeClr val="accent1"/>
+          </a:effectRef>
+          <a:fontRef idx="minor">
+            <a:schemeClr val="lt1"/>
+          </a:fontRef>
+        </p:style>
+        <p:txBody>
+          <a:bodyPr rtlCol="0" anchor="ctr"/>
+          <a:lstStyle/>
+          <a:p/>
+        </p:txBody>
+      </p:sp>
+      <p:sp>
+        <p:nvSpPr>
+          <p:cNvPr id="20" name="TextBox 19"/>
+          <p:cNvSpPr txBox="1"/>
+          <p:nvPr/>
+        </p:nvSpPr>
+        <p:spPr>
+          <a:xfrm>
+            <a:off x="6355080" y="3931920"/>
+            <a:ext cx="1783080" cy="896112"/>
+          </a:xfrm>
+          <a:prstGeom prst="rect">
+            <a:avLst/>
+          </a:prstGeom>
+          <a:noFill/>
+        </p:spPr>
+        <p:txBody>
+          <a:bodyPr wrap="square" anchor="ctr" lIns="73152" rIns="73152" tIns="36576" bIns="36576">
+            <a:spAutoFit/>
+          </a:bodyPr>
+          <a:lstStyle/>
+          <a:p>
+            <a:pPr algn="l"/>
+            <a:r>
+              <a:rPr sz="2800" b="1" i="0">
+                <a:solidFill>
+                  <a:srgbClr val="002060"/>
+                </a:solidFill>
+                <a:latin typeface="Calibri"/>
+              </a:rPr>
+              <a:t>Mínima</a:t>
+            </a:r>
+          </a:p>
+        </p:txBody>
+      </p:sp>
+      <p:sp>
+        <p:nvSpPr>
+          <p:cNvPr id="21" name="Resposta Mínima"/>
+          <p:cNvSpPr/>
+          <p:nvPr/>
+        </p:nvSpPr>
+        <p:spPr>
+          <a:xfrm>
+            <a:off x="8183879" y="4041648"/>
+            <a:ext cx="1783080" cy="676656"/>
+          </a:xfrm>
+          <a:prstGeom prst="roundRect">
+            <a:avLst>
+              <a:gd name="adj" fmla="val 8000"/>
+            </a:avLst>
+          </a:prstGeom>
+          <a:solidFill>
+            <a:srgbClr val="FFFFFF"/>
+          </a:solidFill>
+          <a:ln w="19050">
+            <a:solidFill>
+              <a:srgbClr val="1E7A46"/>
+            </a:solidFill>
+          </a:ln>
+          <a:effectLst/>
+        </p:spPr>
+        <p:style>
+          <a:lnRef idx="1">
+            <a:schemeClr val="accent1"/>
+          </a:lnRef>
+          <a:fillRef idx="3">
+            <a:schemeClr val="accent1"/>
+          </a:fillRef>
+          <a:effectRef idx="2">
+            <a:schemeClr val="accent1"/>
+          </a:effectRef>
+          <a:fontRef idx="minor">
+            <a:schemeClr val="lt1"/>
+          </a:fontRef>
+        </p:style>
+        <p:txBody>
+          <a:bodyPr rtlCol="0" anchor="ctr"/>
+          <a:lstStyle/>
+          <a:p/>
+        </p:txBody>
+      </p:sp>
+      <p:sp>
+        <p:nvSpPr>
+          <p:cNvPr id="22" name="TextBox 21"/>
+          <p:cNvSpPr txBox="1"/>
+          <p:nvPr/>
+        </p:nvSpPr>
+        <p:spPr>
+          <a:xfrm>
+            <a:off x="8183879" y="4041648"/>
+            <a:ext cx="1783080" cy="676656"/>
+          </a:xfrm>
+          <a:prstGeom prst="rect">
+            <a:avLst/>
+          </a:prstGeom>
+          <a:noFill/>
+        </p:spPr>
+        <p:txBody>
+          <a:bodyPr wrap="square" anchor="ctr" lIns="73152" rIns="73152" tIns="36576" bIns="36576">
+            <a:spAutoFit/>
+          </a:bodyPr>
+          <a:lstStyle/>
+          <a:p>
+            <a:pPr algn="ctr"/>
+            <a:r>
+              <a:rPr sz="3000" b="1" i="0">
+                <a:solidFill>
+                  <a:srgbClr val="1E7A46"/>
+                </a:solidFill>
+                <a:latin typeface="Calibri"/>
+              </a:rPr>
+              <a:t>17,9</a:t>
+            </a:r>
+          </a:p>
+        </p:txBody>
+      </p:sp>
+      <p:sp>
+        <p:nvSpPr>
+          <p:cNvPr id="23" name="TextBox 22"/>
+          <p:cNvSpPr txBox="1"/>
+          <p:nvPr/>
+        </p:nvSpPr>
+        <p:spPr>
+          <a:xfrm>
+            <a:off x="10012680" y="3931920"/>
+            <a:ext cx="1554480" cy="896112"/>
+          </a:xfrm>
+          <a:prstGeom prst="rect">
+            <a:avLst/>
+          </a:prstGeom>
+          <a:noFill/>
+        </p:spPr>
+        <p:txBody>
+          <a:bodyPr wrap="square" anchor="ctr" lIns="73152" rIns="73152" tIns="36576" bIns="36576">
+            <a:spAutoFit/>
+          </a:bodyPr>
+          <a:lstStyle/>
+          <a:p>
+            <a:pPr algn="l"/>
+            <a:r>
+              <a:rPr sz="2000" b="0" i="0">
+                <a:solidFill>
+                  <a:srgbClr val="4A5568"/>
+                </a:solidFill>
+                <a:latin typeface="Calibri"/>
+              </a:rPr>
+              <a:t>18 − 0,1</a:t>
+            </a:r>
+          </a:p>
+        </p:txBody>
+      </p:sp>
+      <p:sp>
+        <p:nvSpPr>
+          <p:cNvPr id="24" name="Linha Faixa"/>
+          <p:cNvSpPr/>
+          <p:nvPr/>
+        </p:nvSpPr>
+        <p:spPr>
+          <a:xfrm>
+            <a:off x="6172200" y="4937760"/>
+            <a:ext cx="5440680" cy="896112"/>
+          </a:xfrm>
+          <a:prstGeom prst="roundRect">
+            <a:avLst>
+              <a:gd name="adj" fmla="val 8000"/>
+            </a:avLst>
+          </a:prstGeom>
+          <a:solidFill>
+            <a:srgbClr val="EEF1F6"/>
+          </a:solidFill>
+          <a:ln>
+            <a:noFill/>
+          </a:ln>
+          <a:effectLst/>
+        </p:spPr>
+        <p:style>
+          <a:lnRef idx="1">
+            <a:schemeClr val="accent1"/>
+          </a:lnRef>
+          <a:fillRef idx="3">
+            <a:schemeClr val="accent1"/>
+          </a:fillRef>
+          <a:effectRef idx="2">
+            <a:schemeClr val="accent1"/>
+          </a:effectRef>
+          <a:fontRef idx="minor">
+            <a:schemeClr val="lt1"/>
+          </a:fontRef>
+        </p:style>
+        <p:txBody>
+          <a:bodyPr rtlCol="0" anchor="ctr"/>
+          <a:lstStyle/>
+          <a:p/>
+        </p:txBody>
+      </p:sp>
+      <p:sp>
+        <p:nvSpPr>
+          <p:cNvPr id="25" name="TextBox 24"/>
+          <p:cNvSpPr txBox="1"/>
+          <p:nvPr/>
+        </p:nvSpPr>
+        <p:spPr>
+          <a:xfrm>
+            <a:off x="6355080" y="4937760"/>
+            <a:ext cx="1783080" cy="896112"/>
+          </a:xfrm>
+          <a:prstGeom prst="rect">
+            <a:avLst/>
+          </a:prstGeom>
+          <a:noFill/>
+        </p:spPr>
+        <p:txBody>
+          <a:bodyPr wrap="square" anchor="ctr" lIns="73152" rIns="73152" tIns="36576" bIns="36576">
+            <a:spAutoFit/>
+          </a:bodyPr>
+          <a:lstStyle/>
+          <a:p>
+            <a:pPr algn="l"/>
+            <a:r>
+              <a:rPr sz="2800" b="1" i="0">
+                <a:solidFill>
+                  <a:srgbClr val="002060"/>
+                </a:solidFill>
+                <a:latin typeface="Calibri"/>
+              </a:rPr>
+              <a:t>Faixa</a:t>
+            </a:r>
+          </a:p>
+        </p:txBody>
+      </p:sp>
+      <p:sp>
+        <p:nvSpPr>
+          <p:cNvPr id="26" name="Resposta Faixa"/>
+          <p:cNvSpPr/>
+          <p:nvPr/>
+        </p:nvSpPr>
+        <p:spPr>
+          <a:xfrm>
+            <a:off x="8183879" y="5047488"/>
+            <a:ext cx="1783080" cy="676656"/>
+          </a:xfrm>
+          <a:prstGeom prst="roundRect">
+            <a:avLst>
+              <a:gd name="adj" fmla="val 8000"/>
+            </a:avLst>
+          </a:prstGeom>
+          <a:solidFill>
+            <a:srgbClr val="FFFFFF"/>
+          </a:solidFill>
+          <a:ln w="19050">
+            <a:solidFill>
+              <a:srgbClr val="1E7A46"/>
+            </a:solidFill>
+          </a:ln>
+          <a:effectLst/>
+        </p:spPr>
+        <p:style>
+          <a:lnRef idx="1">
+            <a:schemeClr val="accent1"/>
+          </a:lnRef>
+          <a:fillRef idx="3">
+            <a:schemeClr val="accent1"/>
+          </a:fillRef>
+          <a:effectRef idx="2">
+            <a:schemeClr val="accent1"/>
+          </a:effectRef>
+          <a:fontRef idx="minor">
+            <a:schemeClr val="lt1"/>
+          </a:fontRef>
+        </p:style>
+        <p:txBody>
+          <a:bodyPr rtlCol="0" anchor="ctr"/>
+          <a:lstStyle/>
+          <a:p/>
+        </p:txBody>
+      </p:sp>
+      <p:sp>
+        <p:nvSpPr>
+          <p:cNvPr id="27" name="TextBox 26"/>
+          <p:cNvSpPr txBox="1"/>
+          <p:nvPr/>
+        </p:nvSpPr>
+        <p:spPr>
+          <a:xfrm>
+            <a:off x="8183879" y="5047488"/>
+            <a:ext cx="1783080" cy="676656"/>
+          </a:xfrm>
+          <a:prstGeom prst="rect">
+            <a:avLst/>
+          </a:prstGeom>
+          <a:noFill/>
+        </p:spPr>
+        <p:txBody>
+          <a:bodyPr wrap="square" anchor="ctr" lIns="73152" rIns="73152" tIns="36576" bIns="36576">
+            <a:spAutoFit/>
+          </a:bodyPr>
+          <a:lstStyle/>
+          <a:p>
+            <a:pPr algn="ctr"/>
+            <a:r>
+              <a:rPr sz="3000" b="1" i="0">
+                <a:solidFill>
+                  <a:srgbClr val="1E7A46"/>
+                </a:solidFill>
+                <a:latin typeface="Calibri"/>
+              </a:rPr>
+              <a:t>0,2</a:t>
+            </a:r>
+          </a:p>
+        </p:txBody>
+      </p:sp>
+      <p:sp>
+        <p:nvSpPr>
+          <p:cNvPr id="28" name="TextBox 27"/>
+          <p:cNvSpPr txBox="1"/>
+          <p:nvPr/>
+        </p:nvSpPr>
+        <p:spPr>
+          <a:xfrm>
+            <a:off x="10012680" y="4937760"/>
+            <a:ext cx="1554480" cy="896112"/>
+          </a:xfrm>
+          <a:prstGeom prst="rect">
+            <a:avLst/>
+          </a:prstGeom>
+          <a:noFill/>
+        </p:spPr>
+        <p:txBody>
+          <a:bodyPr wrap="square" anchor="ctr" lIns="73152" rIns="73152" tIns="36576" bIns="36576">
+            <a:spAutoFit/>
+          </a:bodyPr>
+          <a:lstStyle/>
+          <a:p>
+            <a:pPr algn="l"/>
+            <a:r>
+              <a:rPr sz="2000" b="0" i="0">
+                <a:solidFill>
+                  <a:srgbClr val="4A5568"/>
+                </a:solidFill>
+                <a:latin typeface="Calibri"/>
+              </a:rPr>
+              <a:t>18,1 − 17,9</a:t>
+            </a:r>
+          </a:p>
+        </p:txBody>
+      </p:sp>
+    </p:spTree>
+  </p:cSld>
+  <p:clrMapOvr>
+    <a:masterClrMapping/>
+  </p:clrMapOvr>
+</p:sld>
+</file>
+
+<file path=ppt/slides/slide82.xml><?xml version="1.0" encoding="utf-8"?>
+<p:sld xmlns:a="http://schemas.openxmlformats.org/drawingml/2006/main" xmlns:p="http://schemas.openxmlformats.org/presentationml/2006/main" xmlns:r="http://schemas.openxmlformats.org/officeDocument/2006/relationships">
+  <p:cSld>
+    <p:spTree>
+      <p:nvGrpSpPr>
+        <p:cNvPr id="1" name=""/>
+        <p:cNvGrpSpPr/>
+        <p:nvPr/>
+      </p:nvGrpSpPr>
+      <p:grpSpPr/>
+      <p:pic>
+        <p:nvPicPr>
+          <p:cNvPr id="2" name="Fundo do modelo" descr="image.png"/>
+          <p:cNvPicPr>
+            <a:picLocks noChangeAspect="1"/>
+          </p:cNvPicPr>
+          <p:nvPr/>
+        </p:nvPicPr>
+        <p:blipFill>
+          <a:blip r:embed="rId2"/>
+          <a:stretch>
+            <a:fillRect/>
+          </a:stretch>
+        </p:blipFill>
+        <p:spPr>
+          <a:xfrm>
+            <a:off x="-29300" y="0"/>
+            <a:ext cx="12221300" cy="6857999"/>
+          </a:xfrm>
+          <a:prstGeom prst="rect">
+            <a:avLst/>
+          </a:prstGeom>
+        </p:spPr>
+      </p:pic>
+      <p:sp>
+        <p:nvSpPr>
+          <p:cNvPr id="3" name="Título"/>
+          <p:cNvSpPr txBox="1"/>
+          <p:nvPr/>
+        </p:nvSpPr>
+        <p:spPr>
+          <a:xfrm>
+            <a:off x="411480" y="713232"/>
+            <a:ext cx="9509760" cy="1051560"/>
+          </a:xfrm>
+          <a:prstGeom prst="rect">
+            <a:avLst/>
+          </a:prstGeom>
+          <a:noFill/>
+        </p:spPr>
+        <p:txBody>
+          <a:bodyPr wrap="square" anchor="ctr" lIns="73152" rIns="73152">
+            <a:spAutoFit/>
+          </a:bodyPr>
+          <a:lstStyle/>
+          <a:p>
+            <a:r>
+              <a:rPr sz="3800" b="1">
+                <a:solidFill>
+                  <a:srgbClr val="C00000"/>
+                </a:solidFill>
+                <a:latin typeface="Calibri"/>
+              </a:rPr>
+              <a:t>EXERCÍCIO 2</a:t>
+            </a:r>
+          </a:p>
+        </p:txBody>
+      </p:sp>
+      <p:sp>
+        <p:nvSpPr>
+          <p:cNvPr id="4" name="TextBox 3"/>
+          <p:cNvSpPr txBox="1"/>
+          <p:nvPr/>
+        </p:nvSpPr>
+        <p:spPr>
+          <a:xfrm>
+            <a:off x="502920" y="1828799"/>
+            <a:ext cx="5486400" cy="548640"/>
+          </a:xfrm>
+          <a:prstGeom prst="rect">
+            <a:avLst/>
+          </a:prstGeom>
+          <a:noFill/>
+        </p:spPr>
+        <p:txBody>
+          <a:bodyPr wrap="square" anchor="t" lIns="73152" rIns="73152" tIns="36576" bIns="36576">
+            <a:spAutoFit/>
+          </a:bodyPr>
+          <a:lstStyle/>
+          <a:p>
+            <a:pPr algn="l"/>
+            <a:r>
+              <a:rPr sz="2400" b="0" i="0">
+                <a:solidFill>
+                  <a:srgbClr val="4A5568"/>
+                </a:solidFill>
+                <a:latin typeface="Calibri"/>
+              </a:rPr>
+              <a:t>Encontre os valores (em mm):</a:t>
+            </a:r>
+          </a:p>
+        </p:txBody>
+      </p:sp>
+      <p:sp>
+        <p:nvSpPr>
+          <p:cNvPr id="5" name="Cota"/>
+          <p:cNvSpPr/>
+          <p:nvPr/>
+        </p:nvSpPr>
+        <p:spPr>
+          <a:xfrm>
+            <a:off x="731520" y="2514600"/>
+            <a:ext cx="4937760" cy="2743200"/>
+          </a:xfrm>
+          <a:prstGeom prst="roundRect">
+            <a:avLst>
+              <a:gd name="adj" fmla="val 8000"/>
+            </a:avLst>
+          </a:prstGeom>
+          <a:solidFill>
+            <a:srgbClr val="EEF1F6"/>
+          </a:solidFill>
+          <a:ln>
+            <a:noFill/>
+          </a:ln>
+          <a:effectLst/>
+        </p:spPr>
+        <p:style>
+          <a:lnRef idx="1">
+            <a:schemeClr val="accent1"/>
+          </a:lnRef>
+          <a:fillRef idx="3">
+            <a:schemeClr val="accent1"/>
+          </a:fillRef>
+          <a:effectRef idx="2">
+            <a:schemeClr val="accent1"/>
+          </a:effectRef>
+          <a:fontRef idx="minor">
+            <a:schemeClr val="lt1"/>
+          </a:fontRef>
+        </p:style>
+        <p:txBody>
+          <a:bodyPr rtlCol="0" anchor="ctr"/>
+          <a:lstStyle/>
+          <a:p/>
+        </p:txBody>
+      </p:sp>
+      <p:sp>
+        <p:nvSpPr>
+          <p:cNvPr id="6" name="TextBox 5"/>
+          <p:cNvSpPr txBox="1"/>
+          <p:nvPr/>
+        </p:nvSpPr>
+        <p:spPr>
+          <a:xfrm>
+            <a:off x="731520" y="2606040"/>
+            <a:ext cx="4937760" cy="502920"/>
+          </a:xfrm>
+          <a:prstGeom prst="rect">
+            <a:avLst/>
+          </a:prstGeom>
+          <a:noFill/>
+        </p:spPr>
+        <p:txBody>
+          <a:bodyPr wrap="square" anchor="t" lIns="73152" rIns="73152" tIns="36576" bIns="36576">
+            <a:spAutoFit/>
+          </a:bodyPr>
+          <a:lstStyle/>
+          <a:p>
+            <a:pPr algn="ctr"/>
+            <a:r>
+              <a:rPr sz="2200" b="0" i="0">
+                <a:solidFill>
+                  <a:srgbClr val="4A5568"/>
+                </a:solidFill>
+                <a:latin typeface="Calibri"/>
+              </a:rPr>
+              <a:t>cota do desenho</a:t>
+            </a:r>
+          </a:p>
+        </p:txBody>
+      </p:sp>
+      <p:sp>
+        <p:nvSpPr>
+          <p:cNvPr id="7" name="TextBox 6"/>
+          <p:cNvSpPr txBox="1"/>
+          <p:nvPr/>
+        </p:nvSpPr>
+        <p:spPr>
+          <a:xfrm>
+            <a:off x="731520" y="3017520"/>
+            <a:ext cx="4937760" cy="2103120"/>
+          </a:xfrm>
+          <a:prstGeom prst="rect">
+            <a:avLst/>
+          </a:prstGeom>
+          <a:noFill/>
+        </p:spPr>
+        <p:txBody>
+          <a:bodyPr wrap="square" anchor="ctr" lIns="73152" rIns="73152" tIns="36576" bIns="36576">
+            <a:spAutoFit/>
+          </a:bodyPr>
+          <a:lstStyle/>
+          <a:p>
+            <a:pPr algn="ctr"/>
+            <a:r>
+              <a:rPr sz="6000" b="1" i="0">
+                <a:solidFill>
+                  <a:srgbClr val="002060"/>
+                </a:solidFill>
+                <a:latin typeface="Calibri"/>
+              </a:rPr>
+              <a:t>40 ± 0,3</a:t>
+            </a:r>
+          </a:p>
+        </p:txBody>
+      </p:sp>
+      <p:sp>
+        <p:nvSpPr>
+          <p:cNvPr id="8" name="Linha Nominal"/>
+          <p:cNvSpPr/>
+          <p:nvPr/>
+        </p:nvSpPr>
+        <p:spPr>
+          <a:xfrm>
+            <a:off x="6172200" y="1920239"/>
+            <a:ext cx="5440680" cy="896112"/>
+          </a:xfrm>
+          <a:prstGeom prst="roundRect">
+            <a:avLst>
+              <a:gd name="adj" fmla="val 8000"/>
+            </a:avLst>
+          </a:prstGeom>
+          <a:solidFill>
+            <a:srgbClr val="EEF1F6"/>
+          </a:solidFill>
+          <a:ln>
+            <a:noFill/>
+          </a:ln>
+          <a:effectLst/>
+        </p:spPr>
+        <p:style>
+          <a:lnRef idx="1">
+            <a:schemeClr val="accent1"/>
+          </a:lnRef>
+          <a:fillRef idx="3">
+            <a:schemeClr val="accent1"/>
+          </a:fillRef>
+          <a:effectRef idx="2">
+            <a:schemeClr val="accent1"/>
+          </a:effectRef>
+          <a:fontRef idx="minor">
+            <a:schemeClr val="lt1"/>
+          </a:fontRef>
+        </p:style>
+        <p:txBody>
+          <a:bodyPr rtlCol="0" anchor="ctr"/>
+          <a:lstStyle/>
+          <a:p/>
+        </p:txBody>
+      </p:sp>
+      <p:sp>
+        <p:nvSpPr>
+          <p:cNvPr id="9" name="TextBox 8"/>
+          <p:cNvSpPr txBox="1"/>
+          <p:nvPr/>
+        </p:nvSpPr>
+        <p:spPr>
+          <a:xfrm>
+            <a:off x="6355080" y="1920239"/>
+            <a:ext cx="1783080" cy="896112"/>
+          </a:xfrm>
+          <a:prstGeom prst="rect">
+            <a:avLst/>
+          </a:prstGeom>
+          <a:noFill/>
+        </p:spPr>
+        <p:txBody>
+          <a:bodyPr wrap="square" anchor="ctr" lIns="73152" rIns="73152" tIns="36576" bIns="36576">
+            <a:spAutoFit/>
+          </a:bodyPr>
+          <a:lstStyle/>
+          <a:p>
+            <a:pPr algn="l"/>
+            <a:r>
+              <a:rPr sz="2800" b="1" i="0">
+                <a:solidFill>
+                  <a:srgbClr val="002060"/>
+                </a:solidFill>
+                <a:latin typeface="Calibri"/>
+              </a:rPr>
+              <a:t>Nominal</a:t>
+            </a:r>
+          </a:p>
+        </p:txBody>
+      </p:sp>
+      <p:sp>
+        <p:nvSpPr>
+          <p:cNvPr id="10" name="Espaço Nominal"/>
+          <p:cNvSpPr/>
+          <p:nvPr/>
+        </p:nvSpPr>
+        <p:spPr>
+          <a:xfrm>
+            <a:off x="8183879" y="2029967"/>
+            <a:ext cx="1783080" cy="676656"/>
+          </a:xfrm>
+          <a:prstGeom prst="roundRect">
+            <a:avLst>
+              <a:gd name="adj" fmla="val 8000"/>
+            </a:avLst>
+          </a:prstGeom>
+          <a:solidFill>
+            <a:srgbClr val="FFFFFF"/>
+          </a:solidFill>
+          <a:ln w="19050">
+            <a:solidFill>
+              <a:srgbClr val="4A5568"/>
+            </a:solidFill>
+          </a:ln>
+          <a:effectLst/>
+        </p:spPr>
+        <p:style>
+          <a:lnRef idx="1">
+            <a:schemeClr val="accent1"/>
+          </a:lnRef>
+          <a:fillRef idx="3">
+            <a:schemeClr val="accent1"/>
+          </a:fillRef>
+          <a:effectRef idx="2">
+            <a:schemeClr val="accent1"/>
+          </a:effectRef>
+          <a:fontRef idx="minor">
+            <a:schemeClr val="lt1"/>
+          </a:fontRef>
+        </p:style>
+        <p:txBody>
+          <a:bodyPr rtlCol="0" anchor="ctr"/>
+          <a:lstStyle/>
+          <a:p/>
+        </p:txBody>
+      </p:sp>
+      <p:sp>
+        <p:nvSpPr>
+          <p:cNvPr id="11" name="TextBox 10"/>
+          <p:cNvSpPr txBox="1"/>
+          <p:nvPr/>
+        </p:nvSpPr>
+        <p:spPr>
+          <a:xfrm>
+            <a:off x="8183879" y="2029967"/>
+            <a:ext cx="1783080" cy="676656"/>
+          </a:xfrm>
+          <a:prstGeom prst="rect">
+            <a:avLst/>
+          </a:prstGeom>
+          <a:noFill/>
+        </p:spPr>
+        <p:txBody>
+          <a:bodyPr wrap="square" anchor="ctr" lIns="73152" rIns="73152" tIns="36576" bIns="36576">
+            <a:spAutoFit/>
+          </a:bodyPr>
+          <a:lstStyle/>
+          <a:p>
+            <a:pPr algn="ctr"/>
+            <a:r>
+              <a:rPr sz="3000" b="1" i="0">
+                <a:solidFill>
+                  <a:srgbClr val="4A5568"/>
+                </a:solidFill>
+                <a:latin typeface="Calibri"/>
+              </a:rPr>
+              <a:t>?</a:t>
+            </a:r>
+          </a:p>
+        </p:txBody>
+      </p:sp>
+      <p:sp>
+        <p:nvSpPr>
+          <p:cNvPr id="12" name="Linha Máxima"/>
+          <p:cNvSpPr/>
+          <p:nvPr/>
+        </p:nvSpPr>
+        <p:spPr>
+          <a:xfrm>
+            <a:off x="6172200" y="2926079"/>
+            <a:ext cx="5440680" cy="896112"/>
+          </a:xfrm>
+          <a:prstGeom prst="roundRect">
+            <a:avLst>
+              <a:gd name="adj" fmla="val 8000"/>
+            </a:avLst>
+          </a:prstGeom>
+          <a:solidFill>
+            <a:srgbClr val="EEF1F6"/>
+          </a:solidFill>
+          <a:ln>
+            <a:noFill/>
+          </a:ln>
+          <a:effectLst/>
+        </p:spPr>
+        <p:style>
+          <a:lnRef idx="1">
+            <a:schemeClr val="accent1"/>
+          </a:lnRef>
+          <a:fillRef idx="3">
+            <a:schemeClr val="accent1"/>
+          </a:fillRef>
+          <a:effectRef idx="2">
+            <a:schemeClr val="accent1"/>
+          </a:effectRef>
+          <a:fontRef idx="minor">
+            <a:schemeClr val="lt1"/>
+          </a:fontRef>
+        </p:style>
+        <p:txBody>
+          <a:bodyPr rtlCol="0" anchor="ctr"/>
+          <a:lstStyle/>
+          <a:p/>
+        </p:txBody>
+      </p:sp>
+      <p:sp>
+        <p:nvSpPr>
+          <p:cNvPr id="13" name="TextBox 12"/>
+          <p:cNvSpPr txBox="1"/>
+          <p:nvPr/>
+        </p:nvSpPr>
+        <p:spPr>
+          <a:xfrm>
+            <a:off x="6355080" y="2926079"/>
+            <a:ext cx="1783080" cy="896112"/>
+          </a:xfrm>
+          <a:prstGeom prst="rect">
+            <a:avLst/>
+          </a:prstGeom>
+          <a:noFill/>
+        </p:spPr>
+        <p:txBody>
+          <a:bodyPr wrap="square" anchor="ctr" lIns="73152" rIns="73152" tIns="36576" bIns="36576">
+            <a:spAutoFit/>
+          </a:bodyPr>
+          <a:lstStyle/>
+          <a:p>
+            <a:pPr algn="l"/>
+            <a:r>
+              <a:rPr sz="2800" b="1" i="0">
+                <a:solidFill>
+                  <a:srgbClr val="002060"/>
+                </a:solidFill>
+                <a:latin typeface="Calibri"/>
+              </a:rPr>
+              <a:t>Máxima</a:t>
+            </a:r>
+          </a:p>
+        </p:txBody>
+      </p:sp>
+      <p:sp>
+        <p:nvSpPr>
+          <p:cNvPr id="14" name="Espaço Máxima"/>
+          <p:cNvSpPr/>
+          <p:nvPr/>
+        </p:nvSpPr>
+        <p:spPr>
+          <a:xfrm>
+            <a:off x="8183879" y="3035808"/>
+            <a:ext cx="1783080" cy="676656"/>
+          </a:xfrm>
+          <a:prstGeom prst="roundRect">
+            <a:avLst>
+              <a:gd name="adj" fmla="val 8000"/>
+            </a:avLst>
+          </a:prstGeom>
+          <a:solidFill>
+            <a:srgbClr val="FFFFFF"/>
+          </a:solidFill>
+          <a:ln w="19050">
+            <a:solidFill>
+              <a:srgbClr val="4A5568"/>
+            </a:solidFill>
+          </a:ln>
+          <a:effectLst/>
+        </p:spPr>
+        <p:style>
+          <a:lnRef idx="1">
+            <a:schemeClr val="accent1"/>
+          </a:lnRef>
+          <a:fillRef idx="3">
+            <a:schemeClr val="accent1"/>
+          </a:fillRef>
+          <a:effectRef idx="2">
+            <a:schemeClr val="accent1"/>
+          </a:effectRef>
+          <a:fontRef idx="minor">
+            <a:schemeClr val="lt1"/>
+          </a:fontRef>
+        </p:style>
+        <p:txBody>
+          <a:bodyPr rtlCol="0" anchor="ctr"/>
+          <a:lstStyle/>
+          <a:p/>
+        </p:txBody>
+      </p:sp>
+      <p:sp>
+        <p:nvSpPr>
+          <p:cNvPr id="15" name="TextBox 14"/>
+          <p:cNvSpPr txBox="1"/>
+          <p:nvPr/>
+        </p:nvSpPr>
+        <p:spPr>
+          <a:xfrm>
+            <a:off x="8183879" y="3035808"/>
+            <a:ext cx="1783080" cy="676656"/>
+          </a:xfrm>
+          <a:prstGeom prst="rect">
+            <a:avLst/>
+          </a:prstGeom>
+          <a:noFill/>
+        </p:spPr>
+        <p:txBody>
+          <a:bodyPr wrap="square" anchor="ctr" lIns="73152" rIns="73152" tIns="36576" bIns="36576">
+            <a:spAutoFit/>
+          </a:bodyPr>
+          <a:lstStyle/>
+          <a:p>
+            <a:pPr algn="ctr"/>
+            <a:r>
+              <a:rPr sz="3000" b="1" i="0">
+                <a:solidFill>
+                  <a:srgbClr val="4A5568"/>
+                </a:solidFill>
+                <a:latin typeface="Calibri"/>
+              </a:rPr>
+              <a:t>?</a:t>
+            </a:r>
+          </a:p>
+        </p:txBody>
+      </p:sp>
+      <p:sp>
+        <p:nvSpPr>
+          <p:cNvPr id="16" name="Linha Mínima"/>
+          <p:cNvSpPr/>
+          <p:nvPr/>
+        </p:nvSpPr>
+        <p:spPr>
+          <a:xfrm>
+            <a:off x="6172200" y="3931920"/>
+            <a:ext cx="5440680" cy="896112"/>
+          </a:xfrm>
+          <a:prstGeom prst="roundRect">
+            <a:avLst>
+              <a:gd name="adj" fmla="val 8000"/>
+            </a:avLst>
+          </a:prstGeom>
+          <a:solidFill>
+            <a:srgbClr val="EEF1F6"/>
+          </a:solidFill>
+          <a:ln>
+            <a:noFill/>
+          </a:ln>
+          <a:effectLst/>
+        </p:spPr>
+        <p:style>
+          <a:lnRef idx="1">
+            <a:schemeClr val="accent1"/>
+          </a:lnRef>
+          <a:fillRef idx="3">
+            <a:schemeClr val="accent1"/>
+          </a:fillRef>
+          <a:effectRef idx="2">
+            <a:schemeClr val="accent1"/>
+          </a:effectRef>
+          <a:fontRef idx="minor">
+            <a:schemeClr val="lt1"/>
+          </a:fontRef>
+        </p:style>
+        <p:txBody>
+          <a:bodyPr rtlCol="0" anchor="ctr"/>
+          <a:lstStyle/>
+          <a:p/>
+        </p:txBody>
+      </p:sp>
+      <p:sp>
+        <p:nvSpPr>
+          <p:cNvPr id="17" name="TextBox 16"/>
+          <p:cNvSpPr txBox="1"/>
+          <p:nvPr/>
+        </p:nvSpPr>
+        <p:spPr>
+          <a:xfrm>
+            <a:off x="6355080" y="3931920"/>
+            <a:ext cx="1783080" cy="896112"/>
+          </a:xfrm>
+          <a:prstGeom prst="rect">
+            <a:avLst/>
+          </a:prstGeom>
+          <a:noFill/>
+        </p:spPr>
+        <p:txBody>
+          <a:bodyPr wrap="square" anchor="ctr" lIns="73152" rIns="73152" tIns="36576" bIns="36576">
+            <a:spAutoFit/>
+          </a:bodyPr>
+          <a:lstStyle/>
+          <a:p>
+            <a:pPr algn="l"/>
+            <a:r>
+              <a:rPr sz="2800" b="1" i="0">
+                <a:solidFill>
+                  <a:srgbClr val="002060"/>
+                </a:solidFill>
+                <a:latin typeface="Calibri"/>
+              </a:rPr>
+              <a:t>Mínima</a:t>
+            </a:r>
+          </a:p>
+        </p:txBody>
+      </p:sp>
+      <p:sp>
+        <p:nvSpPr>
+          <p:cNvPr id="18" name="Espaço Mínima"/>
+          <p:cNvSpPr/>
+          <p:nvPr/>
+        </p:nvSpPr>
+        <p:spPr>
+          <a:xfrm>
+            <a:off x="8183879" y="4041648"/>
+            <a:ext cx="1783080" cy="676656"/>
+          </a:xfrm>
+          <a:prstGeom prst="roundRect">
+            <a:avLst>
+              <a:gd name="adj" fmla="val 8000"/>
+            </a:avLst>
+          </a:prstGeom>
+          <a:solidFill>
+            <a:srgbClr val="FFFFFF"/>
+          </a:solidFill>
+          <a:ln w="19050">
+            <a:solidFill>
+              <a:srgbClr val="4A5568"/>
+            </a:solidFill>
+          </a:ln>
+          <a:effectLst/>
+        </p:spPr>
+        <p:style>
+          <a:lnRef idx="1">
+            <a:schemeClr val="accent1"/>
+          </a:lnRef>
+          <a:fillRef idx="3">
+            <a:schemeClr val="accent1"/>
+          </a:fillRef>
+          <a:effectRef idx="2">
+            <a:schemeClr val="accent1"/>
+          </a:effectRef>
+          <a:fontRef idx="minor">
+            <a:schemeClr val="lt1"/>
+          </a:fontRef>
+        </p:style>
+        <p:txBody>
+          <a:bodyPr rtlCol="0" anchor="ctr"/>
+          <a:lstStyle/>
+          <a:p/>
+        </p:txBody>
+      </p:sp>
+      <p:sp>
+        <p:nvSpPr>
+          <p:cNvPr id="19" name="TextBox 18"/>
+          <p:cNvSpPr txBox="1"/>
+          <p:nvPr/>
+        </p:nvSpPr>
+        <p:spPr>
+          <a:xfrm>
+            <a:off x="8183879" y="4041648"/>
+            <a:ext cx="1783080" cy="676656"/>
+          </a:xfrm>
+          <a:prstGeom prst="rect">
+            <a:avLst/>
+          </a:prstGeom>
+          <a:noFill/>
+        </p:spPr>
+        <p:txBody>
+          <a:bodyPr wrap="square" anchor="ctr" lIns="73152" rIns="73152" tIns="36576" bIns="36576">
+            <a:spAutoFit/>
+          </a:bodyPr>
+          <a:lstStyle/>
+          <a:p>
+            <a:pPr algn="ctr"/>
+            <a:r>
+              <a:rPr sz="3000" b="1" i="0">
+                <a:solidFill>
+                  <a:srgbClr val="4A5568"/>
+                </a:solidFill>
+                <a:latin typeface="Calibri"/>
+              </a:rPr>
+              <a:t>?</a:t>
+            </a:r>
+          </a:p>
+        </p:txBody>
+      </p:sp>
+      <p:sp>
+        <p:nvSpPr>
+          <p:cNvPr id="20" name="Linha Faixa"/>
+          <p:cNvSpPr/>
+          <p:nvPr/>
+        </p:nvSpPr>
+        <p:spPr>
+          <a:xfrm>
+            <a:off x="6172200" y="4937760"/>
+            <a:ext cx="5440680" cy="896112"/>
+          </a:xfrm>
+          <a:prstGeom prst="roundRect">
+            <a:avLst>
+              <a:gd name="adj" fmla="val 8000"/>
+            </a:avLst>
+          </a:prstGeom>
+          <a:solidFill>
+            <a:srgbClr val="EEF1F6"/>
+          </a:solidFill>
+          <a:ln>
+            <a:noFill/>
+          </a:ln>
+          <a:effectLst/>
+        </p:spPr>
+        <p:style>
+          <a:lnRef idx="1">
+            <a:schemeClr val="accent1"/>
+          </a:lnRef>
+          <a:fillRef idx="3">
+            <a:schemeClr val="accent1"/>
+          </a:fillRef>
+          <a:effectRef idx="2">
+            <a:schemeClr val="accent1"/>
+          </a:effectRef>
+          <a:fontRef idx="minor">
+            <a:schemeClr val="lt1"/>
+          </a:fontRef>
+        </p:style>
+        <p:txBody>
+          <a:bodyPr rtlCol="0" anchor="ctr"/>
+          <a:lstStyle/>
+          <a:p/>
+        </p:txBody>
+      </p:sp>
+      <p:sp>
+        <p:nvSpPr>
+          <p:cNvPr id="21" name="TextBox 20"/>
+          <p:cNvSpPr txBox="1"/>
+          <p:nvPr/>
+        </p:nvSpPr>
+        <p:spPr>
+          <a:xfrm>
+            <a:off x="6355080" y="4937760"/>
+            <a:ext cx="1783080" cy="896112"/>
+          </a:xfrm>
+          <a:prstGeom prst="rect">
+            <a:avLst/>
+          </a:prstGeom>
+          <a:noFill/>
+        </p:spPr>
+        <p:txBody>
+          <a:bodyPr wrap="square" anchor="ctr" lIns="73152" rIns="73152" tIns="36576" bIns="36576">
+            <a:spAutoFit/>
+          </a:bodyPr>
+          <a:lstStyle/>
+          <a:p>
+            <a:pPr algn="l"/>
+            <a:r>
+              <a:rPr sz="2800" b="1" i="0">
+                <a:solidFill>
+                  <a:srgbClr val="002060"/>
+                </a:solidFill>
+                <a:latin typeface="Calibri"/>
+              </a:rPr>
+              <a:t>Faixa</a:t>
+            </a:r>
+          </a:p>
+        </p:txBody>
+      </p:sp>
+      <p:sp>
+        <p:nvSpPr>
+          <p:cNvPr id="22" name="Espaço Faixa"/>
+          <p:cNvSpPr/>
+          <p:nvPr/>
+        </p:nvSpPr>
+        <p:spPr>
+          <a:xfrm>
+            <a:off x="8183879" y="5047488"/>
+            <a:ext cx="1783080" cy="676656"/>
+          </a:xfrm>
+          <a:prstGeom prst="roundRect">
+            <a:avLst>
+              <a:gd name="adj" fmla="val 8000"/>
+            </a:avLst>
+          </a:prstGeom>
+          <a:solidFill>
+            <a:srgbClr val="FFFFFF"/>
+          </a:solidFill>
+          <a:ln w="19050">
+            <a:solidFill>
+              <a:srgbClr val="4A5568"/>
+            </a:solidFill>
+          </a:ln>
+          <a:effectLst/>
+        </p:spPr>
+        <p:style>
+          <a:lnRef idx="1">
+            <a:schemeClr val="accent1"/>
+          </a:lnRef>
+          <a:fillRef idx="3">
+            <a:schemeClr val="accent1"/>
+          </a:fillRef>
+          <a:effectRef idx="2">
+            <a:schemeClr val="accent1"/>
+          </a:effectRef>
+          <a:fontRef idx="minor">
+            <a:schemeClr val="lt1"/>
+          </a:fontRef>
+        </p:style>
+        <p:txBody>
+          <a:bodyPr rtlCol="0" anchor="ctr"/>
+          <a:lstStyle/>
+          <a:p/>
+        </p:txBody>
+      </p:sp>
+      <p:sp>
+        <p:nvSpPr>
+          <p:cNvPr id="23" name="TextBox 22"/>
+          <p:cNvSpPr txBox="1"/>
+          <p:nvPr/>
+        </p:nvSpPr>
+        <p:spPr>
+          <a:xfrm>
+            <a:off x="8183879" y="5047488"/>
+            <a:ext cx="1783080" cy="676656"/>
+          </a:xfrm>
+          <a:prstGeom prst="rect">
+            <a:avLst/>
+          </a:prstGeom>
+          <a:noFill/>
+        </p:spPr>
+        <p:txBody>
+          <a:bodyPr wrap="square" anchor="ctr" lIns="73152" rIns="73152" tIns="36576" bIns="36576">
+            <a:spAutoFit/>
+          </a:bodyPr>
+          <a:lstStyle/>
+          <a:p>
+            <a:pPr algn="ctr"/>
+            <a:r>
+              <a:rPr sz="3000" b="1" i="0">
+                <a:solidFill>
+                  <a:srgbClr val="4A5568"/>
+                </a:solidFill>
+                <a:latin typeface="Calibri"/>
+              </a:rPr>
+              <a:t>?</a:t>
+            </a:r>
+          </a:p>
+        </p:txBody>
+      </p:sp>
+    </p:spTree>
+  </p:cSld>
+  <p:clrMapOvr>
+    <a:masterClrMapping/>
+  </p:clrMapOvr>
+</p:sld>
+</file>
+
+<file path=ppt/slides/slide83.xml><?xml version="1.0" encoding="utf-8"?>
+<p:sld xmlns:a="http://schemas.openxmlformats.org/drawingml/2006/main" xmlns:p="http://schemas.openxmlformats.org/presentationml/2006/main" xmlns:r="http://schemas.openxmlformats.org/officeDocument/2006/relationships">
+  <p:cSld>
+    <p:spTree>
+      <p:nvGrpSpPr>
+        <p:cNvPr id="1" name=""/>
+        <p:cNvGrpSpPr/>
+        <p:nvPr/>
+      </p:nvGrpSpPr>
+      <p:grpSpPr/>
+      <p:pic>
+        <p:nvPicPr>
+          <p:cNvPr id="2" name="Fundo do modelo" descr="image.png"/>
+          <p:cNvPicPr>
+            <a:picLocks noChangeAspect="1"/>
+          </p:cNvPicPr>
+          <p:nvPr/>
+        </p:nvPicPr>
+        <p:blipFill>
+          <a:blip r:embed="rId2"/>
+          <a:stretch>
+            <a:fillRect/>
+          </a:stretch>
+        </p:blipFill>
+        <p:spPr>
+          <a:xfrm>
+            <a:off x="-29300" y="0"/>
+            <a:ext cx="12221300" cy="6857999"/>
+          </a:xfrm>
+          <a:prstGeom prst="rect">
+            <a:avLst/>
+          </a:prstGeom>
+        </p:spPr>
+      </p:pic>
+      <p:sp>
+        <p:nvSpPr>
+          <p:cNvPr id="3" name="Título"/>
+          <p:cNvSpPr txBox="1"/>
+          <p:nvPr/>
+        </p:nvSpPr>
+        <p:spPr>
+          <a:xfrm>
+            <a:off x="411480" y="713232"/>
+            <a:ext cx="9509760" cy="1051560"/>
+          </a:xfrm>
+          <a:prstGeom prst="rect">
+            <a:avLst/>
+          </a:prstGeom>
+          <a:noFill/>
+        </p:spPr>
+        <p:txBody>
+          <a:bodyPr wrap="square" anchor="ctr" lIns="73152" rIns="73152">
+            <a:spAutoFit/>
+          </a:bodyPr>
+          <a:lstStyle/>
+          <a:p>
+            <a:r>
+              <a:rPr sz="3800" b="1">
+                <a:solidFill>
+                  <a:srgbClr val="C00000"/>
+                </a:solidFill>
+                <a:latin typeface="Calibri"/>
+              </a:rPr>
+              <a:t>EXERCÍCIO 2: RESPOSTA</a:t>
+            </a:r>
+          </a:p>
+        </p:txBody>
+      </p:sp>
+      <p:sp>
+        <p:nvSpPr>
+          <p:cNvPr id="4" name="TextBox 3"/>
+          <p:cNvSpPr txBox="1"/>
+          <p:nvPr/>
+        </p:nvSpPr>
+        <p:spPr>
+          <a:xfrm>
+            <a:off x="502920" y="1828799"/>
+            <a:ext cx="5486400" cy="548640"/>
+          </a:xfrm>
+          <a:prstGeom prst="rect">
+            <a:avLst/>
+          </a:prstGeom>
+          <a:noFill/>
+        </p:spPr>
+        <p:txBody>
+          <a:bodyPr wrap="square" anchor="t" lIns="73152" rIns="73152" tIns="36576" bIns="36576">
+            <a:spAutoFit/>
+          </a:bodyPr>
+          <a:lstStyle/>
+          <a:p>
+            <a:pPr algn="l"/>
+            <a:r>
+              <a:rPr sz="2400" b="0" i="0">
+                <a:solidFill>
+                  <a:srgbClr val="4A5568"/>
+                </a:solidFill>
+                <a:latin typeface="Calibri"/>
+              </a:rPr>
+              <a:t>Encontre os valores (em mm):</a:t>
+            </a:r>
+          </a:p>
+        </p:txBody>
+      </p:sp>
+      <p:sp>
+        <p:nvSpPr>
+          <p:cNvPr id="5" name="Cota"/>
+          <p:cNvSpPr/>
+          <p:nvPr/>
+        </p:nvSpPr>
+        <p:spPr>
+          <a:xfrm>
+            <a:off x="731520" y="2514600"/>
+            <a:ext cx="4937760" cy="2743200"/>
+          </a:xfrm>
+          <a:prstGeom prst="roundRect">
+            <a:avLst>
+              <a:gd name="adj" fmla="val 8000"/>
+            </a:avLst>
+          </a:prstGeom>
+          <a:solidFill>
+            <a:srgbClr val="EEF1F6"/>
+          </a:solidFill>
+          <a:ln>
+            <a:noFill/>
+          </a:ln>
+          <a:effectLst/>
+        </p:spPr>
+        <p:style>
+          <a:lnRef idx="1">
+            <a:schemeClr val="accent1"/>
+          </a:lnRef>
+          <a:fillRef idx="3">
+            <a:schemeClr val="accent1"/>
+          </a:fillRef>
+          <a:effectRef idx="2">
+            <a:schemeClr val="accent1"/>
+          </a:effectRef>
+          <a:fontRef idx="minor">
+            <a:schemeClr val="lt1"/>
+          </a:fontRef>
+        </p:style>
+        <p:txBody>
+          <a:bodyPr rtlCol="0" anchor="ctr"/>
+          <a:lstStyle/>
+          <a:p/>
+        </p:txBody>
+      </p:sp>
+      <p:sp>
+        <p:nvSpPr>
+          <p:cNvPr id="6" name="TextBox 5"/>
+          <p:cNvSpPr txBox="1"/>
+          <p:nvPr/>
+        </p:nvSpPr>
+        <p:spPr>
+          <a:xfrm>
+            <a:off x="731520" y="2606040"/>
+            <a:ext cx="4937760" cy="502920"/>
+          </a:xfrm>
+          <a:prstGeom prst="rect">
+            <a:avLst/>
+          </a:prstGeom>
+          <a:noFill/>
+        </p:spPr>
+        <p:txBody>
+          <a:bodyPr wrap="square" anchor="t" lIns="73152" rIns="73152" tIns="36576" bIns="36576">
+            <a:spAutoFit/>
+          </a:bodyPr>
+          <a:lstStyle/>
+          <a:p>
+            <a:pPr algn="ctr"/>
+            <a:r>
+              <a:rPr sz="2200" b="0" i="0">
+                <a:solidFill>
+                  <a:srgbClr val="4A5568"/>
+                </a:solidFill>
+                <a:latin typeface="Calibri"/>
+              </a:rPr>
+              <a:t>cota do desenho</a:t>
+            </a:r>
+          </a:p>
+        </p:txBody>
+      </p:sp>
+      <p:sp>
+        <p:nvSpPr>
+          <p:cNvPr id="7" name="TextBox 6"/>
+          <p:cNvSpPr txBox="1"/>
+          <p:nvPr/>
+        </p:nvSpPr>
+        <p:spPr>
+          <a:xfrm>
+            <a:off x="731520" y="3017520"/>
+            <a:ext cx="4937760" cy="2103120"/>
+          </a:xfrm>
+          <a:prstGeom prst="rect">
+            <a:avLst/>
+          </a:prstGeom>
+          <a:noFill/>
+        </p:spPr>
+        <p:txBody>
+          <a:bodyPr wrap="square" anchor="ctr" lIns="73152" rIns="73152" tIns="36576" bIns="36576">
+            <a:spAutoFit/>
+          </a:bodyPr>
+          <a:lstStyle/>
+          <a:p>
+            <a:pPr algn="ctr"/>
+            <a:r>
+              <a:rPr sz="6000" b="1" i="0">
+                <a:solidFill>
+                  <a:srgbClr val="002060"/>
+                </a:solidFill>
+                <a:latin typeface="Calibri"/>
+              </a:rPr>
+              <a:t>40 ± 0,3</a:t>
+            </a:r>
+          </a:p>
+        </p:txBody>
+      </p:sp>
+      <p:sp>
+        <p:nvSpPr>
+          <p:cNvPr id="8" name="Linha Nominal"/>
+          <p:cNvSpPr/>
+          <p:nvPr/>
+        </p:nvSpPr>
+        <p:spPr>
+          <a:xfrm>
+            <a:off x="6172200" y="1920239"/>
+            <a:ext cx="5440680" cy="896112"/>
+          </a:xfrm>
+          <a:prstGeom prst="roundRect">
+            <a:avLst>
+              <a:gd name="adj" fmla="val 8000"/>
+            </a:avLst>
+          </a:prstGeom>
+          <a:solidFill>
+            <a:srgbClr val="EEF1F6"/>
+          </a:solidFill>
+          <a:ln>
+            <a:noFill/>
+          </a:ln>
+          <a:effectLst/>
+        </p:spPr>
+        <p:style>
+          <a:lnRef idx="1">
+            <a:schemeClr val="accent1"/>
+          </a:lnRef>
+          <a:fillRef idx="3">
+            <a:schemeClr val="accent1"/>
+          </a:fillRef>
+          <a:effectRef idx="2">
+            <a:schemeClr val="accent1"/>
+          </a:effectRef>
+          <a:fontRef idx="minor">
+            <a:schemeClr val="lt1"/>
+          </a:fontRef>
+        </p:style>
+        <p:txBody>
+          <a:bodyPr rtlCol="0" anchor="ctr"/>
+          <a:lstStyle/>
+          <a:p/>
+        </p:txBody>
+      </p:sp>
+      <p:sp>
+        <p:nvSpPr>
+          <p:cNvPr id="9" name="TextBox 8"/>
+          <p:cNvSpPr txBox="1"/>
+          <p:nvPr/>
+        </p:nvSpPr>
+        <p:spPr>
+          <a:xfrm>
+            <a:off x="6355080" y="1920239"/>
+            <a:ext cx="1783080" cy="896112"/>
+          </a:xfrm>
+          <a:prstGeom prst="rect">
+            <a:avLst/>
+          </a:prstGeom>
+          <a:noFill/>
+        </p:spPr>
+        <p:txBody>
+          <a:bodyPr wrap="square" anchor="ctr" lIns="73152" rIns="73152" tIns="36576" bIns="36576">
+            <a:spAutoFit/>
+          </a:bodyPr>
+          <a:lstStyle/>
+          <a:p>
+            <a:pPr algn="l"/>
+            <a:r>
+              <a:rPr sz="2800" b="1" i="0">
+                <a:solidFill>
+                  <a:srgbClr val="002060"/>
+                </a:solidFill>
+                <a:latin typeface="Calibri"/>
+              </a:rPr>
+              <a:t>Nominal</a:t>
+            </a:r>
+          </a:p>
+        </p:txBody>
+      </p:sp>
+      <p:sp>
+        <p:nvSpPr>
+          <p:cNvPr id="10" name="Resposta Nominal"/>
+          <p:cNvSpPr/>
+          <p:nvPr/>
+        </p:nvSpPr>
+        <p:spPr>
+          <a:xfrm>
+            <a:off x="8183879" y="2029967"/>
+            <a:ext cx="1783080" cy="676656"/>
+          </a:xfrm>
+          <a:prstGeom prst="roundRect">
+            <a:avLst>
+              <a:gd name="adj" fmla="val 8000"/>
+            </a:avLst>
+          </a:prstGeom>
+          <a:solidFill>
+            <a:srgbClr val="FFFFFF"/>
+          </a:solidFill>
+          <a:ln w="19050">
+            <a:solidFill>
+              <a:srgbClr val="1E7A46"/>
+            </a:solidFill>
+          </a:ln>
+          <a:effectLst/>
+        </p:spPr>
+        <p:style>
+          <a:lnRef idx="1">
+            <a:schemeClr val="accent1"/>
+          </a:lnRef>
+          <a:fillRef idx="3">
+            <a:schemeClr val="accent1"/>
+          </a:fillRef>
+          <a:effectRef idx="2">
+            <a:schemeClr val="accent1"/>
+          </a:effectRef>
+          <a:fontRef idx="minor">
+            <a:schemeClr val="lt1"/>
+          </a:fontRef>
+        </p:style>
+        <p:txBody>
+          <a:bodyPr rtlCol="0" anchor="ctr"/>
+          <a:lstStyle/>
+          <a:p/>
+        </p:txBody>
+      </p:sp>
+      <p:sp>
+        <p:nvSpPr>
+          <p:cNvPr id="11" name="TextBox 10"/>
+          <p:cNvSpPr txBox="1"/>
+          <p:nvPr/>
+        </p:nvSpPr>
+        <p:spPr>
+          <a:xfrm>
+            <a:off x="8183879" y="2029967"/>
+            <a:ext cx="1783080" cy="676656"/>
+          </a:xfrm>
+          <a:prstGeom prst="rect">
+            <a:avLst/>
+          </a:prstGeom>
+          <a:noFill/>
+        </p:spPr>
+        <p:txBody>
+          <a:bodyPr wrap="square" anchor="ctr" lIns="73152" rIns="73152" tIns="36576" bIns="36576">
+            <a:spAutoFit/>
+          </a:bodyPr>
+          <a:lstStyle/>
+          <a:p>
+            <a:pPr algn="ctr"/>
+            <a:r>
+              <a:rPr sz="3000" b="1" i="0">
+                <a:solidFill>
+                  <a:srgbClr val="1E7A46"/>
+                </a:solidFill>
+                <a:latin typeface="Calibri"/>
+              </a:rPr>
+              <a:t>40</a:t>
+            </a:r>
+          </a:p>
+        </p:txBody>
+      </p:sp>
+      <p:sp>
+        <p:nvSpPr>
+          <p:cNvPr id="12" name="TextBox 11"/>
+          <p:cNvSpPr txBox="1"/>
+          <p:nvPr/>
+        </p:nvSpPr>
+        <p:spPr>
+          <a:xfrm>
+            <a:off x="10012680" y="1920239"/>
+            <a:ext cx="1554480" cy="896112"/>
+          </a:xfrm>
+          <a:prstGeom prst="rect">
+            <a:avLst/>
+          </a:prstGeom>
+          <a:noFill/>
+        </p:spPr>
+        <p:txBody>
+          <a:bodyPr wrap="square" anchor="ctr" lIns="73152" rIns="73152" tIns="36576" bIns="36576">
+            <a:spAutoFit/>
+          </a:bodyPr>
+          <a:lstStyle/>
+          <a:p>
+            <a:pPr algn="l"/>
+            <a:r>
+              <a:rPr sz="2000" b="0" i="0">
+                <a:solidFill>
+                  <a:srgbClr val="4A5568"/>
+                </a:solidFill>
+                <a:latin typeface="Calibri"/>
+              </a:rPr>
+              <a:t>antes do ±</a:t>
+            </a:r>
+          </a:p>
+        </p:txBody>
+      </p:sp>
+      <p:sp>
+        <p:nvSpPr>
+          <p:cNvPr id="13" name="Linha Máxima"/>
+          <p:cNvSpPr/>
+          <p:nvPr/>
+        </p:nvSpPr>
+        <p:spPr>
+          <a:xfrm>
+            <a:off x="6172200" y="2926079"/>
+            <a:ext cx="5440680" cy="896112"/>
+          </a:xfrm>
+          <a:prstGeom prst="roundRect">
+            <a:avLst>
+              <a:gd name="adj" fmla="val 8000"/>
+            </a:avLst>
+          </a:prstGeom>
+          <a:solidFill>
+            <a:srgbClr val="EEF1F6"/>
+          </a:solidFill>
+          <a:ln>
+            <a:noFill/>
+          </a:ln>
+          <a:effectLst/>
+        </p:spPr>
+        <p:style>
+          <a:lnRef idx="1">
+            <a:schemeClr val="accent1"/>
+          </a:lnRef>
+          <a:fillRef idx="3">
+            <a:schemeClr val="accent1"/>
+          </a:fillRef>
+          <a:effectRef idx="2">
+            <a:schemeClr val="accent1"/>
+          </a:effectRef>
+          <a:fontRef idx="minor">
+            <a:schemeClr val="lt1"/>
+          </a:fontRef>
+        </p:style>
+        <p:txBody>
+          <a:bodyPr rtlCol="0" anchor="ctr"/>
+          <a:lstStyle/>
+          <a:p/>
+        </p:txBody>
+      </p:sp>
+      <p:sp>
+        <p:nvSpPr>
+          <p:cNvPr id="14" name="TextBox 13"/>
+          <p:cNvSpPr txBox="1"/>
+          <p:nvPr/>
+        </p:nvSpPr>
+        <p:spPr>
+          <a:xfrm>
+            <a:off x="6355080" y="2926079"/>
+            <a:ext cx="1783080" cy="896112"/>
+          </a:xfrm>
+          <a:prstGeom prst="rect">
+            <a:avLst/>
+          </a:prstGeom>
+          <a:noFill/>
+        </p:spPr>
+        <p:txBody>
+          <a:bodyPr wrap="square" anchor="ctr" lIns="73152" rIns="73152" tIns="36576" bIns="36576">
+            <a:spAutoFit/>
+          </a:bodyPr>
+          <a:lstStyle/>
+          <a:p>
+            <a:pPr algn="l"/>
+            <a:r>
+              <a:rPr sz="2800" b="1" i="0">
+                <a:solidFill>
+                  <a:srgbClr val="002060"/>
+                </a:solidFill>
+                <a:latin typeface="Calibri"/>
+              </a:rPr>
+              <a:t>Máxima</a:t>
+            </a:r>
+          </a:p>
+        </p:txBody>
+      </p:sp>
+      <p:sp>
+        <p:nvSpPr>
+          <p:cNvPr id="15" name="Resposta Máxima"/>
+          <p:cNvSpPr/>
+          <p:nvPr/>
+        </p:nvSpPr>
+        <p:spPr>
+          <a:xfrm>
+            <a:off x="8183879" y="3035808"/>
+            <a:ext cx="1783080" cy="676656"/>
+          </a:xfrm>
+          <a:prstGeom prst="roundRect">
+            <a:avLst>
+              <a:gd name="adj" fmla="val 8000"/>
+            </a:avLst>
+          </a:prstGeom>
+          <a:solidFill>
+            <a:srgbClr val="FFFFFF"/>
+          </a:solidFill>
+          <a:ln w="19050">
+            <a:solidFill>
+              <a:srgbClr val="1E7A46"/>
+            </a:solidFill>
+          </a:ln>
+          <a:effectLst/>
+        </p:spPr>
+        <p:style>
+          <a:lnRef idx="1">
+            <a:schemeClr val="accent1"/>
+          </a:lnRef>
+          <a:fillRef idx="3">
+            <a:schemeClr val="accent1"/>
+          </a:fillRef>
+          <a:effectRef idx="2">
+            <a:schemeClr val="accent1"/>
+          </a:effectRef>
+          <a:fontRef idx="minor">
+            <a:schemeClr val="lt1"/>
+          </a:fontRef>
+        </p:style>
+        <p:txBody>
+          <a:bodyPr rtlCol="0" anchor="ctr"/>
+          <a:lstStyle/>
+          <a:p/>
+        </p:txBody>
+      </p:sp>
+      <p:sp>
+        <p:nvSpPr>
+          <p:cNvPr id="16" name="TextBox 15"/>
+          <p:cNvSpPr txBox="1"/>
+          <p:nvPr/>
+        </p:nvSpPr>
+        <p:spPr>
+          <a:xfrm>
+            <a:off x="8183879" y="3035808"/>
+            <a:ext cx="1783080" cy="676656"/>
+          </a:xfrm>
+          <a:prstGeom prst="rect">
+            <a:avLst/>
+          </a:prstGeom>
+          <a:noFill/>
+        </p:spPr>
+        <p:txBody>
+          <a:bodyPr wrap="square" anchor="ctr" lIns="73152" rIns="73152" tIns="36576" bIns="36576">
+            <a:spAutoFit/>
+          </a:bodyPr>
+          <a:lstStyle/>
+          <a:p>
+            <a:pPr algn="ctr"/>
+            <a:r>
+              <a:rPr sz="3000" b="1" i="0">
+                <a:solidFill>
+                  <a:srgbClr val="1E7A46"/>
+                </a:solidFill>
+                <a:latin typeface="Calibri"/>
+              </a:rPr>
+              <a:t>40,3</a:t>
+            </a:r>
+          </a:p>
+        </p:txBody>
+      </p:sp>
+      <p:sp>
+        <p:nvSpPr>
+          <p:cNvPr id="17" name="TextBox 16"/>
+          <p:cNvSpPr txBox="1"/>
+          <p:nvPr/>
+        </p:nvSpPr>
+        <p:spPr>
+          <a:xfrm>
+            <a:off x="10012680" y="2926079"/>
+            <a:ext cx="1554480" cy="896112"/>
+          </a:xfrm>
+          <a:prstGeom prst="rect">
+            <a:avLst/>
+          </a:prstGeom>
+          <a:noFill/>
+        </p:spPr>
+        <p:txBody>
+          <a:bodyPr wrap="square" anchor="ctr" lIns="73152" rIns="73152" tIns="36576" bIns="36576">
+            <a:spAutoFit/>
+          </a:bodyPr>
+          <a:lstStyle/>
+          <a:p>
+            <a:pPr algn="l"/>
+            <a:r>
+              <a:rPr sz="2000" b="0" i="0">
+                <a:solidFill>
+                  <a:srgbClr val="4A5568"/>
+                </a:solidFill>
+                <a:latin typeface="Calibri"/>
+              </a:rPr>
+              <a:t>40 + 0,3</a:t>
+            </a:r>
+          </a:p>
+        </p:txBody>
+      </p:sp>
+      <p:sp>
+        <p:nvSpPr>
+          <p:cNvPr id="18" name="Linha Mínima"/>
+          <p:cNvSpPr/>
+          <p:nvPr/>
+        </p:nvSpPr>
+        <p:spPr>
+          <a:xfrm>
+            <a:off x="6172200" y="3931920"/>
+            <a:ext cx="5440680" cy="896112"/>
+          </a:xfrm>
+          <a:prstGeom prst="roundRect">
+            <a:avLst>
+              <a:gd name="adj" fmla="val 8000"/>
+            </a:avLst>
+          </a:prstGeom>
+          <a:solidFill>
+            <a:srgbClr val="EEF1F6"/>
+          </a:solidFill>
+          <a:ln>
+            <a:noFill/>
+          </a:ln>
+          <a:effectLst/>
+        </p:spPr>
+        <p:style>
+          <a:lnRef idx="1">
+            <a:schemeClr val="accent1"/>
+          </a:lnRef>
+          <a:fillRef idx="3">
+            <a:schemeClr val="accent1"/>
+          </a:fillRef>
+          <a:effectRef idx="2">
+            <a:schemeClr val="accent1"/>
+          </a:effectRef>
+          <a:fontRef idx="minor">
+            <a:schemeClr val="lt1"/>
+          </a:fontRef>
+        </p:style>
+        <p:txBody>
+          <a:bodyPr rtlCol="0" anchor="ctr"/>
+          <a:lstStyle/>
+          <a:p/>
+        </p:txBody>
+      </p:sp>
+      <p:sp>
+        <p:nvSpPr>
+          <p:cNvPr id="19" name="TextBox 18"/>
+          <p:cNvSpPr txBox="1"/>
+          <p:nvPr/>
+        </p:nvSpPr>
+        <p:spPr>
+          <a:xfrm>
+            <a:off x="6355080" y="3931920"/>
+            <a:ext cx="1783080" cy="896112"/>
+          </a:xfrm>
+          <a:prstGeom prst="rect">
+            <a:avLst/>
+          </a:prstGeom>
+          <a:noFill/>
+        </p:spPr>
+        <p:txBody>
+          <a:bodyPr wrap="square" anchor="ctr" lIns="73152" rIns="73152" tIns="36576" bIns="36576">
+            <a:spAutoFit/>
+          </a:bodyPr>
+          <a:lstStyle/>
+          <a:p>
+            <a:pPr algn="l"/>
+            <a:r>
+              <a:rPr sz="2800" b="1" i="0">
+                <a:solidFill>
+                  <a:srgbClr val="002060"/>
+                </a:solidFill>
+                <a:latin typeface="Calibri"/>
+              </a:rPr>
+              <a:t>Mínima</a:t>
+            </a:r>
+          </a:p>
+        </p:txBody>
+      </p:sp>
+      <p:sp>
+        <p:nvSpPr>
+          <p:cNvPr id="20" name="Resposta Mínima"/>
+          <p:cNvSpPr/>
+          <p:nvPr/>
+        </p:nvSpPr>
+        <p:spPr>
+          <a:xfrm>
+            <a:off x="8183879" y="4041648"/>
+            <a:ext cx="1783080" cy="676656"/>
+          </a:xfrm>
+          <a:prstGeom prst="roundRect">
+            <a:avLst>
+              <a:gd name="adj" fmla="val 8000"/>
+            </a:avLst>
+          </a:prstGeom>
+          <a:solidFill>
+            <a:srgbClr val="FFFFFF"/>
+          </a:solidFill>
+          <a:ln w="19050">
+            <a:solidFill>
+              <a:srgbClr val="1E7A46"/>
+            </a:solidFill>
+          </a:ln>
+          <a:effectLst/>
+        </p:spPr>
+        <p:style>
+          <a:lnRef idx="1">
+            <a:schemeClr val="accent1"/>
+          </a:lnRef>
+          <a:fillRef idx="3">
+            <a:schemeClr val="accent1"/>
+          </a:fillRef>
+          <a:effectRef idx="2">
+            <a:schemeClr val="accent1"/>
+          </a:effectRef>
+          <a:fontRef idx="minor">
+            <a:schemeClr val="lt1"/>
+          </a:fontRef>
+        </p:style>
+        <p:txBody>
+          <a:bodyPr rtlCol="0" anchor="ctr"/>
+          <a:lstStyle/>
+          <a:p/>
+        </p:txBody>
+      </p:sp>
+      <p:sp>
+        <p:nvSpPr>
+          <p:cNvPr id="21" name="TextBox 20"/>
+          <p:cNvSpPr txBox="1"/>
+          <p:nvPr/>
+        </p:nvSpPr>
+        <p:spPr>
+          <a:xfrm>
+            <a:off x="8183879" y="4041648"/>
+            <a:ext cx="1783080" cy="676656"/>
+          </a:xfrm>
+          <a:prstGeom prst="rect">
+            <a:avLst/>
+          </a:prstGeom>
+          <a:noFill/>
+        </p:spPr>
+        <p:txBody>
+          <a:bodyPr wrap="square" anchor="ctr" lIns="73152" rIns="73152" tIns="36576" bIns="36576">
+            <a:spAutoFit/>
+          </a:bodyPr>
+          <a:lstStyle/>
+          <a:p>
+            <a:pPr algn="ctr"/>
+            <a:r>
+              <a:rPr sz="3000" b="1" i="0">
+                <a:solidFill>
+                  <a:srgbClr val="1E7A46"/>
+                </a:solidFill>
+                <a:latin typeface="Calibri"/>
+              </a:rPr>
+              <a:t>39,7</a:t>
+            </a:r>
+          </a:p>
+        </p:txBody>
+      </p:sp>
+      <p:sp>
+        <p:nvSpPr>
+          <p:cNvPr id="22" name="TextBox 21"/>
+          <p:cNvSpPr txBox="1"/>
+          <p:nvPr/>
+        </p:nvSpPr>
+        <p:spPr>
+          <a:xfrm>
+            <a:off x="10012680" y="3931920"/>
+            <a:ext cx="1554480" cy="896112"/>
+          </a:xfrm>
+          <a:prstGeom prst="rect">
+            <a:avLst/>
+          </a:prstGeom>
+          <a:noFill/>
+        </p:spPr>
+        <p:txBody>
+          <a:bodyPr wrap="square" anchor="ctr" lIns="73152" rIns="73152" tIns="36576" bIns="36576">
+            <a:spAutoFit/>
+          </a:bodyPr>
+          <a:lstStyle/>
+          <a:p>
+            <a:pPr algn="l"/>
+            <a:r>
+              <a:rPr sz="2000" b="0" i="0">
+                <a:solidFill>
+                  <a:srgbClr val="4A5568"/>
+                </a:solidFill>
+                <a:latin typeface="Calibri"/>
+              </a:rPr>
+              <a:t>40 − 0,3</a:t>
+            </a:r>
+          </a:p>
+        </p:txBody>
+      </p:sp>
+      <p:sp>
+        <p:nvSpPr>
+          <p:cNvPr id="23" name="Linha Faixa"/>
+          <p:cNvSpPr/>
+          <p:nvPr/>
+        </p:nvSpPr>
+        <p:spPr>
+          <a:xfrm>
+            <a:off x="6172200" y="4937760"/>
+            <a:ext cx="5440680" cy="896112"/>
+          </a:xfrm>
+          <a:prstGeom prst="roundRect">
+            <a:avLst>
+              <a:gd name="adj" fmla="val 8000"/>
+            </a:avLst>
+          </a:prstGeom>
+          <a:solidFill>
+            <a:srgbClr val="EEF1F6"/>
+          </a:solidFill>
+          <a:ln>
+            <a:noFill/>
+          </a:ln>
+          <a:effectLst/>
+        </p:spPr>
+        <p:style>
+          <a:lnRef idx="1">
+            <a:schemeClr val="accent1"/>
+          </a:lnRef>
+          <a:fillRef idx="3">
+            <a:schemeClr val="accent1"/>
+          </a:fillRef>
+          <a:effectRef idx="2">
+            <a:schemeClr val="accent1"/>
+          </a:effectRef>
+          <a:fontRef idx="minor">
+            <a:schemeClr val="lt1"/>
+          </a:fontRef>
+        </p:style>
+        <p:txBody>
+          <a:bodyPr rtlCol="0" anchor="ctr"/>
+          <a:lstStyle/>
+          <a:p/>
+        </p:txBody>
+      </p:sp>
+      <p:sp>
+        <p:nvSpPr>
+          <p:cNvPr id="24" name="TextBox 23"/>
+          <p:cNvSpPr txBox="1"/>
+          <p:nvPr/>
+        </p:nvSpPr>
+        <p:spPr>
+          <a:xfrm>
+            <a:off x="6355080" y="4937760"/>
+            <a:ext cx="1783080" cy="896112"/>
+          </a:xfrm>
+          <a:prstGeom prst="rect">
+            <a:avLst/>
+          </a:prstGeom>
+          <a:noFill/>
+        </p:spPr>
+        <p:txBody>
+          <a:bodyPr wrap="square" anchor="ctr" lIns="73152" rIns="73152" tIns="36576" bIns="36576">
+            <a:spAutoFit/>
+          </a:bodyPr>
+          <a:lstStyle/>
+          <a:p>
+            <a:pPr algn="l"/>
+            <a:r>
+              <a:rPr sz="2800" b="1" i="0">
+                <a:solidFill>
+                  <a:srgbClr val="002060"/>
+                </a:solidFill>
+                <a:latin typeface="Calibri"/>
+              </a:rPr>
+              <a:t>Faixa</a:t>
+            </a:r>
+          </a:p>
+        </p:txBody>
+      </p:sp>
+      <p:sp>
+        <p:nvSpPr>
+          <p:cNvPr id="25" name="Resposta Faixa"/>
+          <p:cNvSpPr/>
+          <p:nvPr/>
+        </p:nvSpPr>
+        <p:spPr>
+          <a:xfrm>
+            <a:off x="8183879" y="5047488"/>
+            <a:ext cx="1783080" cy="676656"/>
+          </a:xfrm>
+          <a:prstGeom prst="roundRect">
+            <a:avLst>
+              <a:gd name="adj" fmla="val 8000"/>
+            </a:avLst>
+          </a:prstGeom>
+          <a:solidFill>
+            <a:srgbClr val="FFFFFF"/>
+          </a:solidFill>
+          <a:ln w="19050">
+            <a:solidFill>
+              <a:srgbClr val="1E7A46"/>
+            </a:solidFill>
+          </a:ln>
+          <a:effectLst/>
+        </p:spPr>
+        <p:style>
+          <a:lnRef idx="1">
+            <a:schemeClr val="accent1"/>
+          </a:lnRef>
+          <a:fillRef idx="3">
+            <a:schemeClr val="accent1"/>
+          </a:fillRef>
+          <a:effectRef idx="2">
+            <a:schemeClr val="accent1"/>
+          </a:effectRef>
+          <a:fontRef idx="minor">
+            <a:schemeClr val="lt1"/>
+          </a:fontRef>
+        </p:style>
+        <p:txBody>
+          <a:bodyPr rtlCol="0" anchor="ctr"/>
+          <a:lstStyle/>
+          <a:p/>
+        </p:txBody>
+      </p:sp>
+      <p:sp>
+        <p:nvSpPr>
+          <p:cNvPr id="26" name="TextBox 25"/>
+          <p:cNvSpPr txBox="1"/>
+          <p:nvPr/>
+        </p:nvSpPr>
+        <p:spPr>
+          <a:xfrm>
+            <a:off x="8183879" y="5047488"/>
+            <a:ext cx="1783080" cy="676656"/>
+          </a:xfrm>
+          <a:prstGeom prst="rect">
+            <a:avLst/>
+          </a:prstGeom>
+          <a:noFill/>
+        </p:spPr>
+        <p:txBody>
+          <a:bodyPr wrap="square" anchor="ctr" lIns="73152" rIns="73152" tIns="36576" bIns="36576">
+            <a:spAutoFit/>
+          </a:bodyPr>
+          <a:lstStyle/>
+          <a:p>
+            <a:pPr algn="ctr"/>
+            <a:r>
+              <a:rPr sz="3000" b="1" i="0">
+                <a:solidFill>
+                  <a:srgbClr val="1E7A46"/>
+                </a:solidFill>
+                <a:latin typeface="Calibri"/>
+              </a:rPr>
+              <a:t>0,6</a:t>
+            </a:r>
+          </a:p>
+        </p:txBody>
+      </p:sp>
+      <p:sp>
+        <p:nvSpPr>
+          <p:cNvPr id="27" name="TextBox 26"/>
+          <p:cNvSpPr txBox="1"/>
+          <p:nvPr/>
+        </p:nvSpPr>
+        <p:spPr>
+          <a:xfrm>
+            <a:off x="10012680" y="4937760"/>
+            <a:ext cx="1554480" cy="896112"/>
+          </a:xfrm>
+          <a:prstGeom prst="rect">
+            <a:avLst/>
+          </a:prstGeom>
+          <a:noFill/>
+        </p:spPr>
+        <p:txBody>
+          <a:bodyPr wrap="square" anchor="ctr" lIns="73152" rIns="73152" tIns="36576" bIns="36576">
+            <a:spAutoFit/>
+          </a:bodyPr>
+          <a:lstStyle/>
+          <a:p>
+            <a:pPr algn="l"/>
+            <a:r>
+              <a:rPr sz="2000" b="0" i="0">
+                <a:solidFill>
+                  <a:srgbClr val="4A5568"/>
+                </a:solidFill>
+                <a:latin typeface="Calibri"/>
+              </a:rPr>
+              <a:t>40,3 − 39,7</a:t>
             </a:r>
           </a:p>
         </p:txBody>
